--- a/documentation/StocksInvesthink_Phase4.pptx
+++ b/documentation/StocksInvesthink_Phase4.pptx
@@ -379,7 +379,7 @@
             <a:pPr indent="0" algn="r">
               <a:buNone/>
             </a:pPr>
-            <a:fld id="{2D16490C-0CE5-4A28-B7A7-C4D618DCB052}" type="slidenum">
+            <a:fld id="{1AC80C88-E866-4080-A8D7-3306BE16386E}" type="slidenum">
               <a:rPr lang="es-CO" sz="1400" b="0" u="none" strike="noStrike">
                 <a:solidFill>
                   <a:srgbClr val="000000"/>
@@ -1703,7 +1703,7 @@
         <p:spPr>
           <a:xfrm>
             <a:off x="-360" y="-360"/>
-            <a:ext cx="720" cy="720"/>
+            <a:ext cx="360" cy="360"/>
           </a:xfrm>
           <a:prstGeom prst="rect">
             <a:avLst/>
@@ -2618,8 +2618,8 @@
 </file>
 
 <file path=ppt/slideLayouts/slideLayout1.xml><?xml version="1.0" encoding="utf-8"?>
-<p:sldLayout xmlns:a="http://schemas.openxmlformats.org/drawingml/2006/main" xmlns:p="http://schemas.openxmlformats.org/presentationml/2006/main" xmlns:r="http://schemas.openxmlformats.org/officeDocument/2006/relationships" xmlns:p14="http://schemas.microsoft.com/office/powerpoint/2010/main" xmlns:p15="http://schemas.microsoft.com/office/powerpoint/2012/main" xmlns:mc="http://schemas.openxmlformats.org/markup-compatibility/2006" type="twoObj" preserve="1">
-  <p:cSld name="Two Content">
+<p:sldLayout xmlns:a="http://schemas.openxmlformats.org/drawingml/2006/main" xmlns:p="http://schemas.openxmlformats.org/presentationml/2006/main" xmlns:r="http://schemas.openxmlformats.org/officeDocument/2006/relationships" xmlns:p14="http://schemas.microsoft.com/office/powerpoint/2010/main" xmlns:p15="http://schemas.microsoft.com/office/powerpoint/2012/main" xmlns:mc="http://schemas.openxmlformats.org/markup-compatibility/2006" type="vertTitleAndTx" preserve="1">
+  <p:cSld name="Vertical Title and Text">
     <p:bg>
       <p:bgPr>
         <a:solidFill>
@@ -2653,8 +2653,8 @@
         </p:nvSpPr>
         <p:spPr>
           <a:xfrm>
-            <a:off x="457200" y="274680"/>
-            <a:ext cx="8228520" cy="1141920"/>
+            <a:off x="6629400" y="274680"/>
+            <a:ext cx="2055960" cy="5850000"/>
           </a:xfrm>
           <a:prstGeom prst="rect">
             <a:avLst/>
@@ -2665,7 +2665,7 @@
           </a:ln>
         </p:spPr>
         <p:txBody>
-          <a:bodyPr lIns="91440" tIns="45720" rIns="91440" bIns="45720" anchor="ctr">
+          <a:bodyPr lIns="91440" tIns="45720" rIns="91440" bIns="45720" anchor="ctr" vert="eaVert">
             <a:noAutofit/>
           </a:bodyPr>
           <a:lstStyle>
@@ -2706,29 +2706,7 @@
                 <a:uFillTx/>
                 <a:latin typeface="Calibri"/>
               </a:rPr>
-              <a:t>Click to edit </a:t>
-            </a:r>
-            <a:r>
-              <a:rPr lang="en-US" sz="4400" b="0" u="none" strike="noStrike">
-                <a:solidFill>
-                  <a:schemeClr val="dk1"/>
-                </a:solidFill>
-                <a:effectLst/>
-                <a:uFillTx/>
-                <a:latin typeface="Calibri"/>
-              </a:rPr>
-              <a:t>Master title </a:t>
-            </a:r>
-            <a:r>
-              <a:rPr lang="en-US" sz="4400" b="0" u="none" strike="noStrike">
-                <a:solidFill>
-                  <a:schemeClr val="dk1"/>
-                </a:solidFill>
-                <a:effectLst/>
-                <a:uFillTx/>
-                <a:latin typeface="Calibri"/>
-              </a:rPr>
-              <a:t>style</a:t>
+              <a:t>Click to edit Master title style</a:t>
             </a:r>
             <a:endParaRPr lang="en-US" sz="4400" b="0" u="none" strike="noStrike">
               <a:solidFill>
@@ -2753,8 +2731,8 @@
         </p:nvSpPr>
         <p:spPr>
           <a:xfrm>
-            <a:off x="457200" y="1600200"/>
-            <a:ext cx="4037400" cy="4524840"/>
+            <a:off x="457200" y="274680"/>
+            <a:ext cx="6018480" cy="5850000"/>
           </a:xfrm>
           <a:prstGeom prst="rect">
             <a:avLst/>
@@ -2765,7 +2743,7 @@
           </a:ln>
         </p:spPr>
         <p:txBody>
-          <a:bodyPr lIns="91440" tIns="45720" rIns="91440" bIns="45720" anchor="t">
+          <a:bodyPr lIns="91440" tIns="45720" rIns="91440" bIns="45720" anchor="t" vert="eaVert">
             <a:noAutofit/>
           </a:bodyPr>
           <a:lstStyle>
@@ -2774,13 +2752,34 @@
                 <a:spcPct val="100000"/>
               </a:lnSpc>
               <a:spcBef>
+                <a:spcPts val="641"/>
+              </a:spcBef>
+              <a:buClr>
+                <a:srgbClr val="000000"/>
+              </a:buClr>
+              <a:buFont typeface="Arial"/>
+              <a:buChar char="•"/>
+              <a:defRPr lang="en-US" sz="3200" b="0" u="none" strike="noStrike">
+                <a:solidFill>
+                  <a:schemeClr val="dk1"/>
+                </a:solidFill>
+                <a:effectLst/>
+                <a:uFillTx/>
+                <a:latin typeface="Calibri"/>
+              </a:defRPr>
+            </a:lvl1pPr>
+            <a:lvl2pPr lvl="1" algn="l" defTabSz="457200">
+              <a:lnSpc>
+                <a:spcPct val="100000"/>
+              </a:lnSpc>
+              <a:spcBef>
                 <a:spcPts val="561"/>
               </a:spcBef>
               <a:buClr>
                 <a:srgbClr val="000000"/>
               </a:buClr>
               <a:buFont typeface="Arial"/>
-              <a:buChar char="•"/>
+              <a:buChar char="–"/>
               <a:defRPr lang="en-US" sz="2800" b="0" u="none" strike="noStrike">
                 <a:solidFill>
                   <a:schemeClr val="dk1"/>
@@ -2789,8 +2788,8 @@
                 <a:uFillTx/>
                 <a:latin typeface="Calibri"/>
               </a:defRPr>
-            </a:lvl1pPr>
-            <a:lvl2pPr lvl="1" algn="l" defTabSz="457200">
+            </a:lvl2pPr>
+            <a:lvl3pPr lvl="2" algn="l" defTabSz="457200">
               <a:lnSpc>
                 <a:spcPct val="100000"/>
               </a:lnSpc>
@@ -2801,7 +2800,7 @@
                 <a:srgbClr val="000000"/>
               </a:buClr>
               <a:buFont typeface="Arial"/>
-              <a:buChar char="–"/>
+              <a:buChar char="•"/>
               <a:defRPr lang="en-US" sz="2400" b="0" u="none" strike="noStrike">
                 <a:solidFill>
                   <a:schemeClr val="dk1"/>
@@ -2810,8 +2809,8 @@
                 <a:uFillTx/>
                 <a:latin typeface="Calibri"/>
               </a:defRPr>
-            </a:lvl2pPr>
-            <a:lvl3pPr lvl="2" algn="l" defTabSz="457200">
+            </a:lvl3pPr>
+            <a:lvl4pPr lvl="3" algn="l" defTabSz="457200">
               <a:lnSpc>
                 <a:spcPct val="100000"/>
               </a:lnSpc>
@@ -2822,29 +2821,8 @@
                 <a:srgbClr val="000000"/>
               </a:buClr>
               <a:buFont typeface="Arial"/>
-              <a:buChar char="•"/>
+              <a:buChar char="–"/>
               <a:defRPr lang="en-US" sz="2000" b="0" u="none" strike="noStrike">
-                <a:solidFill>
-                  <a:schemeClr val="dk1"/>
-                </a:solidFill>
-                <a:effectLst/>
-                <a:uFillTx/>
-                <a:latin typeface="Calibri"/>
-              </a:defRPr>
-            </a:lvl3pPr>
-            <a:lvl4pPr lvl="3" algn="l" defTabSz="457200">
-              <a:lnSpc>
-                <a:spcPct val="100000"/>
-              </a:lnSpc>
-              <a:spcBef>
-                <a:spcPts val="360"/>
-              </a:spcBef>
-              <a:buClr>
-                <a:srgbClr val="000000"/>
-              </a:buClr>
-              <a:buFont typeface="Arial"/>
-              <a:buChar char="–"/>
-              <a:defRPr lang="en-US" sz="1800" b="0" u="none" strike="noStrike">
                 <a:solidFill>
                   <a:schemeClr val="dk1"/>
                 </a:solidFill>
@@ -2858,14 +2836,14 @@
                 <a:spcPct val="100000"/>
               </a:lnSpc>
               <a:spcBef>
-                <a:spcPts val="360"/>
+                <a:spcPts val="400"/>
               </a:spcBef>
               <a:buClr>
                 <a:srgbClr val="000000"/>
               </a:buClr>
               <a:buFont typeface="Arial"/>
               <a:buChar char="»"/>
-              <a:defRPr lang="en-US" sz="1800" b="0" u="none" strike="noStrike">
+              <a:defRPr lang="en-US" sz="2000" b="0" u="none" strike="noStrike">
                 <a:solidFill>
                   <a:schemeClr val="dk1"/>
                 </a:solidFill>
@@ -2877,6 +2855,40 @@
           </a:lstStyle>
           <a:p>
             <a:pPr marL="343080" indent="-343080" algn="l" defTabSz="457200">
+              <a:lnSpc>
+                <a:spcPct val="100000"/>
+              </a:lnSpc>
+              <a:spcBef>
+                <a:spcPts val="641"/>
+              </a:spcBef>
+              <a:buClr>
+                <a:srgbClr val="000000"/>
+              </a:buClr>
+              <a:buFont typeface="Arial"/>
+              <a:buChar char="•"/>
+            </a:pPr>
+            <a:r>
+              <a:rPr lang="en-US" sz="3200" b="0" u="none" strike="noStrike">
+                <a:solidFill>
+                  <a:schemeClr val="dk1"/>
+                </a:solidFill>
+                <a:effectLst/>
+                <a:uFillTx/>
+                <a:latin typeface="Calibri"/>
+              </a:rPr>
+              <a:t>Click to edit Master text styles</a:t>
+            </a:r>
+            <a:endParaRPr lang="en-US" sz="3200" b="0" u="none" strike="noStrike">
+              <a:solidFill>
+                <a:schemeClr val="dk1"/>
+              </a:solidFill>
+              <a:effectLst/>
+              <a:uFillTx/>
+              <a:latin typeface="Calibri"/>
+            </a:endParaRPr>
+          </a:p>
+          <a:p>
+            <a:pPr marL="743040" lvl="1" indent="-285840" algn="l" defTabSz="457200">
               <a:lnSpc>
                 <a:spcPct val="100000"/>
               </a:lnSpc>
@@ -2887,7 +2899,7 @@
                 <a:srgbClr val="000000"/>
               </a:buClr>
               <a:buFont typeface="Arial"/>
-              <a:buChar char="•"/>
+              <a:buChar char="–"/>
             </a:pPr>
             <a:r>
               <a:rPr lang="en-US" sz="2800" b="0" u="none" strike="noStrike">
@@ -2898,18 +2910,7 @@
                 <a:uFillTx/>
                 <a:latin typeface="Calibri"/>
               </a:rPr>
-              <a:t>Click to edit Master </a:t>
-            </a:r>
-            <a:r>
-              <a:rPr lang="en-US" sz="2800" b="0" u="none" strike="noStrike">
-                <a:solidFill>
-                  <a:schemeClr val="dk1"/>
-                </a:solidFill>
-                <a:effectLst/>
-                <a:uFillTx/>
-                <a:latin typeface="Calibri"/>
-              </a:rPr>
-              <a:t>text styles</a:t>
+              <a:t>Second level</a:t>
             </a:r>
             <a:endParaRPr lang="en-US" sz="2800" b="0" u="none" strike="noStrike">
               <a:solidFill>
@@ -2921,7 +2922,7 @@
             </a:endParaRPr>
           </a:p>
           <a:p>
-            <a:pPr marL="743040" lvl="1" indent="-285840" algn="l" defTabSz="457200">
+            <a:pPr marL="1143000" lvl="2" indent="-228600" algn="l" defTabSz="457200">
               <a:lnSpc>
                 <a:spcPct val="100000"/>
               </a:lnSpc>
@@ -2932,7 +2933,7 @@
                 <a:srgbClr val="000000"/>
               </a:buClr>
               <a:buFont typeface="Arial"/>
-              <a:buChar char="–"/>
+              <a:buChar char="•"/>
             </a:pPr>
             <a:r>
               <a:rPr lang="en-US" sz="2400" b="0" u="none" strike="noStrike">
@@ -2943,7 +2944,7 @@
                 <a:uFillTx/>
                 <a:latin typeface="Calibri"/>
               </a:rPr>
-              <a:t>Second level</a:t>
+              <a:t>Third level</a:t>
             </a:r>
             <a:endParaRPr lang="en-US" sz="2400" b="0" u="none" strike="noStrike">
               <a:solidFill>
@@ -2955,7 +2956,7 @@
             </a:endParaRPr>
           </a:p>
           <a:p>
-            <a:pPr marL="1143000" lvl="2" indent="-228600" algn="l" defTabSz="457200">
+            <a:pPr marL="1600200" lvl="3" indent="-228600" algn="l" defTabSz="457200">
               <a:lnSpc>
                 <a:spcPct val="100000"/>
               </a:lnSpc>
@@ -2966,7 +2967,7 @@
                 <a:srgbClr val="000000"/>
               </a:buClr>
               <a:buFont typeface="Arial"/>
-              <a:buChar char="•"/>
+              <a:buChar char="–"/>
             </a:pPr>
             <a:r>
               <a:rPr lang="en-US" sz="2000" b="0" u="none" strike="noStrike">
@@ -2977,7 +2978,7 @@
                 <a:uFillTx/>
                 <a:latin typeface="Calibri"/>
               </a:rPr>
-              <a:t>Third level</a:t>
+              <a:t>Fourth level</a:t>
             </a:r>
             <a:endParaRPr lang="en-US" sz="2000" b="0" u="none" strike="noStrike">
               <a:solidFill>
@@ -2989,46 +2990,12 @@
             </a:endParaRPr>
           </a:p>
           <a:p>
-            <a:pPr marL="1600200" lvl="3" indent="-228600" algn="l" defTabSz="457200">
+            <a:pPr marL="2057400" lvl="4" indent="-228600" algn="l" defTabSz="457200">
               <a:lnSpc>
                 <a:spcPct val="100000"/>
               </a:lnSpc>
               <a:spcBef>
-                <a:spcPts val="360"/>
-              </a:spcBef>
-              <a:buClr>
-                <a:srgbClr val="000000"/>
-              </a:buClr>
-              <a:buFont typeface="Arial"/>
-              <a:buChar char="–"/>
-            </a:pPr>
-            <a:r>
-              <a:rPr lang="en-US" sz="1800" b="0" u="none" strike="noStrike">
-                <a:solidFill>
-                  <a:schemeClr val="dk1"/>
-                </a:solidFill>
-                <a:effectLst/>
-                <a:uFillTx/>
-                <a:latin typeface="Calibri"/>
-              </a:rPr>
-              <a:t>Fourth level</a:t>
-            </a:r>
-            <a:endParaRPr lang="en-US" sz="1800" b="0" u="none" strike="noStrike">
-              <a:solidFill>
-                <a:schemeClr val="dk1"/>
-              </a:solidFill>
-              <a:effectLst/>
-              <a:uFillTx/>
-              <a:latin typeface="Calibri"/>
-            </a:endParaRPr>
-          </a:p>
-          <a:p>
-            <a:pPr marL="2057400" lvl="4" indent="-228600" algn="l" defTabSz="457200">
-              <a:lnSpc>
-                <a:spcPct val="100000"/>
-              </a:lnSpc>
-              <a:spcBef>
-                <a:spcPts val="360"/>
+                <a:spcPts val="400"/>
               </a:spcBef>
               <a:buClr>
                 <a:srgbClr val="000000"/>
@@ -3037,7 +3004,7 @@
               <a:buChar char="»"/>
             </a:pPr>
             <a:r>
-              <a:rPr lang="en-US" sz="1800" b="0" u="none" strike="noStrike">
+              <a:rPr lang="en-US" sz="2000" b="0" u="none" strike="noStrike">
                 <a:solidFill>
                   <a:schemeClr val="dk1"/>
                 </a:solidFill>
@@ -3047,7 +3014,7 @@
               </a:rPr>
               <a:t>Fifth level</a:t>
             </a:r>
-            <a:endParaRPr lang="en-US" sz="1800" b="0" u="none" strike="noStrike">
+            <a:endParaRPr lang="en-US" sz="2000" b="0" u="none" strike="noStrike">
               <a:solidFill>
                 <a:schemeClr val="dk1"/>
               </a:solidFill>
@@ -3061,312 +3028,6 @@
       <p:sp>
         <p:nvSpPr>
           <p:cNvPr id="4" name="PlaceHolder 3"/>
-          <p:cNvSpPr>
-            <a:spLocks noGrp="1"/>
-          </p:cNvSpPr>
-          <p:nvPr>
-            <p:ph type="body"/>
-          </p:nvPr>
-        </p:nvSpPr>
-        <p:spPr>
-          <a:xfrm>
-            <a:off x="4648320" y="1600200"/>
-            <a:ext cx="4037400" cy="4524840"/>
-          </a:xfrm>
-          <a:prstGeom prst="rect">
-            <a:avLst/>
-          </a:prstGeom>
-          <a:noFill/>
-          <a:ln w="0">
-            <a:noFill/>
-          </a:ln>
-        </p:spPr>
-        <p:txBody>
-          <a:bodyPr lIns="91440" tIns="45720" rIns="91440" bIns="45720" anchor="t">
-            <a:noAutofit/>
-          </a:bodyPr>
-          <a:lstStyle>
-            <a:lvl1pPr algn="l" defTabSz="457200">
-              <a:lnSpc>
-                <a:spcPct val="100000"/>
-              </a:lnSpc>
-              <a:spcBef>
-                <a:spcPts val="561"/>
-              </a:spcBef>
-              <a:buClr>
-                <a:srgbClr val="000000"/>
-              </a:buClr>
-              <a:buFont typeface="Arial"/>
-              <a:buChar char="•"/>
-              <a:defRPr lang="en-US" sz="2800" b="0" u="none" strike="noStrike">
-                <a:solidFill>
-                  <a:schemeClr val="dk1"/>
-                </a:solidFill>
-                <a:effectLst/>
-                <a:uFillTx/>
-                <a:latin typeface="Calibri"/>
-              </a:defRPr>
-            </a:lvl1pPr>
-            <a:lvl2pPr lvl="1" algn="l" defTabSz="457200">
-              <a:lnSpc>
-                <a:spcPct val="100000"/>
-              </a:lnSpc>
-              <a:spcBef>
-                <a:spcPts val="479"/>
-              </a:spcBef>
-              <a:buClr>
-                <a:srgbClr val="000000"/>
-              </a:buClr>
-              <a:buFont typeface="Arial"/>
-              <a:buChar char="–"/>
-              <a:defRPr lang="en-US" sz="2400" b="0" u="none" strike="noStrike">
-                <a:solidFill>
-                  <a:schemeClr val="dk1"/>
-                </a:solidFill>
-                <a:effectLst/>
-                <a:uFillTx/>
-                <a:latin typeface="Calibri"/>
-              </a:defRPr>
-            </a:lvl2pPr>
-            <a:lvl3pPr lvl="2" algn="l" defTabSz="457200">
-              <a:lnSpc>
-                <a:spcPct val="100000"/>
-              </a:lnSpc>
-              <a:spcBef>
-                <a:spcPts val="400"/>
-              </a:spcBef>
-              <a:buClr>
-                <a:srgbClr val="000000"/>
-              </a:buClr>
-              <a:buFont typeface="Arial"/>
-              <a:buChar char="•"/>
-              <a:defRPr lang="en-US" sz="2000" b="0" u="none" strike="noStrike">
-                <a:solidFill>
-                  <a:schemeClr val="dk1"/>
-                </a:solidFill>
-                <a:effectLst/>
-                <a:uFillTx/>
-                <a:latin typeface="Calibri"/>
-              </a:defRPr>
-            </a:lvl3pPr>
-            <a:lvl4pPr lvl="3" algn="l" defTabSz="457200">
-              <a:lnSpc>
-                <a:spcPct val="100000"/>
-              </a:lnSpc>
-              <a:spcBef>
-                <a:spcPts val="360"/>
-              </a:spcBef>
-              <a:buClr>
-                <a:srgbClr val="000000"/>
-              </a:buClr>
-              <a:buFont typeface="Arial"/>
-              <a:buChar char="–"/>
-              <a:defRPr lang="en-US" sz="1800" b="0" u="none" strike="noStrike">
-                <a:solidFill>
-                  <a:schemeClr val="dk1"/>
-                </a:solidFill>
-                <a:effectLst/>
-                <a:uFillTx/>
-                <a:latin typeface="Calibri"/>
-              </a:defRPr>
-            </a:lvl4pPr>
-            <a:lvl5pPr lvl="4" algn="l" defTabSz="457200">
-              <a:lnSpc>
-                <a:spcPct val="100000"/>
-              </a:lnSpc>
-              <a:spcBef>
-                <a:spcPts val="360"/>
-              </a:spcBef>
-              <a:buClr>
-                <a:srgbClr val="000000"/>
-              </a:buClr>
-              <a:buFont typeface="Arial"/>
-              <a:buChar char="»"/>
-              <a:defRPr lang="en-US" sz="1800" b="0" u="none" strike="noStrike">
-                <a:solidFill>
-                  <a:schemeClr val="dk1"/>
-                </a:solidFill>
-                <a:effectLst/>
-                <a:uFillTx/>
-                <a:latin typeface="Calibri"/>
-              </a:defRPr>
-            </a:lvl5pPr>
-          </a:lstStyle>
-          <a:p>
-            <a:pPr marL="343080" indent="-343080" algn="l" defTabSz="457200">
-              <a:lnSpc>
-                <a:spcPct val="100000"/>
-              </a:lnSpc>
-              <a:spcBef>
-                <a:spcPts val="561"/>
-              </a:spcBef>
-              <a:buClr>
-                <a:srgbClr val="000000"/>
-              </a:buClr>
-              <a:buFont typeface="Arial"/>
-              <a:buChar char="•"/>
-            </a:pPr>
-            <a:r>
-              <a:rPr lang="en-US" sz="2800" b="0" u="none" strike="noStrike">
-                <a:solidFill>
-                  <a:schemeClr val="dk1"/>
-                </a:solidFill>
-                <a:effectLst/>
-                <a:uFillTx/>
-                <a:latin typeface="Calibri"/>
-              </a:rPr>
-              <a:t>Click to edit Master text styles</a:t>
-            </a:r>
-            <a:endParaRPr lang="en-US" sz="2800" b="0" u="none" strike="noStrike">
-              <a:solidFill>
-                <a:schemeClr val="dk1"/>
-              </a:solidFill>
-              <a:effectLst/>
-              <a:uFillTx/>
-              <a:latin typeface="Calibri"/>
-            </a:endParaRPr>
-          </a:p>
-          <a:p>
-            <a:pPr marL="743040" lvl="1" indent="-285840" algn="l" defTabSz="457200">
-              <a:lnSpc>
-                <a:spcPct val="100000"/>
-              </a:lnSpc>
-              <a:spcBef>
-                <a:spcPts val="479"/>
-              </a:spcBef>
-              <a:buClr>
-                <a:srgbClr val="000000"/>
-              </a:buClr>
-              <a:buFont typeface="Arial"/>
-              <a:buChar char="–"/>
-            </a:pPr>
-            <a:r>
-              <a:rPr lang="en-US" sz="2400" b="0" u="none" strike="noStrike">
-                <a:solidFill>
-                  <a:schemeClr val="dk1"/>
-                </a:solidFill>
-                <a:effectLst/>
-                <a:uFillTx/>
-                <a:latin typeface="Calibri"/>
-              </a:rPr>
-              <a:t>Second level</a:t>
-            </a:r>
-            <a:endParaRPr lang="en-US" sz="2400" b="0" u="none" strike="noStrike">
-              <a:solidFill>
-                <a:schemeClr val="dk1"/>
-              </a:solidFill>
-              <a:effectLst/>
-              <a:uFillTx/>
-              <a:latin typeface="Calibri"/>
-            </a:endParaRPr>
-          </a:p>
-          <a:p>
-            <a:pPr marL="1143000" lvl="2" indent="-228600" algn="l" defTabSz="457200">
-              <a:lnSpc>
-                <a:spcPct val="100000"/>
-              </a:lnSpc>
-              <a:spcBef>
-                <a:spcPts val="400"/>
-              </a:spcBef>
-              <a:buClr>
-                <a:srgbClr val="000000"/>
-              </a:buClr>
-              <a:buFont typeface="Arial"/>
-              <a:buChar char="•"/>
-            </a:pPr>
-            <a:r>
-              <a:rPr lang="en-US" sz="2000" b="0" u="none" strike="noStrike">
-                <a:solidFill>
-                  <a:schemeClr val="dk1"/>
-                </a:solidFill>
-                <a:effectLst/>
-                <a:uFillTx/>
-                <a:latin typeface="Calibri"/>
-              </a:rPr>
-              <a:t>Third level</a:t>
-            </a:r>
-            <a:endParaRPr lang="en-US" sz="2000" b="0" u="none" strike="noStrike">
-              <a:solidFill>
-                <a:schemeClr val="dk1"/>
-              </a:solidFill>
-              <a:effectLst/>
-              <a:uFillTx/>
-              <a:latin typeface="Calibri"/>
-            </a:endParaRPr>
-          </a:p>
-          <a:p>
-            <a:pPr marL="1600200" lvl="3" indent="-228600" algn="l" defTabSz="457200">
-              <a:lnSpc>
-                <a:spcPct val="100000"/>
-              </a:lnSpc>
-              <a:spcBef>
-                <a:spcPts val="360"/>
-              </a:spcBef>
-              <a:buClr>
-                <a:srgbClr val="000000"/>
-              </a:buClr>
-              <a:buFont typeface="Arial"/>
-              <a:buChar char="–"/>
-            </a:pPr>
-            <a:r>
-              <a:rPr lang="en-US" sz="1800" b="0" u="none" strike="noStrike">
-                <a:solidFill>
-                  <a:schemeClr val="dk1"/>
-                </a:solidFill>
-                <a:effectLst/>
-                <a:uFillTx/>
-                <a:latin typeface="Calibri"/>
-              </a:rPr>
-              <a:t>Fourth level</a:t>
-            </a:r>
-            <a:endParaRPr lang="en-US" sz="1800" b="0" u="none" strike="noStrike">
-              <a:solidFill>
-                <a:schemeClr val="dk1"/>
-              </a:solidFill>
-              <a:effectLst/>
-              <a:uFillTx/>
-              <a:latin typeface="Calibri"/>
-            </a:endParaRPr>
-          </a:p>
-          <a:p>
-            <a:pPr marL="2057400" lvl="4" indent="-228600" algn="l" defTabSz="457200">
-              <a:lnSpc>
-                <a:spcPct val="100000"/>
-              </a:lnSpc>
-              <a:spcBef>
-                <a:spcPts val="360"/>
-              </a:spcBef>
-              <a:buClr>
-                <a:srgbClr val="000000"/>
-              </a:buClr>
-              <a:buFont typeface="Arial"/>
-              <a:buChar char="»"/>
-            </a:pPr>
-            <a:r>
-              <a:rPr lang="en-US" sz="1800" b="0" u="none" strike="noStrike">
-                <a:solidFill>
-                  <a:schemeClr val="dk1"/>
-                </a:solidFill>
-                <a:effectLst/>
-                <a:uFillTx/>
-                <a:latin typeface="Calibri"/>
-              </a:rPr>
-              <a:t>Fifth level</a:t>
-            </a:r>
-            <a:endParaRPr lang="en-US" sz="1800" b="0" u="none" strike="noStrike">
-              <a:solidFill>
-                <a:schemeClr val="dk1"/>
-              </a:solidFill>
-              <a:effectLst/>
-              <a:uFillTx/>
-              <a:latin typeface="Calibri"/>
-            </a:endParaRPr>
-          </a:p>
-        </p:txBody>
-      </p:sp>
-      <p:sp>
-        <p:nvSpPr>
-          <p:cNvPr id="5" name="PlaceHolder 4"/>
           <p:cNvSpPr>
             <a:spLocks noGrp="1"/>
           </p:cNvSpPr>
@@ -3377,7 +3038,7 @@
         <p:spPr>
           <a:xfrm>
             <a:off x="457200" y="6356520"/>
-            <a:ext cx="2132640" cy="363960"/>
+            <a:ext cx="2132280" cy="363600"/>
           </a:xfrm>
           <a:prstGeom prst="rect">
             <a:avLst/>
@@ -3433,7 +3094,7 @@
                 <a:uFillTx/>
                 <a:latin typeface="Calibri"/>
               </a:rPr>
-              <a:t>&lt;fecha/hora&gt;</a:t>
+              <a:t> </a:t>
             </a:r>
             <a:endParaRPr lang="es-CO" sz="1200" b="0" u="none" strike="noStrike">
               <a:solidFill>
@@ -3448,7 +3109,7 @@
       </p:sp>
       <p:sp>
         <p:nvSpPr>
-          <p:cNvPr id="6" name="PlaceHolder 5"/>
+          <p:cNvPr id="5" name="PlaceHolder 4"/>
           <p:cNvSpPr>
             <a:spLocks noGrp="1"/>
           </p:cNvSpPr>
@@ -3459,7 +3120,7 @@
         <p:spPr>
           <a:xfrm>
             <a:off x="3124080" y="6356520"/>
-            <a:ext cx="2894400" cy="363960"/>
+            <a:ext cx="2894040" cy="363600"/>
           </a:xfrm>
           <a:prstGeom prst="rect">
             <a:avLst/>
@@ -3511,7 +3172,7 @@
                 <a:uFillTx/>
                 <a:latin typeface="Times New Roman"/>
               </a:rPr>
-              <a:t>&lt;pie de página&gt;</a:t>
+              <a:t> </a:t>
             </a:r>
             <a:endParaRPr lang="es-CO" sz="1400" b="0" u="none" strike="noStrike">
               <a:solidFill>
@@ -3526,7 +3187,7 @@
       </p:sp>
       <p:sp>
         <p:nvSpPr>
-          <p:cNvPr id="7" name="PlaceHolder 6"/>
+          <p:cNvPr id="6" name="PlaceHolder 5"/>
           <p:cNvSpPr>
             <a:spLocks noGrp="1"/>
           </p:cNvSpPr>
@@ -3537,7 +3198,7 @@
         <p:spPr>
           <a:xfrm>
             <a:off x="6553080" y="6356520"/>
-            <a:ext cx="2132640" cy="363960"/>
+            <a:ext cx="2132280" cy="363600"/>
           </a:xfrm>
           <a:prstGeom prst="rect">
             <a:avLst/>
@@ -3582,7 +3243,7 @@
                 <a:tab pos="0" algn="l"/>
               </a:tabLst>
             </a:pPr>
-            <a:fld id="{DA71C897-0538-4519-B18A-E83B9050F688}" type="slidenum">
+            <a:fld id="{2DEC4444-F831-4A1C-9395-360016D9F2E0}" type="slidenum">
               <a:rPr lang="en-US" sz="1200" b="0" u="none" strike="noStrike">
                 <a:solidFill>
                   <a:schemeClr val="dk1">
@@ -3593,7 +3254,7 @@
                 <a:uFillTx/>
                 <a:latin typeface="Calibri"/>
               </a:rPr>
-              <a:t>&lt;número&gt;</a:t>
+              <a:t>8</a:t>
             </a:fld>
             <a:endParaRPr lang="es-CO" sz="1200" b="0" u="none" strike="noStrike">
               <a:solidFill>
@@ -3612,8 +3273,8 @@
 </file>
 
 <file path=ppt/slideLayouts/slideLayout10.xml><?xml version="1.0" encoding="utf-8"?>
-<p:sldLayout xmlns:a="http://schemas.openxmlformats.org/drawingml/2006/main" xmlns:p="http://schemas.openxmlformats.org/presentationml/2006/main" xmlns:r="http://schemas.openxmlformats.org/officeDocument/2006/relationships" xmlns:p14="http://schemas.microsoft.com/office/powerpoint/2010/main" xmlns:p15="http://schemas.microsoft.com/office/powerpoint/2012/main" xmlns:mc="http://schemas.openxmlformats.org/markup-compatibility/2006" type="obj" preserve="1">
-  <p:cSld name="Title and Content">
+<p:sldLayout xmlns:a="http://schemas.openxmlformats.org/drawingml/2006/main" xmlns:p="http://schemas.openxmlformats.org/presentationml/2006/main" xmlns:r="http://schemas.openxmlformats.org/officeDocument/2006/relationships" xmlns:p14="http://schemas.microsoft.com/office/powerpoint/2010/main" xmlns:p15="http://schemas.microsoft.com/office/powerpoint/2012/main" xmlns:mc="http://schemas.openxmlformats.org/markup-compatibility/2006" type="title" preserve="1">
+  <p:cSld name="Title Slide">
     <p:bg>
       <p:bgPr>
         <a:solidFill>
@@ -3647,8 +3308,8 @@
         </p:nvSpPr>
         <p:spPr>
           <a:xfrm>
-            <a:off x="457200" y="274680"/>
-            <a:ext cx="8228520" cy="1141920"/>
+            <a:off x="685800" y="2130480"/>
+            <a:ext cx="7770960" cy="1468440"/>
           </a:xfrm>
           <a:prstGeom prst="rect">
             <a:avLst/>
@@ -3700,73 +3361,7 @@
                 <a:uFillTx/>
                 <a:latin typeface="Calibri"/>
               </a:rPr>
-              <a:t>Click </a:t>
-            </a:r>
-            <a:r>
-              <a:rPr lang="en-US" sz="4400" b="0" u="none" strike="noStrike">
-                <a:solidFill>
-                  <a:schemeClr val="dk1"/>
-                </a:solidFill>
-                <a:effectLst/>
-                <a:uFillTx/>
-                <a:latin typeface="Calibri"/>
-              </a:rPr>
-              <a:t>to </a:t>
-            </a:r>
-            <a:r>
-              <a:rPr lang="en-US" sz="4400" b="0" u="none" strike="noStrike">
-                <a:solidFill>
-                  <a:schemeClr val="dk1"/>
-                </a:solidFill>
-                <a:effectLst/>
-                <a:uFillTx/>
-                <a:latin typeface="Calibri"/>
-              </a:rPr>
-              <a:t>edit </a:t>
-            </a:r>
-            <a:r>
-              <a:rPr lang="en-US" sz="4400" b="0" u="none" strike="noStrike">
-                <a:solidFill>
-                  <a:schemeClr val="dk1"/>
-                </a:solidFill>
-                <a:effectLst/>
-                <a:uFillTx/>
-                <a:latin typeface="Calibri"/>
-              </a:rPr>
-              <a:t>Mast</a:t>
-            </a:r>
-            <a:r>
-              <a:rPr lang="en-US" sz="4400" b="0" u="none" strike="noStrike">
-                <a:solidFill>
-                  <a:schemeClr val="dk1"/>
-                </a:solidFill>
-                <a:effectLst/>
-                <a:uFillTx/>
-                <a:latin typeface="Calibri"/>
-              </a:rPr>
-              <a:t>er </a:t>
-            </a:r>
-            <a:r>
-              <a:rPr lang="en-US" sz="4400" b="0" u="none" strike="noStrike">
-                <a:solidFill>
-                  <a:schemeClr val="dk1"/>
-                </a:solidFill>
-                <a:effectLst/>
-                <a:uFillTx/>
-                <a:latin typeface="Calibri"/>
-              </a:rPr>
-              <a:t>title </a:t>
-            </a:r>
-            <a:r>
-              <a:rPr lang="en-US" sz="4400" b="0" u="none" strike="noStrike">
-                <a:solidFill>
-                  <a:schemeClr val="dk1"/>
-                </a:solidFill>
-                <a:effectLst/>
-                <a:uFillTx/>
-                <a:latin typeface="Calibri"/>
-              </a:rPr>
-              <a:t>style</a:t>
+              <a:t>Click to edit Master title style</a:t>
             </a:r>
             <a:endParaRPr lang="en-US" sz="4400" b="0" u="none" strike="noStrike">
               <a:solidFill>
@@ -3782,312 +3377,6 @@
       <p:sp>
         <p:nvSpPr>
           <p:cNvPr id="51" name="PlaceHolder 2"/>
-          <p:cNvSpPr>
-            <a:spLocks noGrp="1"/>
-          </p:cNvSpPr>
-          <p:nvPr>
-            <p:ph type="body"/>
-          </p:nvPr>
-        </p:nvSpPr>
-        <p:spPr>
-          <a:xfrm>
-            <a:off x="457200" y="1600200"/>
-            <a:ext cx="8228520" cy="4524840"/>
-          </a:xfrm>
-          <a:prstGeom prst="rect">
-            <a:avLst/>
-          </a:prstGeom>
-          <a:noFill/>
-          <a:ln w="0">
-            <a:noFill/>
-          </a:ln>
-        </p:spPr>
-        <p:txBody>
-          <a:bodyPr lIns="91440" tIns="45720" rIns="91440" bIns="45720" anchor="t">
-            <a:noAutofit/>
-          </a:bodyPr>
-          <a:lstStyle>
-            <a:lvl1pPr algn="l" defTabSz="457200">
-              <a:lnSpc>
-                <a:spcPct val="100000"/>
-              </a:lnSpc>
-              <a:spcBef>
-                <a:spcPts val="641"/>
-              </a:spcBef>
-              <a:buClr>
-                <a:srgbClr val="000000"/>
-              </a:buClr>
-              <a:buFont typeface="Arial"/>
-              <a:buChar char="•"/>
-              <a:defRPr lang="en-US" sz="3200" b="0" u="none" strike="noStrike">
-                <a:solidFill>
-                  <a:schemeClr val="dk1"/>
-                </a:solidFill>
-                <a:effectLst/>
-                <a:uFillTx/>
-                <a:latin typeface="Calibri"/>
-              </a:defRPr>
-            </a:lvl1pPr>
-            <a:lvl2pPr lvl="1" algn="l" defTabSz="457200">
-              <a:lnSpc>
-                <a:spcPct val="100000"/>
-              </a:lnSpc>
-              <a:spcBef>
-                <a:spcPts val="561"/>
-              </a:spcBef>
-              <a:buClr>
-                <a:srgbClr val="000000"/>
-              </a:buClr>
-              <a:buFont typeface="Arial"/>
-              <a:buChar char="–"/>
-              <a:defRPr lang="en-US" sz="2800" b="0" u="none" strike="noStrike">
-                <a:solidFill>
-                  <a:schemeClr val="dk1"/>
-                </a:solidFill>
-                <a:effectLst/>
-                <a:uFillTx/>
-                <a:latin typeface="Calibri"/>
-              </a:defRPr>
-            </a:lvl2pPr>
-            <a:lvl3pPr lvl="2" algn="l" defTabSz="457200">
-              <a:lnSpc>
-                <a:spcPct val="100000"/>
-              </a:lnSpc>
-              <a:spcBef>
-                <a:spcPts val="479"/>
-              </a:spcBef>
-              <a:buClr>
-                <a:srgbClr val="000000"/>
-              </a:buClr>
-              <a:buFont typeface="Arial"/>
-              <a:buChar char="•"/>
-              <a:defRPr lang="en-US" sz="2400" b="0" u="none" strike="noStrike">
-                <a:solidFill>
-                  <a:schemeClr val="dk1"/>
-                </a:solidFill>
-                <a:effectLst/>
-                <a:uFillTx/>
-                <a:latin typeface="Calibri"/>
-              </a:defRPr>
-            </a:lvl3pPr>
-            <a:lvl4pPr lvl="3" algn="l" defTabSz="457200">
-              <a:lnSpc>
-                <a:spcPct val="100000"/>
-              </a:lnSpc>
-              <a:spcBef>
-                <a:spcPts val="400"/>
-              </a:spcBef>
-              <a:buClr>
-                <a:srgbClr val="000000"/>
-              </a:buClr>
-              <a:buFont typeface="Arial"/>
-              <a:buChar char="–"/>
-              <a:defRPr lang="en-US" sz="2000" b="0" u="none" strike="noStrike">
-                <a:solidFill>
-                  <a:schemeClr val="dk1"/>
-                </a:solidFill>
-                <a:effectLst/>
-                <a:uFillTx/>
-                <a:latin typeface="Calibri"/>
-              </a:defRPr>
-            </a:lvl4pPr>
-            <a:lvl5pPr lvl="4" algn="l" defTabSz="457200">
-              <a:lnSpc>
-                <a:spcPct val="100000"/>
-              </a:lnSpc>
-              <a:spcBef>
-                <a:spcPts val="400"/>
-              </a:spcBef>
-              <a:buClr>
-                <a:srgbClr val="000000"/>
-              </a:buClr>
-              <a:buFont typeface="Arial"/>
-              <a:buChar char="»"/>
-              <a:defRPr lang="en-US" sz="2000" b="0" u="none" strike="noStrike">
-                <a:solidFill>
-                  <a:schemeClr val="dk1"/>
-                </a:solidFill>
-                <a:effectLst/>
-                <a:uFillTx/>
-                <a:latin typeface="Calibri"/>
-              </a:defRPr>
-            </a:lvl5pPr>
-          </a:lstStyle>
-          <a:p>
-            <a:pPr marL="343080" indent="-343080" algn="l" defTabSz="457200">
-              <a:lnSpc>
-                <a:spcPct val="100000"/>
-              </a:lnSpc>
-              <a:spcBef>
-                <a:spcPts val="641"/>
-              </a:spcBef>
-              <a:buClr>
-                <a:srgbClr val="000000"/>
-              </a:buClr>
-              <a:buFont typeface="Arial"/>
-              <a:buChar char="•"/>
-            </a:pPr>
-            <a:r>
-              <a:rPr lang="en-US" sz="3200" b="0" u="none" strike="noStrike">
-                <a:solidFill>
-                  <a:schemeClr val="dk1"/>
-                </a:solidFill>
-                <a:effectLst/>
-                <a:uFillTx/>
-                <a:latin typeface="Calibri"/>
-              </a:rPr>
-              <a:t>Click to edit Master text styles</a:t>
-            </a:r>
-            <a:endParaRPr lang="en-US" sz="3200" b="0" u="none" strike="noStrike">
-              <a:solidFill>
-                <a:schemeClr val="dk1"/>
-              </a:solidFill>
-              <a:effectLst/>
-              <a:uFillTx/>
-              <a:latin typeface="Calibri"/>
-            </a:endParaRPr>
-          </a:p>
-          <a:p>
-            <a:pPr marL="743040" lvl="1" indent="-285840" algn="l" defTabSz="457200">
-              <a:lnSpc>
-                <a:spcPct val="100000"/>
-              </a:lnSpc>
-              <a:spcBef>
-                <a:spcPts val="561"/>
-              </a:spcBef>
-              <a:buClr>
-                <a:srgbClr val="000000"/>
-              </a:buClr>
-              <a:buFont typeface="Arial"/>
-              <a:buChar char="–"/>
-            </a:pPr>
-            <a:r>
-              <a:rPr lang="en-US" sz="2800" b="0" u="none" strike="noStrike">
-                <a:solidFill>
-                  <a:schemeClr val="dk1"/>
-                </a:solidFill>
-                <a:effectLst/>
-                <a:uFillTx/>
-                <a:latin typeface="Calibri"/>
-              </a:rPr>
-              <a:t>Second level</a:t>
-            </a:r>
-            <a:endParaRPr lang="en-US" sz="2800" b="0" u="none" strike="noStrike">
-              <a:solidFill>
-                <a:schemeClr val="dk1"/>
-              </a:solidFill>
-              <a:effectLst/>
-              <a:uFillTx/>
-              <a:latin typeface="Calibri"/>
-            </a:endParaRPr>
-          </a:p>
-          <a:p>
-            <a:pPr marL="1143000" lvl="2" indent="-228600" algn="l" defTabSz="457200">
-              <a:lnSpc>
-                <a:spcPct val="100000"/>
-              </a:lnSpc>
-              <a:spcBef>
-                <a:spcPts val="479"/>
-              </a:spcBef>
-              <a:buClr>
-                <a:srgbClr val="000000"/>
-              </a:buClr>
-              <a:buFont typeface="Arial"/>
-              <a:buChar char="•"/>
-            </a:pPr>
-            <a:r>
-              <a:rPr lang="en-US" sz="2400" b="0" u="none" strike="noStrike">
-                <a:solidFill>
-                  <a:schemeClr val="dk1"/>
-                </a:solidFill>
-                <a:effectLst/>
-                <a:uFillTx/>
-                <a:latin typeface="Calibri"/>
-              </a:rPr>
-              <a:t>Third level</a:t>
-            </a:r>
-            <a:endParaRPr lang="en-US" sz="2400" b="0" u="none" strike="noStrike">
-              <a:solidFill>
-                <a:schemeClr val="dk1"/>
-              </a:solidFill>
-              <a:effectLst/>
-              <a:uFillTx/>
-              <a:latin typeface="Calibri"/>
-            </a:endParaRPr>
-          </a:p>
-          <a:p>
-            <a:pPr marL="1600200" lvl="3" indent="-228600" algn="l" defTabSz="457200">
-              <a:lnSpc>
-                <a:spcPct val="100000"/>
-              </a:lnSpc>
-              <a:spcBef>
-                <a:spcPts val="400"/>
-              </a:spcBef>
-              <a:buClr>
-                <a:srgbClr val="000000"/>
-              </a:buClr>
-              <a:buFont typeface="Arial"/>
-              <a:buChar char="–"/>
-            </a:pPr>
-            <a:r>
-              <a:rPr lang="en-US" sz="2000" b="0" u="none" strike="noStrike">
-                <a:solidFill>
-                  <a:schemeClr val="dk1"/>
-                </a:solidFill>
-                <a:effectLst/>
-                <a:uFillTx/>
-                <a:latin typeface="Calibri"/>
-              </a:rPr>
-              <a:t>Fourth level</a:t>
-            </a:r>
-            <a:endParaRPr lang="en-US" sz="2000" b="0" u="none" strike="noStrike">
-              <a:solidFill>
-                <a:schemeClr val="dk1"/>
-              </a:solidFill>
-              <a:effectLst/>
-              <a:uFillTx/>
-              <a:latin typeface="Calibri"/>
-            </a:endParaRPr>
-          </a:p>
-          <a:p>
-            <a:pPr marL="2057400" lvl="4" indent="-228600" algn="l" defTabSz="457200">
-              <a:lnSpc>
-                <a:spcPct val="100000"/>
-              </a:lnSpc>
-              <a:spcBef>
-                <a:spcPts val="400"/>
-              </a:spcBef>
-              <a:buClr>
-                <a:srgbClr val="000000"/>
-              </a:buClr>
-              <a:buFont typeface="Arial"/>
-              <a:buChar char="»"/>
-            </a:pPr>
-            <a:r>
-              <a:rPr lang="en-US" sz="2000" b="0" u="none" strike="noStrike">
-                <a:solidFill>
-                  <a:schemeClr val="dk1"/>
-                </a:solidFill>
-                <a:effectLst/>
-                <a:uFillTx/>
-                <a:latin typeface="Calibri"/>
-              </a:rPr>
-              <a:t>Fifth level</a:t>
-            </a:r>
-            <a:endParaRPr lang="en-US" sz="2000" b="0" u="none" strike="noStrike">
-              <a:solidFill>
-                <a:schemeClr val="dk1"/>
-              </a:solidFill>
-              <a:effectLst/>
-              <a:uFillTx/>
-              <a:latin typeface="Calibri"/>
-            </a:endParaRPr>
-          </a:p>
-        </p:txBody>
-      </p:sp>
-      <p:sp>
-        <p:nvSpPr>
-          <p:cNvPr id="52" name="PlaceHolder 3"/>
           <p:cNvSpPr>
             <a:spLocks noGrp="1"/>
           </p:cNvSpPr>
@@ -4098,7 +3387,7 @@
         <p:spPr>
           <a:xfrm>
             <a:off x="457200" y="6356520"/>
-            <a:ext cx="2132640" cy="363960"/>
+            <a:ext cx="2132280" cy="363600"/>
           </a:xfrm>
           <a:prstGeom prst="rect">
             <a:avLst/>
@@ -4154,7 +3443,7 @@
                 <a:uFillTx/>
                 <a:latin typeface="Calibri"/>
               </a:rPr>
-              <a:t>&lt;fecha/hora&gt;</a:t>
+              <a:t> </a:t>
             </a:r>
             <a:endParaRPr lang="es-CO" sz="1200" b="0" u="none" strike="noStrike">
               <a:solidFill>
@@ -4169,7 +3458,7 @@
       </p:sp>
       <p:sp>
         <p:nvSpPr>
-          <p:cNvPr id="53" name="PlaceHolder 4"/>
+          <p:cNvPr id="52" name="PlaceHolder 3"/>
           <p:cNvSpPr>
             <a:spLocks noGrp="1"/>
           </p:cNvSpPr>
@@ -4180,7 +3469,7 @@
         <p:spPr>
           <a:xfrm>
             <a:off x="3124080" y="6356520"/>
-            <a:ext cx="2894400" cy="363960"/>
+            <a:ext cx="2894040" cy="363600"/>
           </a:xfrm>
           <a:prstGeom prst="rect">
             <a:avLst/>
@@ -4232,7 +3521,7 @@
                 <a:uFillTx/>
                 <a:latin typeface="Times New Roman"/>
               </a:rPr>
-              <a:t>&lt;pie de página&gt;</a:t>
+              <a:t> </a:t>
             </a:r>
             <a:endParaRPr lang="es-CO" sz="1400" b="0" u="none" strike="noStrike">
               <a:solidFill>
@@ -4247,7 +3536,7 @@
       </p:sp>
       <p:sp>
         <p:nvSpPr>
-          <p:cNvPr id="54" name="PlaceHolder 5"/>
+          <p:cNvPr id="53" name="PlaceHolder 4"/>
           <p:cNvSpPr>
             <a:spLocks noGrp="1"/>
           </p:cNvSpPr>
@@ -4258,7 +3547,7 @@
         <p:spPr>
           <a:xfrm>
             <a:off x="6553080" y="6356520"/>
-            <a:ext cx="2132640" cy="363960"/>
+            <a:ext cx="2132280" cy="363600"/>
           </a:xfrm>
           <a:prstGeom prst="rect">
             <a:avLst/>
@@ -4303,7 +3592,7 @@
                 <a:tab pos="0" algn="l"/>
               </a:tabLst>
             </a:pPr>
-            <a:fld id="{40183673-8C5C-4160-992A-2527C72A93FC}" type="slidenum">
+            <a:fld id="{969C5AAA-1FA4-4E60-B46C-ACA28ED68901}" type="slidenum">
               <a:rPr lang="en-US" sz="1200" b="0" u="none" strike="noStrike">
                 <a:solidFill>
                   <a:schemeClr val="dk1">
@@ -4314,7 +3603,7 @@
                 <a:uFillTx/>
                 <a:latin typeface="Calibri"/>
               </a:rPr>
-              <a:t>&lt;número&gt;</a:t>
+              <a:t>8</a:t>
             </a:fld>
             <a:endParaRPr lang="es-CO" sz="1200" b="0" u="none" strike="noStrike">
               <a:solidFill>
@@ -4323,6 +3612,434 @@
               <a:effectLst/>
               <a:uFillTx/>
               <a:latin typeface="Times New Roman"/>
+            </a:endParaRPr>
+          </a:p>
+        </p:txBody>
+      </p:sp>
+      <p:sp>
+        <p:nvSpPr>
+          <p:cNvPr id="54" name="PlaceHolder 5"/>
+          <p:cNvSpPr>
+            <a:spLocks noGrp="1"/>
+          </p:cNvSpPr>
+          <p:nvPr>
+            <p:ph type="body"/>
+          </p:nvPr>
+        </p:nvSpPr>
+        <p:spPr>
+          <a:xfrm>
+            <a:off x="457200" y="1604520"/>
+            <a:ext cx="8228160" cy="3976200"/>
+          </a:xfrm>
+          <a:prstGeom prst="rect">
+            <a:avLst/>
+          </a:prstGeom>
+          <a:noFill/>
+          <a:ln w="0">
+            <a:noFill/>
+          </a:ln>
+        </p:spPr>
+        <p:txBody>
+          <a:bodyPr lIns="0" tIns="0" rIns="0" bIns="0" anchor="t">
+            <a:normAutofit/>
+          </a:bodyPr>
+          <a:lstStyle>
+            <a:lvl1pPr algn="l" defTabSz="457200">
+              <a:lnSpc>
+                <a:spcPct val="100000"/>
+              </a:lnSpc>
+              <a:spcBef>
+                <a:spcPts val="641"/>
+              </a:spcBef>
+              <a:buClr>
+                <a:srgbClr val="000000"/>
+              </a:buClr>
+              <a:buFont typeface="Arial"/>
+              <a:buChar char="•"/>
+              <a:defRPr lang="en-US" sz="3200" b="0" u="none" strike="noStrike">
+                <a:solidFill>
+                  <a:schemeClr val="dk1"/>
+                </a:solidFill>
+                <a:effectLst/>
+                <a:uFillTx/>
+                <a:latin typeface="Calibri"/>
+              </a:defRPr>
+            </a:lvl1pPr>
+            <a:lvl2pPr lvl="1" algn="l" defTabSz="457200">
+              <a:lnSpc>
+                <a:spcPct val="100000"/>
+              </a:lnSpc>
+              <a:spcBef>
+                <a:spcPts val="561"/>
+              </a:spcBef>
+              <a:buClr>
+                <a:srgbClr val="000000"/>
+              </a:buClr>
+              <a:buSzPct val="75000"/>
+              <a:buFont typeface="Symbol" charset="2"/>
+              <a:buChar char=""/>
+              <a:defRPr lang="en-US" sz="2800" b="0" u="none" strike="noStrike">
+                <a:solidFill>
+                  <a:schemeClr val="dk1"/>
+                </a:solidFill>
+                <a:effectLst/>
+                <a:uFillTx/>
+                <a:latin typeface="Calibri"/>
+              </a:defRPr>
+            </a:lvl2pPr>
+            <a:lvl3pPr lvl="2" algn="l" defTabSz="457200">
+              <a:lnSpc>
+                <a:spcPct val="100000"/>
+              </a:lnSpc>
+              <a:spcBef>
+                <a:spcPts val="479"/>
+              </a:spcBef>
+              <a:buClr>
+                <a:srgbClr val="000000"/>
+              </a:buClr>
+              <a:buSzPct val="45000"/>
+              <a:buFont typeface="Wingdings" charset="2"/>
+              <a:buChar char=""/>
+              <a:defRPr lang="en-US" sz="2400" b="0" u="none" strike="noStrike">
+                <a:solidFill>
+                  <a:schemeClr val="dk1"/>
+                </a:solidFill>
+                <a:effectLst/>
+                <a:uFillTx/>
+                <a:latin typeface="Calibri"/>
+              </a:defRPr>
+            </a:lvl3pPr>
+            <a:lvl4pPr lvl="3" algn="l" defTabSz="457200">
+              <a:lnSpc>
+                <a:spcPct val="100000"/>
+              </a:lnSpc>
+              <a:spcBef>
+                <a:spcPts val="400"/>
+              </a:spcBef>
+              <a:buClr>
+                <a:srgbClr val="000000"/>
+              </a:buClr>
+              <a:buSzPct val="75000"/>
+              <a:buFont typeface="Symbol" charset="2"/>
+              <a:buChar char=""/>
+              <a:defRPr lang="en-US" sz="2000" b="0" u="none" strike="noStrike">
+                <a:solidFill>
+                  <a:schemeClr val="dk1"/>
+                </a:solidFill>
+                <a:effectLst/>
+                <a:uFillTx/>
+                <a:latin typeface="Calibri"/>
+              </a:defRPr>
+            </a:lvl4pPr>
+            <a:lvl5pPr lvl="4" algn="l" defTabSz="457200">
+              <a:lnSpc>
+                <a:spcPct val="100000"/>
+              </a:lnSpc>
+              <a:spcBef>
+                <a:spcPts val="400"/>
+              </a:spcBef>
+              <a:buClr>
+                <a:srgbClr val="000000"/>
+              </a:buClr>
+              <a:buSzPct val="45000"/>
+              <a:buFont typeface="Wingdings" charset="2"/>
+              <a:buChar char=""/>
+              <a:defRPr lang="en-US" sz="2000" b="0" u="none" strike="noStrike">
+                <a:solidFill>
+                  <a:schemeClr val="dk1"/>
+                </a:solidFill>
+                <a:effectLst/>
+                <a:uFillTx/>
+                <a:latin typeface="Calibri"/>
+              </a:defRPr>
+            </a:lvl5pPr>
+            <a:lvl6pPr lvl="5" algn="l" defTabSz="457200">
+              <a:lnSpc>
+                <a:spcPct val="100000"/>
+              </a:lnSpc>
+              <a:spcBef>
+                <a:spcPts val="283"/>
+              </a:spcBef>
+              <a:buClr>
+                <a:srgbClr val="000000"/>
+              </a:buClr>
+              <a:buSzPct val="45000"/>
+              <a:buFont typeface="Wingdings" charset="2"/>
+              <a:buChar char=""/>
+              <a:defRPr lang="en-US" sz="2000" b="0" u="none" strike="noStrike">
+                <a:solidFill>
+                  <a:schemeClr val="dk1"/>
+                </a:solidFill>
+                <a:effectLst/>
+                <a:uFillTx/>
+                <a:latin typeface="Calibri"/>
+              </a:defRPr>
+            </a:lvl6pPr>
+            <a:lvl7pPr lvl="6" algn="l" defTabSz="457200">
+              <a:lnSpc>
+                <a:spcPct val="100000"/>
+              </a:lnSpc>
+              <a:spcBef>
+                <a:spcPts val="283"/>
+              </a:spcBef>
+              <a:buClr>
+                <a:srgbClr val="000000"/>
+              </a:buClr>
+              <a:buSzPct val="45000"/>
+              <a:buFont typeface="Wingdings" charset="2"/>
+              <a:buChar char=""/>
+              <a:defRPr lang="en-US" sz="2000" b="0" u="none" strike="noStrike">
+                <a:solidFill>
+                  <a:schemeClr val="dk1"/>
+                </a:solidFill>
+                <a:effectLst/>
+                <a:uFillTx/>
+                <a:latin typeface="Calibri"/>
+              </a:defRPr>
+            </a:lvl7pPr>
+          </a:lstStyle>
+          <a:p>
+            <a:pPr marL="343080" indent="-343080" algn="l" defTabSz="457200">
+              <a:lnSpc>
+                <a:spcPct val="100000"/>
+              </a:lnSpc>
+              <a:spcBef>
+                <a:spcPts val="641"/>
+              </a:spcBef>
+              <a:buClr>
+                <a:srgbClr val="000000"/>
+              </a:buClr>
+              <a:buFont typeface="Arial"/>
+              <a:buChar char="•"/>
+            </a:pPr>
+            <a:r>
+              <a:rPr lang="en-US" sz="3200" b="0" u="none" strike="noStrike">
+                <a:solidFill>
+                  <a:schemeClr val="dk1"/>
+                </a:solidFill>
+                <a:effectLst/>
+                <a:uFillTx/>
+                <a:latin typeface="Calibri"/>
+              </a:rPr>
+              <a:t>Pulse para editar el formato de texto del esquema</a:t>
+            </a:r>
+            <a:endParaRPr lang="en-US" sz="3200" b="0" u="none" strike="noStrike">
+              <a:solidFill>
+                <a:schemeClr val="dk1"/>
+              </a:solidFill>
+              <a:effectLst/>
+              <a:uFillTx/>
+              <a:latin typeface="Calibri"/>
+            </a:endParaRPr>
+          </a:p>
+          <a:p>
+            <a:pPr marL="864000" lvl="1" indent="-324000" algn="l" defTabSz="457200">
+              <a:lnSpc>
+                <a:spcPct val="100000"/>
+              </a:lnSpc>
+              <a:spcBef>
+                <a:spcPts val="561"/>
+              </a:spcBef>
+              <a:buClr>
+                <a:srgbClr val="000000"/>
+              </a:buClr>
+              <a:buSzPct val="75000"/>
+              <a:buFont typeface="Symbol" charset="2"/>
+              <a:buChar char=""/>
+            </a:pPr>
+            <a:r>
+              <a:rPr lang="en-US" sz="2800" b="0" u="none" strike="noStrike">
+                <a:solidFill>
+                  <a:schemeClr val="dk1"/>
+                </a:solidFill>
+                <a:effectLst/>
+                <a:uFillTx/>
+                <a:latin typeface="Calibri"/>
+              </a:rPr>
+              <a:t>Segundo nivel del esquema</a:t>
+            </a:r>
+            <a:endParaRPr lang="en-US" sz="2800" b="0" u="none" strike="noStrike">
+              <a:solidFill>
+                <a:schemeClr val="dk1"/>
+              </a:solidFill>
+              <a:effectLst/>
+              <a:uFillTx/>
+              <a:latin typeface="Calibri"/>
+            </a:endParaRPr>
+          </a:p>
+          <a:p>
+            <a:pPr marL="1296000" lvl="2" indent="-288000" algn="l" defTabSz="457200">
+              <a:lnSpc>
+                <a:spcPct val="100000"/>
+              </a:lnSpc>
+              <a:spcBef>
+                <a:spcPts val="479"/>
+              </a:spcBef>
+              <a:buClr>
+                <a:srgbClr val="000000"/>
+              </a:buClr>
+              <a:buSzPct val="45000"/>
+              <a:buFont typeface="Wingdings" charset="2"/>
+              <a:buChar char=""/>
+            </a:pPr>
+            <a:r>
+              <a:rPr lang="en-US" sz="2400" b="0" u="none" strike="noStrike">
+                <a:solidFill>
+                  <a:schemeClr val="dk1"/>
+                </a:solidFill>
+                <a:effectLst/>
+                <a:uFillTx/>
+                <a:latin typeface="Calibri"/>
+              </a:rPr>
+              <a:t>Tercer nivel del esquema</a:t>
+            </a:r>
+            <a:endParaRPr lang="en-US" sz="2400" b="0" u="none" strike="noStrike">
+              <a:solidFill>
+                <a:schemeClr val="dk1"/>
+              </a:solidFill>
+              <a:effectLst/>
+              <a:uFillTx/>
+              <a:latin typeface="Calibri"/>
+            </a:endParaRPr>
+          </a:p>
+          <a:p>
+            <a:pPr marL="1728000" lvl="3" indent="-216000" algn="l" defTabSz="457200">
+              <a:lnSpc>
+                <a:spcPct val="100000"/>
+              </a:lnSpc>
+              <a:spcBef>
+                <a:spcPts val="400"/>
+              </a:spcBef>
+              <a:buClr>
+                <a:srgbClr val="000000"/>
+              </a:buClr>
+              <a:buSzPct val="75000"/>
+              <a:buFont typeface="Symbol" charset="2"/>
+              <a:buChar char=""/>
+            </a:pPr>
+            <a:r>
+              <a:rPr lang="en-US" sz="2000" b="0" u="none" strike="noStrike">
+                <a:solidFill>
+                  <a:schemeClr val="dk1"/>
+                </a:solidFill>
+                <a:effectLst/>
+                <a:uFillTx/>
+                <a:latin typeface="Calibri"/>
+              </a:rPr>
+              <a:t>Cuarto nivel del esquema</a:t>
+            </a:r>
+            <a:endParaRPr lang="en-US" sz="2000" b="0" u="none" strike="noStrike">
+              <a:solidFill>
+                <a:schemeClr val="dk1"/>
+              </a:solidFill>
+              <a:effectLst/>
+              <a:uFillTx/>
+              <a:latin typeface="Calibri"/>
+            </a:endParaRPr>
+          </a:p>
+          <a:p>
+            <a:pPr marL="2160000" lvl="4" indent="-216000" algn="l" defTabSz="457200">
+              <a:lnSpc>
+                <a:spcPct val="100000"/>
+              </a:lnSpc>
+              <a:spcBef>
+                <a:spcPts val="400"/>
+              </a:spcBef>
+              <a:buClr>
+                <a:srgbClr val="000000"/>
+              </a:buClr>
+              <a:buSzPct val="45000"/>
+              <a:buFont typeface="Wingdings" charset="2"/>
+              <a:buChar char=""/>
+            </a:pPr>
+            <a:r>
+              <a:rPr lang="en-US" sz="2000" b="0" u="none" strike="noStrike">
+                <a:solidFill>
+                  <a:schemeClr val="dk1"/>
+                </a:solidFill>
+                <a:effectLst/>
+                <a:uFillTx/>
+                <a:latin typeface="Calibri"/>
+              </a:rPr>
+              <a:t>Quinto nivel del esquema</a:t>
+            </a:r>
+            <a:endParaRPr lang="en-US" sz="2000" b="0" u="none" strike="noStrike">
+              <a:solidFill>
+                <a:schemeClr val="dk1"/>
+              </a:solidFill>
+              <a:effectLst/>
+              <a:uFillTx/>
+              <a:latin typeface="Calibri"/>
+            </a:endParaRPr>
+          </a:p>
+          <a:p>
+            <a:pPr marL="2592000" lvl="5" indent="-216000" algn="l" defTabSz="457200">
+              <a:lnSpc>
+                <a:spcPct val="100000"/>
+              </a:lnSpc>
+              <a:spcBef>
+                <a:spcPts val="283"/>
+              </a:spcBef>
+              <a:buClr>
+                <a:srgbClr val="000000"/>
+              </a:buClr>
+              <a:buSzPct val="45000"/>
+              <a:buFont typeface="Wingdings" charset="2"/>
+              <a:buChar char=""/>
+            </a:pPr>
+            <a:r>
+              <a:rPr lang="en-US" sz="2000" b="0" u="none" strike="noStrike">
+                <a:solidFill>
+                  <a:schemeClr val="dk1"/>
+                </a:solidFill>
+                <a:effectLst/>
+                <a:uFillTx/>
+                <a:latin typeface="Calibri"/>
+              </a:rPr>
+              <a:t>Sexto nivel del esquema</a:t>
+            </a:r>
+            <a:endParaRPr lang="en-US" sz="2000" b="0" u="none" strike="noStrike">
+              <a:solidFill>
+                <a:schemeClr val="dk1"/>
+              </a:solidFill>
+              <a:effectLst/>
+              <a:uFillTx/>
+              <a:latin typeface="Calibri"/>
+            </a:endParaRPr>
+          </a:p>
+          <a:p>
+            <a:pPr marL="3024000" lvl="6" indent="-216000" algn="l" defTabSz="457200">
+              <a:lnSpc>
+                <a:spcPct val="100000"/>
+              </a:lnSpc>
+              <a:spcBef>
+                <a:spcPts val="283"/>
+              </a:spcBef>
+              <a:buClr>
+                <a:srgbClr val="000000"/>
+              </a:buClr>
+              <a:buSzPct val="45000"/>
+              <a:buFont typeface="Wingdings" charset="2"/>
+              <a:buChar char=""/>
+            </a:pPr>
+            <a:r>
+              <a:rPr lang="en-US" sz="2000" b="0" u="none" strike="noStrike">
+                <a:solidFill>
+                  <a:schemeClr val="dk1"/>
+                </a:solidFill>
+                <a:effectLst/>
+                <a:uFillTx/>
+                <a:latin typeface="Calibri"/>
+              </a:rPr>
+              <a:t>Séptimo nivel del esquema</a:t>
+            </a:r>
+            <a:endParaRPr lang="en-US" sz="2000" b="0" u="none" strike="noStrike">
+              <a:solidFill>
+                <a:schemeClr val="dk1"/>
+              </a:solidFill>
+              <a:effectLst/>
+              <a:uFillTx/>
+              <a:latin typeface="Calibri"/>
             </a:endParaRPr>
           </a:p>
         </p:txBody>
@@ -4333,8 +4050,8 @@
 </file>
 
 <file path=ppt/slideLayouts/slideLayout11.xml><?xml version="1.0" encoding="utf-8"?>
-<p:sldLayout xmlns:a="http://schemas.openxmlformats.org/drawingml/2006/main" xmlns:p="http://schemas.openxmlformats.org/presentationml/2006/main" xmlns:r="http://schemas.openxmlformats.org/officeDocument/2006/relationships" xmlns:p14="http://schemas.microsoft.com/office/powerpoint/2010/main" xmlns:p15="http://schemas.microsoft.com/office/powerpoint/2012/main" xmlns:mc="http://schemas.openxmlformats.org/markup-compatibility/2006" type="blank" preserve="1">
-  <p:cSld name="Section Header">
+<p:sldLayout xmlns:a="http://schemas.openxmlformats.org/drawingml/2006/main" xmlns:p="http://schemas.openxmlformats.org/presentationml/2006/main" xmlns:r="http://schemas.openxmlformats.org/officeDocument/2006/relationships" xmlns:p14="http://schemas.microsoft.com/office/powerpoint/2010/main" xmlns:p15="http://schemas.microsoft.com/office/powerpoint/2012/main" xmlns:mc="http://schemas.openxmlformats.org/markup-compatibility/2006" type="vertTx" preserve="1">
+  <p:cSld name="Title and Vertical Text">
     <p:bg>
       <p:bgPr>
         <a:solidFill>
@@ -4368,8 +4085,8 @@
         </p:nvSpPr>
         <p:spPr>
           <a:xfrm>
-            <a:off x="722160" y="4406760"/>
-            <a:ext cx="7771320" cy="1361160"/>
+            <a:off x="457200" y="274680"/>
+            <a:ext cx="8228160" cy="1141560"/>
           </a:xfrm>
           <a:prstGeom prst="rect">
             <a:avLst/>
@@ -4380,19 +4097,19 @@
           </a:ln>
         </p:spPr>
         <p:txBody>
-          <a:bodyPr lIns="91440" tIns="45720" rIns="91440" bIns="45720" anchor="t">
+          <a:bodyPr lIns="91440" tIns="45720" rIns="91440" bIns="45720" anchor="ctr">
             <a:noAutofit/>
           </a:bodyPr>
           <a:lstStyle>
-            <a:lvl1pPr indent="0" algn="l" defTabSz="457200">
-              <a:lnSpc>
-                <a:spcPct val="100000"/>
-              </a:lnSpc>
-              <a:buNone/>
-              <a:tabLst>
-                <a:tab pos="0" algn="l"/>
-              </a:tabLst>
-              <a:defRPr lang="en-US" sz="4000" b="1" u="none" strike="noStrike" cap="all">
+            <a:lvl1pPr indent="0" algn="ctr" defTabSz="457200">
+              <a:lnSpc>
+                <a:spcPct val="100000"/>
+              </a:lnSpc>
+              <a:buNone/>
+              <a:tabLst>
+                <a:tab pos="0" algn="l"/>
+              </a:tabLst>
+              <a:defRPr lang="en-US" sz="4400" b="0" u="none" strike="noStrike">
                 <a:solidFill>
                   <a:schemeClr val="dk1"/>
                 </a:solidFill>
@@ -4403,17 +4120,17 @@
             </a:lvl1pPr>
           </a:lstStyle>
           <a:p>
-            <a:pPr indent="0" algn="l" defTabSz="457200">
-              <a:lnSpc>
-                <a:spcPct val="100000"/>
-              </a:lnSpc>
-              <a:buNone/>
-              <a:tabLst>
-                <a:tab pos="0" algn="l"/>
-              </a:tabLst>
-            </a:pPr>
-            <a:r>
-              <a:rPr lang="en-US" sz="4000" b="1" u="none" strike="noStrike" cap="all">
+            <a:pPr indent="0" algn="ctr" defTabSz="457200">
+              <a:lnSpc>
+                <a:spcPct val="100000"/>
+              </a:lnSpc>
+              <a:buNone/>
+              <a:tabLst>
+                <a:tab pos="0" algn="l"/>
+              </a:tabLst>
+            </a:pPr>
+            <a:r>
+              <a:rPr lang="en-US" sz="4400" b="0" u="none" strike="noStrike">
                 <a:solidFill>
                   <a:schemeClr val="dk1"/>
                 </a:solidFill>
@@ -4423,7 +4140,7 @@
               </a:rPr>
               <a:t>Click to edit Master title style</a:t>
             </a:r>
-            <a:endParaRPr lang="en-US" sz="4000" b="1" u="none" strike="noStrike" cap="all">
+            <a:endParaRPr lang="en-US" sz="4400" b="0" u="none" strike="noStrike">
               <a:solidFill>
                 <a:schemeClr val="dk1"/>
               </a:solidFill>
@@ -4446,8 +4163,8 @@
         </p:nvSpPr>
         <p:spPr>
           <a:xfrm>
-            <a:off x="722160" y="2906640"/>
-            <a:ext cx="7771320" cy="1499040"/>
+            <a:off x="457200" y="1600200"/>
+            <a:ext cx="8228160" cy="4524480"/>
           </a:xfrm>
           <a:prstGeom prst="rect">
             <a:avLst/>
@@ -4458,64 +4175,280 @@
           </a:ln>
         </p:spPr>
         <p:txBody>
-          <a:bodyPr lIns="91440" tIns="45720" rIns="91440" bIns="45720" anchor="b">
+          <a:bodyPr lIns="91440" tIns="45720" rIns="91440" bIns="45720" anchor="t" vert="eaVert">
             <a:noAutofit/>
           </a:bodyPr>
           <a:lstStyle>
-            <a:lvl1pPr indent="0" algn="l" defTabSz="457200">
+            <a:lvl1pPr algn="l" defTabSz="457200">
+              <a:lnSpc>
+                <a:spcPct val="100000"/>
+              </a:lnSpc>
+              <a:spcBef>
+                <a:spcPts val="641"/>
+              </a:spcBef>
+              <a:buClr>
+                <a:srgbClr val="000000"/>
+              </a:buClr>
+              <a:buFont typeface="Arial"/>
+              <a:buChar char="•"/>
+              <a:defRPr lang="en-US" sz="3200" b="0" u="none" strike="noStrike">
+                <a:solidFill>
+                  <a:schemeClr val="dk1"/>
+                </a:solidFill>
+                <a:effectLst/>
+                <a:uFillTx/>
+                <a:latin typeface="Calibri"/>
+              </a:defRPr>
+            </a:lvl1pPr>
+            <a:lvl2pPr lvl="1" algn="l" defTabSz="457200">
+              <a:lnSpc>
+                <a:spcPct val="100000"/>
+              </a:lnSpc>
+              <a:spcBef>
+                <a:spcPts val="561"/>
+              </a:spcBef>
+              <a:buClr>
+                <a:srgbClr val="000000"/>
+              </a:buClr>
+              <a:buFont typeface="Arial"/>
+              <a:buChar char="–"/>
+              <a:defRPr lang="en-US" sz="2800" b="0" u="none" strike="noStrike">
+                <a:solidFill>
+                  <a:schemeClr val="dk1"/>
+                </a:solidFill>
+                <a:effectLst/>
+                <a:uFillTx/>
+                <a:latin typeface="Calibri"/>
+              </a:defRPr>
+            </a:lvl2pPr>
+            <a:lvl3pPr lvl="2" algn="l" defTabSz="457200">
+              <a:lnSpc>
+                <a:spcPct val="100000"/>
+              </a:lnSpc>
+              <a:spcBef>
+                <a:spcPts val="479"/>
+              </a:spcBef>
+              <a:buClr>
+                <a:srgbClr val="000000"/>
+              </a:buClr>
+              <a:buFont typeface="Arial"/>
+              <a:buChar char="•"/>
+              <a:defRPr lang="en-US" sz="2400" b="0" u="none" strike="noStrike">
+                <a:solidFill>
+                  <a:schemeClr val="dk1"/>
+                </a:solidFill>
+                <a:effectLst/>
+                <a:uFillTx/>
+                <a:latin typeface="Calibri"/>
+              </a:defRPr>
+            </a:lvl3pPr>
+            <a:lvl4pPr lvl="3" algn="l" defTabSz="457200">
               <a:lnSpc>
                 <a:spcPct val="100000"/>
               </a:lnSpc>
               <a:spcBef>
                 <a:spcPts val="400"/>
               </a:spcBef>
-              <a:buNone/>
-              <a:tabLst>
-                <a:tab pos="0" algn="l"/>
-              </a:tabLst>
+              <a:buClr>
+                <a:srgbClr val="000000"/>
+              </a:buClr>
+              <a:buFont typeface="Arial"/>
+              <a:buChar char="–"/>
               <a:defRPr lang="en-US" sz="2000" b="0" u="none" strike="noStrike">
                 <a:solidFill>
-                  <a:schemeClr val="dk1">
-                    <a:tint val="75000"/>
-                  </a:schemeClr>
+                  <a:schemeClr val="dk1"/>
                 </a:solidFill>
                 <a:effectLst/>
                 <a:uFillTx/>
                 <a:latin typeface="Calibri"/>
               </a:defRPr>
-            </a:lvl1pPr>
-          </a:lstStyle>
-          <a:p>
-            <a:pPr indent="0" algn="l" defTabSz="457200">
+            </a:lvl4pPr>
+            <a:lvl5pPr lvl="4" algn="l" defTabSz="457200">
               <a:lnSpc>
                 <a:spcPct val="100000"/>
               </a:lnSpc>
               <a:spcBef>
                 <a:spcPts val="400"/>
               </a:spcBef>
-              <a:buNone/>
-              <a:tabLst>
-                <a:tab pos="0" algn="l"/>
-              </a:tabLst>
+              <a:buClr>
+                <a:srgbClr val="000000"/>
+              </a:buClr>
+              <a:buFont typeface="Arial"/>
+              <a:buChar char="»"/>
+              <a:defRPr lang="en-US" sz="2000" b="0" u="none" strike="noStrike">
+                <a:solidFill>
+                  <a:schemeClr val="dk1"/>
+                </a:solidFill>
+                <a:effectLst/>
+                <a:uFillTx/>
+                <a:latin typeface="Calibri"/>
+              </a:defRPr>
+            </a:lvl5pPr>
+          </a:lstStyle>
+          <a:p>
+            <a:pPr marL="343080" indent="-343080" algn="l" defTabSz="457200">
+              <a:lnSpc>
+                <a:spcPct val="100000"/>
+              </a:lnSpc>
+              <a:spcBef>
+                <a:spcPts val="641"/>
+              </a:spcBef>
+              <a:buClr>
+                <a:srgbClr val="000000"/>
+              </a:buClr>
+              <a:buFont typeface="Arial"/>
+              <a:buChar char="•"/>
+            </a:pPr>
+            <a:r>
+              <a:rPr lang="en-US" sz="3200" b="0" u="none" strike="noStrike">
+                <a:solidFill>
+                  <a:schemeClr val="dk1"/>
+                </a:solidFill>
+                <a:effectLst/>
+                <a:uFillTx/>
+                <a:latin typeface="Calibri"/>
+              </a:rPr>
+              <a:t>Click to edit Master text styles</a:t>
+            </a:r>
+            <a:endParaRPr lang="en-US" sz="3200" b="0" u="none" strike="noStrike">
+              <a:solidFill>
+                <a:schemeClr val="dk1"/>
+              </a:solidFill>
+              <a:effectLst/>
+              <a:uFillTx/>
+              <a:latin typeface="Calibri"/>
+            </a:endParaRPr>
+          </a:p>
+          <a:p>
+            <a:pPr marL="743040" lvl="1" indent="-285840" algn="l" defTabSz="457200">
+              <a:lnSpc>
+                <a:spcPct val="100000"/>
+              </a:lnSpc>
+              <a:spcBef>
+                <a:spcPts val="561"/>
+              </a:spcBef>
+              <a:buClr>
+                <a:srgbClr val="000000"/>
+              </a:buClr>
+              <a:buFont typeface="Arial"/>
+              <a:buChar char="–"/>
+            </a:pPr>
+            <a:r>
+              <a:rPr lang="en-US" sz="2800" b="0" u="none" strike="noStrike">
+                <a:solidFill>
+                  <a:schemeClr val="dk1"/>
+                </a:solidFill>
+                <a:effectLst/>
+                <a:uFillTx/>
+                <a:latin typeface="Calibri"/>
+              </a:rPr>
+              <a:t>Second level</a:t>
+            </a:r>
+            <a:endParaRPr lang="en-US" sz="2800" b="0" u="none" strike="noStrike">
+              <a:solidFill>
+                <a:schemeClr val="dk1"/>
+              </a:solidFill>
+              <a:effectLst/>
+              <a:uFillTx/>
+              <a:latin typeface="Calibri"/>
+            </a:endParaRPr>
+          </a:p>
+          <a:p>
+            <a:pPr marL="1143000" lvl="2" indent="-228600" algn="l" defTabSz="457200">
+              <a:lnSpc>
+                <a:spcPct val="100000"/>
+              </a:lnSpc>
+              <a:spcBef>
+                <a:spcPts val="479"/>
+              </a:spcBef>
+              <a:buClr>
+                <a:srgbClr val="000000"/>
+              </a:buClr>
+              <a:buFont typeface="Arial"/>
+              <a:buChar char="•"/>
+            </a:pPr>
+            <a:r>
+              <a:rPr lang="en-US" sz="2400" b="0" u="none" strike="noStrike">
+                <a:solidFill>
+                  <a:schemeClr val="dk1"/>
+                </a:solidFill>
+                <a:effectLst/>
+                <a:uFillTx/>
+                <a:latin typeface="Calibri"/>
+              </a:rPr>
+              <a:t>Third level</a:t>
+            </a:r>
+            <a:endParaRPr lang="en-US" sz="2400" b="0" u="none" strike="noStrike">
+              <a:solidFill>
+                <a:schemeClr val="dk1"/>
+              </a:solidFill>
+              <a:effectLst/>
+              <a:uFillTx/>
+              <a:latin typeface="Calibri"/>
+            </a:endParaRPr>
+          </a:p>
+          <a:p>
+            <a:pPr marL="1600200" lvl="3" indent="-228600" algn="l" defTabSz="457200">
+              <a:lnSpc>
+                <a:spcPct val="100000"/>
+              </a:lnSpc>
+              <a:spcBef>
+                <a:spcPts val="400"/>
+              </a:spcBef>
+              <a:buClr>
+                <a:srgbClr val="000000"/>
+              </a:buClr>
+              <a:buFont typeface="Arial"/>
+              <a:buChar char="–"/>
             </a:pPr>
             <a:r>
               <a:rPr lang="en-US" sz="2000" b="0" u="none" strike="noStrike">
                 <a:solidFill>
-                  <a:schemeClr val="dk1">
-                    <a:tint val="75000"/>
-                  </a:schemeClr>
-                </a:solidFill>
-                <a:effectLst/>
-                <a:uFillTx/>
-                <a:latin typeface="Calibri"/>
-              </a:rPr>
-              <a:t>Click to edit Master text styles</a:t>
+                  <a:schemeClr val="dk1"/>
+                </a:solidFill>
+                <a:effectLst/>
+                <a:uFillTx/>
+                <a:latin typeface="Calibri"/>
+              </a:rPr>
+              <a:t>Fourth level</a:t>
             </a:r>
             <a:endParaRPr lang="en-US" sz="2000" b="0" u="none" strike="noStrike">
               <a:solidFill>
-                <a:schemeClr val="dk1">
-                  <a:tint val="75000"/>
-                </a:schemeClr>
+                <a:schemeClr val="dk1"/>
+              </a:solidFill>
+              <a:effectLst/>
+              <a:uFillTx/>
+              <a:latin typeface="Calibri"/>
+            </a:endParaRPr>
+          </a:p>
+          <a:p>
+            <a:pPr marL="2057400" lvl="4" indent="-228600" algn="l" defTabSz="457200">
+              <a:lnSpc>
+                <a:spcPct val="100000"/>
+              </a:lnSpc>
+              <a:spcBef>
+                <a:spcPts val="400"/>
+              </a:spcBef>
+              <a:buClr>
+                <a:srgbClr val="000000"/>
+              </a:buClr>
+              <a:buFont typeface="Arial"/>
+              <a:buChar char="»"/>
+            </a:pPr>
+            <a:r>
+              <a:rPr lang="en-US" sz="2000" b="0" u="none" strike="noStrike">
+                <a:solidFill>
+                  <a:schemeClr val="dk1"/>
+                </a:solidFill>
+                <a:effectLst/>
+                <a:uFillTx/>
+                <a:latin typeface="Calibri"/>
+              </a:rPr>
+              <a:t>Fifth level</a:t>
+            </a:r>
+            <a:endParaRPr lang="en-US" sz="2000" b="0" u="none" strike="noStrike">
+              <a:solidFill>
+                <a:schemeClr val="dk1"/>
               </a:solidFill>
               <a:effectLst/>
               <a:uFillTx/>
@@ -4537,7 +4470,7 @@
         <p:spPr>
           <a:xfrm>
             <a:off x="457200" y="6356520"/>
-            <a:ext cx="2132640" cy="363960"/>
+            <a:ext cx="2132280" cy="363600"/>
           </a:xfrm>
           <a:prstGeom prst="rect">
             <a:avLst/>
@@ -4619,7 +4552,7 @@
         <p:spPr>
           <a:xfrm>
             <a:off x="3124080" y="6356520"/>
-            <a:ext cx="2894400" cy="363960"/>
+            <a:ext cx="2894040" cy="363600"/>
           </a:xfrm>
           <a:prstGeom prst="rect">
             <a:avLst/>
@@ -4697,7 +4630,7 @@
         <p:spPr>
           <a:xfrm>
             <a:off x="6553080" y="6356520"/>
-            <a:ext cx="2132640" cy="363960"/>
+            <a:ext cx="2132280" cy="363600"/>
           </a:xfrm>
           <a:prstGeom prst="rect">
             <a:avLst/>
@@ -4742,7 +4675,7 @@
                 <a:tab pos="0" algn="l"/>
               </a:tabLst>
             </a:pPr>
-            <a:fld id="{402234D0-76B5-49EA-A91B-A071BC136238}" type="slidenum">
+            <a:fld id="{9348D369-8044-407B-BDEF-B463A1155D50}" type="slidenum">
               <a:rPr lang="en-US" sz="1200" b="0" u="none" strike="noStrike">
                 <a:solidFill>
                   <a:schemeClr val="dk1">
@@ -4772,8 +4705,8 @@
 </file>
 
 <file path=ppt/slideLayouts/slideLayout2.xml><?xml version="1.0" encoding="utf-8"?>
-<p:sldLayout xmlns:a="http://schemas.openxmlformats.org/drawingml/2006/main" xmlns:p="http://schemas.openxmlformats.org/presentationml/2006/main" xmlns:r="http://schemas.openxmlformats.org/officeDocument/2006/relationships" xmlns:p14="http://schemas.microsoft.com/office/powerpoint/2010/main" xmlns:p15="http://schemas.microsoft.com/office/powerpoint/2012/main" xmlns:mc="http://schemas.openxmlformats.org/markup-compatibility/2006" type="blank" preserve="1">
-  <p:cSld name="Comparison">
+<p:sldLayout xmlns:a="http://schemas.openxmlformats.org/drawingml/2006/main" xmlns:p="http://schemas.openxmlformats.org/presentationml/2006/main" xmlns:r="http://schemas.openxmlformats.org/officeDocument/2006/relationships" xmlns:p14="http://schemas.microsoft.com/office/powerpoint/2010/main" xmlns:p15="http://schemas.microsoft.com/office/powerpoint/2012/main" xmlns:mc="http://schemas.openxmlformats.org/markup-compatibility/2006" type="obj" preserve="1">
+  <p:cSld name="Title and Content">
     <p:bg>
       <p:bgPr>
         <a:solidFill>
@@ -4797,7 +4730,7 @@
       </p:grpSpPr>
       <p:sp>
         <p:nvSpPr>
-          <p:cNvPr id="8" name="PlaceHolder 1"/>
+          <p:cNvPr id="7" name="PlaceHolder 1"/>
           <p:cNvSpPr>
             <a:spLocks noGrp="1"/>
           </p:cNvSpPr>
@@ -4808,7 +4741,7 @@
         <p:spPr>
           <a:xfrm>
             <a:off x="457200" y="274680"/>
-            <a:ext cx="8228520" cy="1141920"/>
+            <a:ext cx="8228160" cy="1141560"/>
           </a:xfrm>
           <a:prstGeom prst="rect">
             <a:avLst/>
@@ -4875,7 +4808,7 @@
       </p:sp>
       <p:sp>
         <p:nvSpPr>
-          <p:cNvPr id="9" name="PlaceHolder 2"/>
+          <p:cNvPr id="8" name="PlaceHolder 2"/>
           <p:cNvSpPr>
             <a:spLocks noGrp="1"/>
           </p:cNvSpPr>
@@ -4885,92 +4818,8 @@
         </p:nvSpPr>
         <p:spPr>
           <a:xfrm>
-            <a:off x="457200" y="1535040"/>
-            <a:ext cx="4039200" cy="638640"/>
-          </a:xfrm>
-          <a:prstGeom prst="rect">
-            <a:avLst/>
-          </a:prstGeom>
-          <a:noFill/>
-          <a:ln w="0">
-            <a:noFill/>
-          </a:ln>
-        </p:spPr>
-        <p:txBody>
-          <a:bodyPr lIns="91440" tIns="45720" rIns="91440" bIns="45720" anchor="b">
-            <a:noAutofit/>
-          </a:bodyPr>
-          <a:lstStyle>
-            <a:lvl1pPr indent="0" algn="l" defTabSz="457200">
-              <a:lnSpc>
-                <a:spcPct val="100000"/>
-              </a:lnSpc>
-              <a:spcBef>
-                <a:spcPts val="479"/>
-              </a:spcBef>
-              <a:buNone/>
-              <a:tabLst>
-                <a:tab pos="0" algn="l"/>
-              </a:tabLst>
-              <a:defRPr lang="en-US" sz="2400" b="1" u="none" strike="noStrike">
-                <a:solidFill>
-                  <a:schemeClr val="dk1"/>
-                </a:solidFill>
-                <a:effectLst/>
-                <a:uFillTx/>
-                <a:latin typeface="Calibri"/>
-              </a:defRPr>
-            </a:lvl1pPr>
-          </a:lstStyle>
-          <a:p>
-            <a:pPr indent="0" algn="l" defTabSz="457200">
-              <a:lnSpc>
-                <a:spcPct val="100000"/>
-              </a:lnSpc>
-              <a:spcBef>
-                <a:spcPts val="479"/>
-              </a:spcBef>
-              <a:buNone/>
-              <a:tabLst>
-                <a:tab pos="0" algn="l"/>
-              </a:tabLst>
-            </a:pPr>
-            <a:r>
-              <a:rPr lang="en-US" sz="2400" b="1" u="none" strike="noStrike">
-                <a:solidFill>
-                  <a:schemeClr val="dk1"/>
-                </a:solidFill>
-                <a:effectLst/>
-                <a:uFillTx/>
-                <a:latin typeface="Calibri"/>
-              </a:rPr>
-              <a:t>Click to edit Master text styles</a:t>
-            </a:r>
-            <a:endParaRPr lang="en-US" sz="2400" b="0" u="none" strike="noStrike">
-              <a:solidFill>
-                <a:schemeClr val="dk1"/>
-              </a:solidFill>
-              <a:effectLst/>
-              <a:uFillTx/>
-              <a:latin typeface="Calibri"/>
-            </a:endParaRPr>
-          </a:p>
-        </p:txBody>
-      </p:sp>
-      <p:sp>
-        <p:nvSpPr>
-          <p:cNvPr id="10" name="PlaceHolder 3"/>
-          <p:cNvSpPr>
-            <a:spLocks noGrp="1"/>
-          </p:cNvSpPr>
-          <p:nvPr>
-            <p:ph type="body"/>
-          </p:nvPr>
-        </p:nvSpPr>
-        <p:spPr>
-          <a:xfrm>
-            <a:off x="457200" y="2174760"/>
-            <a:ext cx="4039200" cy="3950280"/>
+            <a:off x="457200" y="1600200"/>
+            <a:ext cx="8228160" cy="4524480"/>
           </a:xfrm>
           <a:prstGeom prst="rect">
             <a:avLst/>
@@ -4990,6 +4839,48 @@
                 <a:spcPct val="100000"/>
               </a:lnSpc>
               <a:spcBef>
+                <a:spcPts val="641"/>
+              </a:spcBef>
+              <a:buClr>
+                <a:srgbClr val="000000"/>
+              </a:buClr>
+              <a:buFont typeface="Arial"/>
+              <a:buChar char="•"/>
+              <a:defRPr lang="en-US" sz="3200" b="0" u="none" strike="noStrike">
+                <a:solidFill>
+                  <a:schemeClr val="dk1"/>
+                </a:solidFill>
+                <a:effectLst/>
+                <a:uFillTx/>
+                <a:latin typeface="Calibri"/>
+              </a:defRPr>
+            </a:lvl1pPr>
+            <a:lvl2pPr lvl="1" algn="l" defTabSz="457200">
+              <a:lnSpc>
+                <a:spcPct val="100000"/>
+              </a:lnSpc>
+              <a:spcBef>
+                <a:spcPts val="561"/>
+              </a:spcBef>
+              <a:buClr>
+                <a:srgbClr val="000000"/>
+              </a:buClr>
+              <a:buFont typeface="Arial"/>
+              <a:buChar char="–"/>
+              <a:defRPr lang="en-US" sz="2800" b="0" u="none" strike="noStrike">
+                <a:solidFill>
+                  <a:schemeClr val="dk1"/>
+                </a:solidFill>
+                <a:effectLst/>
+                <a:uFillTx/>
+                <a:latin typeface="Calibri"/>
+              </a:defRPr>
+            </a:lvl2pPr>
+            <a:lvl3pPr lvl="2" algn="l" defTabSz="457200">
+              <a:lnSpc>
+                <a:spcPct val="100000"/>
+              </a:lnSpc>
+              <a:spcBef>
                 <a:spcPts val="479"/>
               </a:spcBef>
               <a:buClr>
@@ -4997,9 +4888,6 @@
               </a:buClr>
               <a:buFont typeface="Arial"/>
               <a:buChar char="•"/>
-              <a:tabLst>
-                <a:tab pos="0" algn="l"/>
-              </a:tabLst>
               <a:defRPr lang="en-US" sz="2400" b="0" u="none" strike="noStrike">
                 <a:solidFill>
                   <a:schemeClr val="dk1"/>
@@ -5008,8 +4896,8 @@
                 <a:uFillTx/>
                 <a:latin typeface="Calibri"/>
               </a:defRPr>
-            </a:lvl1pPr>
-            <a:lvl2pPr lvl="1" algn="l" defTabSz="457200">
+            </a:lvl3pPr>
+            <a:lvl4pPr lvl="3" algn="l" defTabSz="457200">
               <a:lnSpc>
                 <a:spcPct val="100000"/>
               </a:lnSpc>
@@ -5021,9 +4909,6 @@
               </a:buClr>
               <a:buFont typeface="Arial"/>
               <a:buChar char="–"/>
-              <a:tabLst>
-                <a:tab pos="0" algn="l"/>
-              </a:tabLst>
               <a:defRPr lang="en-US" sz="2000" b="0" u="none" strike="noStrike">
                 <a:solidFill>
                   <a:schemeClr val="dk1"/>
@@ -5032,82 +4917,99 @@
                 <a:uFillTx/>
                 <a:latin typeface="Calibri"/>
               </a:defRPr>
-            </a:lvl2pPr>
-            <a:lvl3pPr lvl="2" algn="l" defTabSz="457200">
+            </a:lvl4pPr>
+            <a:lvl5pPr lvl="4" algn="l" defTabSz="457200">
               <a:lnSpc>
                 <a:spcPct val="100000"/>
               </a:lnSpc>
               <a:spcBef>
-                <a:spcPts val="360"/>
+                <a:spcPts val="400"/>
+              </a:spcBef>
+              <a:buClr>
+                <a:srgbClr val="000000"/>
+              </a:buClr>
+              <a:buFont typeface="Arial"/>
+              <a:buChar char="»"/>
+              <a:defRPr lang="en-US" sz="2000" b="0" u="none" strike="noStrike">
+                <a:solidFill>
+                  <a:schemeClr val="dk1"/>
+                </a:solidFill>
+                <a:effectLst/>
+                <a:uFillTx/>
+                <a:latin typeface="Calibri"/>
+              </a:defRPr>
+            </a:lvl5pPr>
+          </a:lstStyle>
+          <a:p>
+            <a:pPr marL="343080" indent="-343080" algn="l" defTabSz="457200">
+              <a:lnSpc>
+                <a:spcPct val="100000"/>
+              </a:lnSpc>
+              <a:spcBef>
+                <a:spcPts val="641"/>
               </a:spcBef>
               <a:buClr>
                 <a:srgbClr val="000000"/>
               </a:buClr>
               <a:buFont typeface="Arial"/>
               <a:buChar char="•"/>
-              <a:tabLst>
-                <a:tab pos="0" algn="l"/>
-              </a:tabLst>
-              <a:defRPr lang="en-US" sz="1800" b="0" u="none" strike="noStrike">
-                <a:solidFill>
-                  <a:schemeClr val="dk1"/>
-                </a:solidFill>
-                <a:effectLst/>
-                <a:uFillTx/>
-                <a:latin typeface="Calibri"/>
-              </a:defRPr>
-            </a:lvl3pPr>
-            <a:lvl4pPr lvl="3" algn="l" defTabSz="457200">
+            </a:pPr>
+            <a:r>
+              <a:rPr lang="en-US" sz="3200" b="0" u="none" strike="noStrike">
+                <a:solidFill>
+                  <a:schemeClr val="dk1"/>
+                </a:solidFill>
+                <a:effectLst/>
+                <a:uFillTx/>
+                <a:latin typeface="Calibri"/>
+              </a:rPr>
+              <a:t>Click to edit Master text styles</a:t>
+            </a:r>
+            <a:endParaRPr lang="en-US" sz="3200" b="0" u="none" strike="noStrike">
+              <a:solidFill>
+                <a:schemeClr val="dk1"/>
+              </a:solidFill>
+              <a:effectLst/>
+              <a:uFillTx/>
+              <a:latin typeface="Calibri"/>
+            </a:endParaRPr>
+          </a:p>
+          <a:p>
+            <a:pPr marL="743040" lvl="1" indent="-285840" algn="l" defTabSz="457200">
               <a:lnSpc>
                 <a:spcPct val="100000"/>
               </a:lnSpc>
               <a:spcBef>
-                <a:spcPts val="320"/>
+                <a:spcPts val="561"/>
               </a:spcBef>
               <a:buClr>
                 <a:srgbClr val="000000"/>
               </a:buClr>
               <a:buFont typeface="Arial"/>
               <a:buChar char="–"/>
-              <a:tabLst>
-                <a:tab pos="0" algn="l"/>
-              </a:tabLst>
-              <a:defRPr lang="en-US" sz="1600" b="0" u="none" strike="noStrike">
-                <a:solidFill>
-                  <a:schemeClr val="dk1"/>
-                </a:solidFill>
-                <a:effectLst/>
-                <a:uFillTx/>
-                <a:latin typeface="Calibri"/>
-              </a:defRPr>
-            </a:lvl4pPr>
-            <a:lvl5pPr lvl="4" algn="l" defTabSz="457200">
-              <a:lnSpc>
-                <a:spcPct val="100000"/>
-              </a:lnSpc>
-              <a:spcBef>
-                <a:spcPts val="320"/>
-              </a:spcBef>
-              <a:buClr>
-                <a:srgbClr val="000000"/>
-              </a:buClr>
-              <a:buFont typeface="Arial"/>
-              <a:buChar char="»"/>
-              <a:tabLst>
-                <a:tab pos="0" algn="l"/>
-              </a:tabLst>
-              <a:defRPr lang="en-US" sz="1600" b="0" u="none" strike="noStrike">
-                <a:solidFill>
-                  <a:schemeClr val="dk1"/>
-                </a:solidFill>
-                <a:effectLst/>
-                <a:uFillTx/>
-                <a:latin typeface="Calibri"/>
-              </a:defRPr>
-            </a:lvl5pPr>
-          </a:lstStyle>
-          <a:p>
-            <a:pPr marL="343080" indent="-343080" algn="l" defTabSz="457200">
+            </a:pPr>
+            <a:r>
+              <a:rPr lang="en-US" sz="2800" b="0" u="none" strike="noStrike">
+                <a:solidFill>
+                  <a:schemeClr val="dk1"/>
+                </a:solidFill>
+                <a:effectLst/>
+                <a:uFillTx/>
+                <a:latin typeface="Calibri"/>
+              </a:rPr>
+              <a:t>Second level</a:t>
+            </a:r>
+            <a:endParaRPr lang="en-US" sz="2800" b="0" u="none" strike="noStrike">
+              <a:solidFill>
+                <a:schemeClr val="dk1"/>
+              </a:solidFill>
+              <a:effectLst/>
+              <a:uFillTx/>
+              <a:latin typeface="Calibri"/>
+            </a:endParaRPr>
+          </a:p>
+          <a:p>
+            <a:pPr marL="1143000" lvl="2" indent="-228600" algn="l" defTabSz="457200">
               <a:lnSpc>
                 <a:spcPct val="100000"/>
               </a:lnSpc>
@@ -5119,9 +5021,6 @@
               </a:buClr>
               <a:buFont typeface="Arial"/>
               <a:buChar char="•"/>
-              <a:tabLst>
-                <a:tab pos="0" algn="l"/>
-              </a:tabLst>
             </a:pPr>
             <a:r>
               <a:rPr lang="en-US" sz="2400" b="0" u="none" strike="noStrike">
@@ -5132,7 +5031,7 @@
                 <a:uFillTx/>
                 <a:latin typeface="Calibri"/>
               </a:rPr>
-              <a:t>Click to edit Master text styles</a:t>
+              <a:t>Third level</a:t>
             </a:r>
             <a:endParaRPr lang="en-US" sz="2400" b="0" u="none" strike="noStrike">
               <a:solidFill>
@@ -5144,7 +5043,7 @@
             </a:endParaRPr>
           </a:p>
           <a:p>
-            <a:pPr marL="743040" lvl="1" indent="-285840" algn="l" defTabSz="457200">
+            <a:pPr marL="1600200" lvl="3" indent="-228600" algn="l" defTabSz="457200">
               <a:lnSpc>
                 <a:spcPct val="100000"/>
               </a:lnSpc>
@@ -5156,9 +5055,6 @@
               </a:buClr>
               <a:buFont typeface="Arial"/>
               <a:buChar char="–"/>
-              <a:tabLst>
-                <a:tab pos="0" algn="l"/>
-              </a:tabLst>
             </a:pPr>
             <a:r>
               <a:rPr lang="en-US" sz="2000" b="0" u="none" strike="noStrike">
@@ -5169,7 +5065,7 @@
                 <a:uFillTx/>
                 <a:latin typeface="Calibri"/>
               </a:rPr>
-              <a:t>Second level</a:t>
+              <a:t>Fourth level</a:t>
             </a:r>
             <a:endParaRPr lang="en-US" sz="2000" b="0" u="none" strike="noStrike">
               <a:solidFill>
@@ -5181,98 +5077,21 @@
             </a:endParaRPr>
           </a:p>
           <a:p>
-            <a:pPr marL="1143000" lvl="2" indent="-228600" algn="l" defTabSz="457200">
+            <a:pPr marL="2057400" lvl="4" indent="-228600" algn="l" defTabSz="457200">
               <a:lnSpc>
                 <a:spcPct val="100000"/>
               </a:lnSpc>
               <a:spcBef>
-                <a:spcPts val="360"/>
-              </a:spcBef>
-              <a:buClr>
-                <a:srgbClr val="000000"/>
-              </a:buClr>
-              <a:buFont typeface="Arial"/>
-              <a:buChar char="•"/>
-              <a:tabLst>
-                <a:tab pos="0" algn="l"/>
-              </a:tabLst>
-            </a:pPr>
-            <a:r>
-              <a:rPr lang="en-US" sz="1800" b="0" u="none" strike="noStrike">
-                <a:solidFill>
-                  <a:schemeClr val="dk1"/>
-                </a:solidFill>
-                <a:effectLst/>
-                <a:uFillTx/>
-                <a:latin typeface="Calibri"/>
-              </a:rPr>
-              <a:t>Third level</a:t>
-            </a:r>
-            <a:endParaRPr lang="en-US" sz="1800" b="0" u="none" strike="noStrike">
-              <a:solidFill>
-                <a:schemeClr val="dk1"/>
-              </a:solidFill>
-              <a:effectLst/>
-              <a:uFillTx/>
-              <a:latin typeface="Calibri"/>
-            </a:endParaRPr>
-          </a:p>
-          <a:p>
-            <a:pPr marL="1600200" lvl="3" indent="-228600" algn="l" defTabSz="457200">
-              <a:lnSpc>
-                <a:spcPct val="100000"/>
-              </a:lnSpc>
-              <a:spcBef>
-                <a:spcPts val="320"/>
-              </a:spcBef>
-              <a:buClr>
-                <a:srgbClr val="000000"/>
-              </a:buClr>
-              <a:buFont typeface="Arial"/>
-              <a:buChar char="–"/>
-              <a:tabLst>
-                <a:tab pos="0" algn="l"/>
-              </a:tabLst>
-            </a:pPr>
-            <a:r>
-              <a:rPr lang="en-US" sz="1600" b="0" u="none" strike="noStrike">
-                <a:solidFill>
-                  <a:schemeClr val="dk1"/>
-                </a:solidFill>
-                <a:effectLst/>
-                <a:uFillTx/>
-                <a:latin typeface="Calibri"/>
-              </a:rPr>
-              <a:t>Fourth level</a:t>
-            </a:r>
-            <a:endParaRPr lang="en-US" sz="1600" b="0" u="none" strike="noStrike">
-              <a:solidFill>
-                <a:schemeClr val="dk1"/>
-              </a:solidFill>
-              <a:effectLst/>
-              <a:uFillTx/>
-              <a:latin typeface="Calibri"/>
-            </a:endParaRPr>
-          </a:p>
-          <a:p>
-            <a:pPr marL="2057400" lvl="4" indent="-228600" algn="l" defTabSz="457200">
-              <a:lnSpc>
-                <a:spcPct val="100000"/>
-              </a:lnSpc>
-              <a:spcBef>
-                <a:spcPts val="320"/>
+                <a:spcPts val="400"/>
               </a:spcBef>
               <a:buClr>
                 <a:srgbClr val="000000"/>
               </a:buClr>
               <a:buFont typeface="Arial"/>
               <a:buChar char="»"/>
-              <a:tabLst>
-                <a:tab pos="0" algn="l"/>
-              </a:tabLst>
-            </a:pPr>
-            <a:r>
-              <a:rPr lang="en-US" sz="1600" b="0" u="none" strike="noStrike">
+            </a:pPr>
+            <a:r>
+              <a:rPr lang="en-US" sz="2000" b="0" u="none" strike="noStrike">
                 <a:solidFill>
                   <a:schemeClr val="dk1"/>
                 </a:solidFill>
@@ -5282,7 +5101,7 @@
               </a:rPr>
               <a:t>Fifth level</a:t>
             </a:r>
-            <a:endParaRPr lang="en-US" sz="1600" b="0" u="none" strike="noStrike">
+            <a:endParaRPr lang="en-US" sz="2000" b="0" u="none" strike="noStrike">
               <a:solidFill>
                 <a:schemeClr val="dk1"/>
               </a:solidFill>
@@ -5295,427 +5114,7 @@
       </p:sp>
       <p:sp>
         <p:nvSpPr>
-          <p:cNvPr id="11" name="PlaceHolder 4"/>
-          <p:cNvSpPr>
-            <a:spLocks noGrp="1"/>
-          </p:cNvSpPr>
-          <p:nvPr>
-            <p:ph type="body"/>
-          </p:nvPr>
-        </p:nvSpPr>
-        <p:spPr>
-          <a:xfrm>
-            <a:off x="4645080" y="1535040"/>
-            <a:ext cx="4040640" cy="638640"/>
-          </a:xfrm>
-          <a:prstGeom prst="rect">
-            <a:avLst/>
-          </a:prstGeom>
-          <a:noFill/>
-          <a:ln w="0">
-            <a:noFill/>
-          </a:ln>
-        </p:spPr>
-        <p:txBody>
-          <a:bodyPr lIns="91440" tIns="45720" rIns="91440" bIns="45720" anchor="b">
-            <a:noAutofit/>
-          </a:bodyPr>
-          <a:lstStyle>
-            <a:lvl1pPr indent="0" algn="l" defTabSz="457200">
-              <a:lnSpc>
-                <a:spcPct val="100000"/>
-              </a:lnSpc>
-              <a:spcBef>
-                <a:spcPts val="479"/>
-              </a:spcBef>
-              <a:buNone/>
-              <a:tabLst>
-                <a:tab pos="0" algn="l"/>
-              </a:tabLst>
-              <a:defRPr lang="en-US" sz="2400" b="1" u="none" strike="noStrike">
-                <a:solidFill>
-                  <a:schemeClr val="dk1"/>
-                </a:solidFill>
-                <a:effectLst/>
-                <a:uFillTx/>
-                <a:latin typeface="Calibri"/>
-              </a:defRPr>
-            </a:lvl1pPr>
-          </a:lstStyle>
-          <a:p>
-            <a:pPr indent="0" algn="l" defTabSz="457200">
-              <a:lnSpc>
-                <a:spcPct val="100000"/>
-              </a:lnSpc>
-              <a:spcBef>
-                <a:spcPts val="479"/>
-              </a:spcBef>
-              <a:buNone/>
-              <a:tabLst>
-                <a:tab pos="0" algn="l"/>
-              </a:tabLst>
-            </a:pPr>
-            <a:r>
-              <a:rPr lang="en-US" sz="2400" b="1" u="none" strike="noStrike">
-                <a:solidFill>
-                  <a:schemeClr val="dk1"/>
-                </a:solidFill>
-                <a:effectLst/>
-                <a:uFillTx/>
-                <a:latin typeface="Calibri"/>
-              </a:rPr>
-              <a:t>Click to edit Master text styles</a:t>
-            </a:r>
-            <a:endParaRPr lang="en-US" sz="2400" b="0" u="none" strike="noStrike">
-              <a:solidFill>
-                <a:schemeClr val="dk1"/>
-              </a:solidFill>
-              <a:effectLst/>
-              <a:uFillTx/>
-              <a:latin typeface="Calibri"/>
-            </a:endParaRPr>
-          </a:p>
-        </p:txBody>
-      </p:sp>
-      <p:sp>
-        <p:nvSpPr>
-          <p:cNvPr id="12" name="PlaceHolder 5"/>
-          <p:cNvSpPr>
-            <a:spLocks noGrp="1"/>
-          </p:cNvSpPr>
-          <p:nvPr>
-            <p:ph type="body"/>
-          </p:nvPr>
-        </p:nvSpPr>
-        <p:spPr>
-          <a:xfrm>
-            <a:off x="4645080" y="2174760"/>
-            <a:ext cx="4040640" cy="3950280"/>
-          </a:xfrm>
-          <a:prstGeom prst="rect">
-            <a:avLst/>
-          </a:prstGeom>
-          <a:noFill/>
-          <a:ln w="0">
-            <a:noFill/>
-          </a:ln>
-        </p:spPr>
-        <p:txBody>
-          <a:bodyPr lIns="91440" tIns="45720" rIns="91440" bIns="45720" anchor="t">
-            <a:noAutofit/>
-          </a:bodyPr>
-          <a:lstStyle>
-            <a:lvl1pPr algn="l" defTabSz="457200">
-              <a:lnSpc>
-                <a:spcPct val="100000"/>
-              </a:lnSpc>
-              <a:spcBef>
-                <a:spcPts val="479"/>
-              </a:spcBef>
-              <a:buClr>
-                <a:srgbClr val="000000"/>
-              </a:buClr>
-              <a:buFont typeface="Arial"/>
-              <a:buChar char="•"/>
-              <a:tabLst>
-                <a:tab pos="0" algn="l"/>
-              </a:tabLst>
-              <a:defRPr lang="en-US" sz="2400" b="0" u="none" strike="noStrike">
-                <a:solidFill>
-                  <a:schemeClr val="dk1"/>
-                </a:solidFill>
-                <a:effectLst/>
-                <a:uFillTx/>
-                <a:latin typeface="Calibri"/>
-              </a:defRPr>
-            </a:lvl1pPr>
-            <a:lvl2pPr lvl="1" algn="l" defTabSz="457200">
-              <a:lnSpc>
-                <a:spcPct val="100000"/>
-              </a:lnSpc>
-              <a:spcBef>
-                <a:spcPts val="400"/>
-              </a:spcBef>
-              <a:buClr>
-                <a:srgbClr val="000000"/>
-              </a:buClr>
-              <a:buFont typeface="Arial"/>
-              <a:buChar char="–"/>
-              <a:tabLst>
-                <a:tab pos="0" algn="l"/>
-              </a:tabLst>
-              <a:defRPr lang="en-US" sz="2000" b="0" u="none" strike="noStrike">
-                <a:solidFill>
-                  <a:schemeClr val="dk1"/>
-                </a:solidFill>
-                <a:effectLst/>
-                <a:uFillTx/>
-                <a:latin typeface="Calibri"/>
-              </a:defRPr>
-            </a:lvl2pPr>
-            <a:lvl3pPr lvl="2" algn="l" defTabSz="457200">
-              <a:lnSpc>
-                <a:spcPct val="100000"/>
-              </a:lnSpc>
-              <a:spcBef>
-                <a:spcPts val="360"/>
-              </a:spcBef>
-              <a:buClr>
-                <a:srgbClr val="000000"/>
-              </a:buClr>
-              <a:buFont typeface="Arial"/>
-              <a:buChar char="•"/>
-              <a:tabLst>
-                <a:tab pos="0" algn="l"/>
-              </a:tabLst>
-              <a:defRPr lang="en-US" sz="1800" b="0" u="none" strike="noStrike">
-                <a:solidFill>
-                  <a:schemeClr val="dk1"/>
-                </a:solidFill>
-                <a:effectLst/>
-                <a:uFillTx/>
-                <a:latin typeface="Calibri"/>
-              </a:defRPr>
-            </a:lvl3pPr>
-            <a:lvl4pPr lvl="3" algn="l" defTabSz="457200">
-              <a:lnSpc>
-                <a:spcPct val="100000"/>
-              </a:lnSpc>
-              <a:spcBef>
-                <a:spcPts val="320"/>
-              </a:spcBef>
-              <a:buClr>
-                <a:srgbClr val="000000"/>
-              </a:buClr>
-              <a:buFont typeface="Arial"/>
-              <a:buChar char="–"/>
-              <a:tabLst>
-                <a:tab pos="0" algn="l"/>
-              </a:tabLst>
-              <a:defRPr lang="en-US" sz="1600" b="0" u="none" strike="noStrike">
-                <a:solidFill>
-                  <a:schemeClr val="dk1"/>
-                </a:solidFill>
-                <a:effectLst/>
-                <a:uFillTx/>
-                <a:latin typeface="Calibri"/>
-              </a:defRPr>
-            </a:lvl4pPr>
-            <a:lvl5pPr lvl="4" algn="l" defTabSz="457200">
-              <a:lnSpc>
-                <a:spcPct val="100000"/>
-              </a:lnSpc>
-              <a:spcBef>
-                <a:spcPts val="320"/>
-              </a:spcBef>
-              <a:buClr>
-                <a:srgbClr val="000000"/>
-              </a:buClr>
-              <a:buFont typeface="Arial"/>
-              <a:buChar char="»"/>
-              <a:tabLst>
-                <a:tab pos="0" algn="l"/>
-              </a:tabLst>
-              <a:defRPr lang="en-US" sz="1600" b="0" u="none" strike="noStrike">
-                <a:solidFill>
-                  <a:schemeClr val="dk1"/>
-                </a:solidFill>
-                <a:effectLst/>
-                <a:uFillTx/>
-                <a:latin typeface="Calibri"/>
-              </a:defRPr>
-            </a:lvl5pPr>
-          </a:lstStyle>
-          <a:p>
-            <a:pPr marL="343080" indent="-343080" algn="l" defTabSz="457200">
-              <a:lnSpc>
-                <a:spcPct val="100000"/>
-              </a:lnSpc>
-              <a:spcBef>
-                <a:spcPts val="479"/>
-              </a:spcBef>
-              <a:buClr>
-                <a:srgbClr val="000000"/>
-              </a:buClr>
-              <a:buFont typeface="Arial"/>
-              <a:buChar char="•"/>
-              <a:tabLst>
-                <a:tab pos="0" algn="l"/>
-              </a:tabLst>
-            </a:pPr>
-            <a:r>
-              <a:rPr lang="en-US" sz="2400" b="0" u="none" strike="noStrike">
-                <a:solidFill>
-                  <a:schemeClr val="dk1"/>
-                </a:solidFill>
-                <a:effectLst/>
-                <a:uFillTx/>
-                <a:latin typeface="Calibri"/>
-              </a:rPr>
-              <a:t>Click to edit Master text styles</a:t>
-            </a:r>
-            <a:endParaRPr lang="en-US" sz="2400" b="0" u="none" strike="noStrike">
-              <a:solidFill>
-                <a:schemeClr val="dk1"/>
-              </a:solidFill>
-              <a:effectLst/>
-              <a:uFillTx/>
-              <a:latin typeface="Calibri"/>
-            </a:endParaRPr>
-          </a:p>
-          <a:p>
-            <a:pPr marL="743040" lvl="1" indent="-285840" algn="l" defTabSz="457200">
-              <a:lnSpc>
-                <a:spcPct val="100000"/>
-              </a:lnSpc>
-              <a:spcBef>
-                <a:spcPts val="400"/>
-              </a:spcBef>
-              <a:buClr>
-                <a:srgbClr val="000000"/>
-              </a:buClr>
-              <a:buFont typeface="Arial"/>
-              <a:buChar char="–"/>
-              <a:tabLst>
-                <a:tab pos="0" algn="l"/>
-              </a:tabLst>
-            </a:pPr>
-            <a:r>
-              <a:rPr lang="en-US" sz="2000" b="0" u="none" strike="noStrike">
-                <a:solidFill>
-                  <a:schemeClr val="dk1"/>
-                </a:solidFill>
-                <a:effectLst/>
-                <a:uFillTx/>
-                <a:latin typeface="Calibri"/>
-              </a:rPr>
-              <a:t>Second level</a:t>
-            </a:r>
-            <a:endParaRPr lang="en-US" sz="2000" b="0" u="none" strike="noStrike">
-              <a:solidFill>
-                <a:schemeClr val="dk1"/>
-              </a:solidFill>
-              <a:effectLst/>
-              <a:uFillTx/>
-              <a:latin typeface="Calibri"/>
-            </a:endParaRPr>
-          </a:p>
-          <a:p>
-            <a:pPr marL="1143000" lvl="2" indent="-228600" algn="l" defTabSz="457200">
-              <a:lnSpc>
-                <a:spcPct val="100000"/>
-              </a:lnSpc>
-              <a:spcBef>
-                <a:spcPts val="360"/>
-              </a:spcBef>
-              <a:buClr>
-                <a:srgbClr val="000000"/>
-              </a:buClr>
-              <a:buFont typeface="Arial"/>
-              <a:buChar char="•"/>
-              <a:tabLst>
-                <a:tab pos="0" algn="l"/>
-              </a:tabLst>
-            </a:pPr>
-            <a:r>
-              <a:rPr lang="en-US" sz="1800" b="0" u="none" strike="noStrike">
-                <a:solidFill>
-                  <a:schemeClr val="dk1"/>
-                </a:solidFill>
-                <a:effectLst/>
-                <a:uFillTx/>
-                <a:latin typeface="Calibri"/>
-              </a:rPr>
-              <a:t>Third level</a:t>
-            </a:r>
-            <a:endParaRPr lang="en-US" sz="1800" b="0" u="none" strike="noStrike">
-              <a:solidFill>
-                <a:schemeClr val="dk1"/>
-              </a:solidFill>
-              <a:effectLst/>
-              <a:uFillTx/>
-              <a:latin typeface="Calibri"/>
-            </a:endParaRPr>
-          </a:p>
-          <a:p>
-            <a:pPr marL="1600200" lvl="3" indent="-228600" algn="l" defTabSz="457200">
-              <a:lnSpc>
-                <a:spcPct val="100000"/>
-              </a:lnSpc>
-              <a:spcBef>
-                <a:spcPts val="320"/>
-              </a:spcBef>
-              <a:buClr>
-                <a:srgbClr val="000000"/>
-              </a:buClr>
-              <a:buFont typeface="Arial"/>
-              <a:buChar char="–"/>
-              <a:tabLst>
-                <a:tab pos="0" algn="l"/>
-              </a:tabLst>
-            </a:pPr>
-            <a:r>
-              <a:rPr lang="en-US" sz="1600" b="0" u="none" strike="noStrike">
-                <a:solidFill>
-                  <a:schemeClr val="dk1"/>
-                </a:solidFill>
-                <a:effectLst/>
-                <a:uFillTx/>
-                <a:latin typeface="Calibri"/>
-              </a:rPr>
-              <a:t>Fourth level</a:t>
-            </a:r>
-            <a:endParaRPr lang="en-US" sz="1600" b="0" u="none" strike="noStrike">
-              <a:solidFill>
-                <a:schemeClr val="dk1"/>
-              </a:solidFill>
-              <a:effectLst/>
-              <a:uFillTx/>
-              <a:latin typeface="Calibri"/>
-            </a:endParaRPr>
-          </a:p>
-          <a:p>
-            <a:pPr marL="2057400" lvl="4" indent="-228600" algn="l" defTabSz="457200">
-              <a:lnSpc>
-                <a:spcPct val="100000"/>
-              </a:lnSpc>
-              <a:spcBef>
-                <a:spcPts val="320"/>
-              </a:spcBef>
-              <a:buClr>
-                <a:srgbClr val="000000"/>
-              </a:buClr>
-              <a:buFont typeface="Arial"/>
-              <a:buChar char="»"/>
-              <a:tabLst>
-                <a:tab pos="0" algn="l"/>
-              </a:tabLst>
-            </a:pPr>
-            <a:r>
-              <a:rPr lang="en-US" sz="1600" b="0" u="none" strike="noStrike">
-                <a:solidFill>
-                  <a:schemeClr val="dk1"/>
-                </a:solidFill>
-                <a:effectLst/>
-                <a:uFillTx/>
-                <a:latin typeface="Calibri"/>
-              </a:rPr>
-              <a:t>Fifth level</a:t>
-            </a:r>
-            <a:endParaRPr lang="en-US" sz="1600" b="0" u="none" strike="noStrike">
-              <a:solidFill>
-                <a:schemeClr val="dk1"/>
-              </a:solidFill>
-              <a:effectLst/>
-              <a:uFillTx/>
-              <a:latin typeface="Calibri"/>
-            </a:endParaRPr>
-          </a:p>
-        </p:txBody>
-      </p:sp>
-      <p:sp>
-        <p:nvSpPr>
-          <p:cNvPr id="13" name="PlaceHolder 6"/>
+          <p:cNvPr id="9" name="PlaceHolder 3"/>
           <p:cNvSpPr>
             <a:spLocks noGrp="1"/>
           </p:cNvSpPr>
@@ -5726,7 +5125,7 @@
         <p:spPr>
           <a:xfrm>
             <a:off x="457200" y="6356520"/>
-            <a:ext cx="2132640" cy="363960"/>
+            <a:ext cx="2132280" cy="363600"/>
           </a:xfrm>
           <a:prstGeom prst="rect">
             <a:avLst/>
@@ -5782,7 +5181,7 @@
                 <a:uFillTx/>
                 <a:latin typeface="Calibri"/>
               </a:rPr>
-              <a:t>&lt;fecha/hora&gt;</a:t>
+              <a:t> </a:t>
             </a:r>
             <a:endParaRPr lang="es-CO" sz="1200" b="0" u="none" strike="noStrike">
               <a:solidFill>
@@ -5797,7 +5196,7 @@
       </p:sp>
       <p:sp>
         <p:nvSpPr>
-          <p:cNvPr id="14" name="PlaceHolder 7"/>
+          <p:cNvPr id="10" name="PlaceHolder 4"/>
           <p:cNvSpPr>
             <a:spLocks noGrp="1"/>
           </p:cNvSpPr>
@@ -5808,7 +5207,7 @@
         <p:spPr>
           <a:xfrm>
             <a:off x="3124080" y="6356520"/>
-            <a:ext cx="2894400" cy="363960"/>
+            <a:ext cx="2894040" cy="363600"/>
           </a:xfrm>
           <a:prstGeom prst="rect">
             <a:avLst/>
@@ -5860,7 +5259,7 @@
                 <a:uFillTx/>
                 <a:latin typeface="Times New Roman"/>
               </a:rPr>
-              <a:t>&lt;pie de página&gt;</a:t>
+              <a:t> </a:t>
             </a:r>
             <a:endParaRPr lang="es-CO" sz="1400" b="0" u="none" strike="noStrike">
               <a:solidFill>
@@ -5875,7 +5274,7 @@
       </p:sp>
       <p:sp>
         <p:nvSpPr>
-          <p:cNvPr id="15" name="PlaceHolder 8"/>
+          <p:cNvPr id="11" name="PlaceHolder 5"/>
           <p:cNvSpPr>
             <a:spLocks noGrp="1"/>
           </p:cNvSpPr>
@@ -5886,7 +5285,7 @@
         <p:spPr>
           <a:xfrm>
             <a:off x="6553080" y="6356520"/>
-            <a:ext cx="2132640" cy="363960"/>
+            <a:ext cx="2132280" cy="363600"/>
           </a:xfrm>
           <a:prstGeom prst="rect">
             <a:avLst/>
@@ -5931,7 +5330,7 @@
                 <a:tab pos="0" algn="l"/>
               </a:tabLst>
             </a:pPr>
-            <a:fld id="{E94D6767-B8A2-48E8-8834-5F0FFB2D1582}" type="slidenum">
+            <a:fld id="{09D4C763-49FB-4D25-8775-0DB4F099A803}" type="slidenum">
               <a:rPr lang="en-US" sz="1200" b="0" u="none" strike="noStrike">
                 <a:solidFill>
                   <a:schemeClr val="dk1">
@@ -5942,7 +5341,7 @@
                 <a:uFillTx/>
                 <a:latin typeface="Calibri"/>
               </a:rPr>
-              <a:t>&lt;número&gt;</a:t>
+              <a:t>8</a:t>
             </a:fld>
             <a:endParaRPr lang="es-CO" sz="1200" b="0" u="none" strike="noStrike">
               <a:solidFill>
@@ -5961,8 +5360,8 @@
 </file>
 
 <file path=ppt/slideLayouts/slideLayout3.xml><?xml version="1.0" encoding="utf-8"?>
-<p:sldLayout xmlns:a="http://schemas.openxmlformats.org/drawingml/2006/main" xmlns:p="http://schemas.openxmlformats.org/presentationml/2006/main" xmlns:r="http://schemas.openxmlformats.org/officeDocument/2006/relationships" xmlns:p14="http://schemas.microsoft.com/office/powerpoint/2010/main" xmlns:p15="http://schemas.microsoft.com/office/powerpoint/2012/main" xmlns:mc="http://schemas.openxmlformats.org/markup-compatibility/2006" type="titleOnly" preserve="1">
-  <p:cSld name="Title Only">
+<p:sldLayout xmlns:a="http://schemas.openxmlformats.org/drawingml/2006/main" xmlns:p="http://schemas.openxmlformats.org/presentationml/2006/main" xmlns:r="http://schemas.openxmlformats.org/officeDocument/2006/relationships" xmlns:p14="http://schemas.microsoft.com/office/powerpoint/2010/main" xmlns:p15="http://schemas.microsoft.com/office/powerpoint/2012/main" xmlns:mc="http://schemas.openxmlformats.org/markup-compatibility/2006" type="blank" preserve="1">
+  <p:cSld name="Section Header">
     <p:bg>
       <p:bgPr>
         <a:solidFill>
@@ -5986,7 +5385,7 @@
       </p:grpSpPr>
       <p:sp>
         <p:nvSpPr>
-          <p:cNvPr id="16" name="PlaceHolder 1"/>
+          <p:cNvPr id="12" name="PlaceHolder 1"/>
           <p:cNvSpPr>
             <a:spLocks noGrp="1"/>
           </p:cNvSpPr>
@@ -5996,8 +5395,8 @@
         </p:nvSpPr>
         <p:spPr>
           <a:xfrm>
-            <a:off x="457200" y="274680"/>
-            <a:ext cx="8228520" cy="1141920"/>
+            <a:off x="722160" y="4406760"/>
+            <a:ext cx="7770960" cy="1360800"/>
           </a:xfrm>
           <a:prstGeom prst="rect">
             <a:avLst/>
@@ -6008,19 +5407,19 @@
           </a:ln>
         </p:spPr>
         <p:txBody>
-          <a:bodyPr lIns="91440" tIns="45720" rIns="91440" bIns="45720" anchor="ctr">
+          <a:bodyPr lIns="91440" tIns="45720" rIns="91440" bIns="45720" anchor="t">
             <a:noAutofit/>
           </a:bodyPr>
           <a:lstStyle>
-            <a:lvl1pPr indent="0" algn="ctr" defTabSz="457200">
-              <a:lnSpc>
-                <a:spcPct val="100000"/>
-              </a:lnSpc>
-              <a:buNone/>
-              <a:tabLst>
-                <a:tab pos="0" algn="l"/>
-              </a:tabLst>
-              <a:defRPr lang="en-US" sz="4400" b="0" u="none" strike="noStrike">
+            <a:lvl1pPr indent="0" algn="l" defTabSz="457200">
+              <a:lnSpc>
+                <a:spcPct val="100000"/>
+              </a:lnSpc>
+              <a:buNone/>
+              <a:tabLst>
+                <a:tab pos="0" algn="l"/>
+              </a:tabLst>
+              <a:defRPr lang="en-US" sz="4000" b="1" u="none" strike="noStrike" cap="all">
                 <a:solidFill>
                   <a:schemeClr val="dk1"/>
                 </a:solidFill>
@@ -6031,17 +5430,17 @@
             </a:lvl1pPr>
           </a:lstStyle>
           <a:p>
-            <a:pPr indent="0" algn="ctr" defTabSz="457200">
-              <a:lnSpc>
-                <a:spcPct val="100000"/>
-              </a:lnSpc>
-              <a:buNone/>
-              <a:tabLst>
-                <a:tab pos="0" algn="l"/>
-              </a:tabLst>
-            </a:pPr>
-            <a:r>
-              <a:rPr lang="en-US" sz="4400" b="0" u="none" strike="noStrike">
+            <a:pPr indent="0" algn="l" defTabSz="457200">
+              <a:lnSpc>
+                <a:spcPct val="100000"/>
+              </a:lnSpc>
+              <a:buNone/>
+              <a:tabLst>
+                <a:tab pos="0" algn="l"/>
+              </a:tabLst>
+            </a:pPr>
+            <a:r>
+              <a:rPr lang="en-US" sz="4000" b="1" u="none" strike="noStrike" cap="all">
                 <a:solidFill>
                   <a:schemeClr val="dk1"/>
                 </a:solidFill>
@@ -6051,7 +5450,7 @@
               </a:rPr>
               <a:t>Click to edit Master title style</a:t>
             </a:r>
-            <a:endParaRPr lang="en-US" sz="4400" b="0" u="none" strike="noStrike">
+            <a:endParaRPr lang="en-US" sz="4000" b="1" u="none" strike="noStrike" cap="all">
               <a:solidFill>
                 <a:schemeClr val="dk1"/>
               </a:solidFill>
@@ -6064,7 +5463,97 @@
       </p:sp>
       <p:sp>
         <p:nvSpPr>
-          <p:cNvPr id="17" name="PlaceHolder 2"/>
+          <p:cNvPr id="13" name="PlaceHolder 2"/>
+          <p:cNvSpPr>
+            <a:spLocks noGrp="1"/>
+          </p:cNvSpPr>
+          <p:nvPr>
+            <p:ph type="body"/>
+          </p:nvPr>
+        </p:nvSpPr>
+        <p:spPr>
+          <a:xfrm>
+            <a:off x="722160" y="2906640"/>
+            <a:ext cx="7770960" cy="1498680"/>
+          </a:xfrm>
+          <a:prstGeom prst="rect">
+            <a:avLst/>
+          </a:prstGeom>
+          <a:noFill/>
+          <a:ln w="0">
+            <a:noFill/>
+          </a:ln>
+        </p:spPr>
+        <p:txBody>
+          <a:bodyPr lIns="91440" tIns="45720" rIns="91440" bIns="45720" anchor="b">
+            <a:noAutofit/>
+          </a:bodyPr>
+          <a:lstStyle>
+            <a:lvl1pPr indent="0" algn="l" defTabSz="457200">
+              <a:lnSpc>
+                <a:spcPct val="100000"/>
+              </a:lnSpc>
+              <a:spcBef>
+                <a:spcPts val="400"/>
+              </a:spcBef>
+              <a:buNone/>
+              <a:tabLst>
+                <a:tab pos="0" algn="l"/>
+              </a:tabLst>
+              <a:defRPr lang="en-US" sz="2000" b="0" u="none" strike="noStrike">
+                <a:solidFill>
+                  <a:schemeClr val="dk1">
+                    <a:tint val="75000"/>
+                  </a:schemeClr>
+                </a:solidFill>
+                <a:effectLst/>
+                <a:uFillTx/>
+                <a:latin typeface="Calibri"/>
+              </a:defRPr>
+            </a:lvl1pPr>
+          </a:lstStyle>
+          <a:p>
+            <a:pPr indent="0" algn="l" defTabSz="457200">
+              <a:lnSpc>
+                <a:spcPct val="100000"/>
+              </a:lnSpc>
+              <a:spcBef>
+                <a:spcPts val="400"/>
+              </a:spcBef>
+              <a:buNone/>
+              <a:tabLst>
+                <a:tab pos="0" algn="l"/>
+              </a:tabLst>
+            </a:pPr>
+            <a:r>
+              <a:rPr lang="en-US" sz="2000" b="0" u="none" strike="noStrike">
+                <a:solidFill>
+                  <a:schemeClr val="dk1">
+                    <a:tint val="75000"/>
+                  </a:schemeClr>
+                </a:solidFill>
+                <a:effectLst/>
+                <a:uFillTx/>
+                <a:latin typeface="Calibri"/>
+              </a:rPr>
+              <a:t>Click to edit Master text styles</a:t>
+            </a:r>
+            <a:endParaRPr lang="en-US" sz="2000" b="0" u="none" strike="noStrike">
+              <a:solidFill>
+                <a:schemeClr val="dk1">
+                  <a:tint val="75000"/>
+                </a:schemeClr>
+              </a:solidFill>
+              <a:effectLst/>
+              <a:uFillTx/>
+              <a:latin typeface="Calibri"/>
+            </a:endParaRPr>
+          </a:p>
+        </p:txBody>
+      </p:sp>
+      <p:sp>
+        <p:nvSpPr>
+          <p:cNvPr id="14" name="PlaceHolder 3"/>
           <p:cNvSpPr>
             <a:spLocks noGrp="1"/>
           </p:cNvSpPr>
@@ -6075,7 +5564,7 @@
         <p:spPr>
           <a:xfrm>
             <a:off x="457200" y="6356520"/>
-            <a:ext cx="2132640" cy="363960"/>
+            <a:ext cx="2132280" cy="363600"/>
           </a:xfrm>
           <a:prstGeom prst="rect">
             <a:avLst/>
@@ -6131,7 +5620,7 @@
                 <a:uFillTx/>
                 <a:latin typeface="Calibri"/>
               </a:rPr>
-              <a:t>&lt;fecha/hora&gt;</a:t>
+              <a:t> </a:t>
             </a:r>
             <a:endParaRPr lang="es-CO" sz="1200" b="0" u="none" strike="noStrike">
               <a:solidFill>
@@ -6146,7 +5635,7 @@
       </p:sp>
       <p:sp>
         <p:nvSpPr>
-          <p:cNvPr id="18" name="PlaceHolder 3"/>
+          <p:cNvPr id="15" name="PlaceHolder 4"/>
           <p:cNvSpPr>
             <a:spLocks noGrp="1"/>
           </p:cNvSpPr>
@@ -6157,7 +5646,7 @@
         <p:spPr>
           <a:xfrm>
             <a:off x="3124080" y="6356520"/>
-            <a:ext cx="2894400" cy="363960"/>
+            <a:ext cx="2894040" cy="363600"/>
           </a:xfrm>
           <a:prstGeom prst="rect">
             <a:avLst/>
@@ -6209,7 +5698,7 @@
                 <a:uFillTx/>
                 <a:latin typeface="Times New Roman"/>
               </a:rPr>
-              <a:t>&lt;pie de página&gt;</a:t>
+              <a:t> </a:t>
             </a:r>
             <a:endParaRPr lang="es-CO" sz="1400" b="0" u="none" strike="noStrike">
               <a:solidFill>
@@ -6224,7 +5713,7 @@
       </p:sp>
       <p:sp>
         <p:nvSpPr>
-          <p:cNvPr id="19" name="PlaceHolder 4"/>
+          <p:cNvPr id="16" name="PlaceHolder 5"/>
           <p:cNvSpPr>
             <a:spLocks noGrp="1"/>
           </p:cNvSpPr>
@@ -6235,7 +5724,7 @@
         <p:spPr>
           <a:xfrm>
             <a:off x="6553080" y="6356520"/>
-            <a:ext cx="2132640" cy="363960"/>
+            <a:ext cx="2132280" cy="363600"/>
           </a:xfrm>
           <a:prstGeom prst="rect">
             <a:avLst/>
@@ -6280,7 +5769,7 @@
                 <a:tab pos="0" algn="l"/>
               </a:tabLst>
             </a:pPr>
-            <a:fld id="{32C00B79-D1F5-49BB-AAA4-1E3342B75805}" type="slidenum">
+            <a:fld id="{F7E2ED49-6810-4243-B776-78ED057A8FDE}" type="slidenum">
               <a:rPr lang="en-US" sz="1200" b="0" u="none" strike="noStrike">
                 <a:solidFill>
                   <a:schemeClr val="dk1">
@@ -6291,7 +5780,7 @@
                 <a:uFillTx/>
                 <a:latin typeface="Calibri"/>
               </a:rPr>
-              <a:t>&lt;número&gt;</a:t>
+              <a:t>8</a:t>
             </a:fld>
             <a:endParaRPr lang="es-CO" sz="1200" b="0" u="none" strike="noStrike">
               <a:solidFill>
@@ -6310,8 +5799,8 @@
 </file>
 
 <file path=ppt/slideLayouts/slideLayout4.xml><?xml version="1.0" encoding="utf-8"?>
-<p:sldLayout xmlns:a="http://schemas.openxmlformats.org/drawingml/2006/main" xmlns:p="http://schemas.openxmlformats.org/presentationml/2006/main" xmlns:r="http://schemas.openxmlformats.org/officeDocument/2006/relationships" xmlns:p14="http://schemas.microsoft.com/office/powerpoint/2010/main" xmlns:p15="http://schemas.microsoft.com/office/powerpoint/2012/main" xmlns:mc="http://schemas.openxmlformats.org/markup-compatibility/2006" type="blank" preserve="1">
-  <p:cSld name="Blank">
+<p:sldLayout xmlns:a="http://schemas.openxmlformats.org/drawingml/2006/main" xmlns:p="http://schemas.openxmlformats.org/presentationml/2006/main" xmlns:r="http://schemas.openxmlformats.org/officeDocument/2006/relationships" xmlns:p14="http://schemas.microsoft.com/office/powerpoint/2010/main" xmlns:p15="http://schemas.microsoft.com/office/powerpoint/2012/main" xmlns:mc="http://schemas.openxmlformats.org/markup-compatibility/2006" type="twoObj" preserve="1">
+  <p:cSld name="Two Content">
     <p:bg>
       <p:bgPr>
         <a:solidFill>
@@ -6335,7 +5824,697 @@
       </p:grpSpPr>
       <p:sp>
         <p:nvSpPr>
-          <p:cNvPr id="20" name="PlaceHolder 1"/>
+          <p:cNvPr id="17" name="PlaceHolder 1"/>
+          <p:cNvSpPr>
+            <a:spLocks noGrp="1"/>
+          </p:cNvSpPr>
+          <p:nvPr>
+            <p:ph type="title"/>
+          </p:nvPr>
+        </p:nvSpPr>
+        <p:spPr>
+          <a:xfrm>
+            <a:off x="457200" y="274680"/>
+            <a:ext cx="8228160" cy="1141560"/>
+          </a:xfrm>
+          <a:prstGeom prst="rect">
+            <a:avLst/>
+          </a:prstGeom>
+          <a:noFill/>
+          <a:ln w="0">
+            <a:noFill/>
+          </a:ln>
+        </p:spPr>
+        <p:txBody>
+          <a:bodyPr lIns="91440" tIns="45720" rIns="91440" bIns="45720" anchor="ctr">
+            <a:noAutofit/>
+          </a:bodyPr>
+          <a:lstStyle>
+            <a:lvl1pPr indent="0" algn="ctr" defTabSz="457200">
+              <a:lnSpc>
+                <a:spcPct val="100000"/>
+              </a:lnSpc>
+              <a:buNone/>
+              <a:tabLst>
+                <a:tab pos="0" algn="l"/>
+              </a:tabLst>
+              <a:defRPr lang="en-US" sz="4400" b="0" u="none" strike="noStrike">
+                <a:solidFill>
+                  <a:schemeClr val="dk1"/>
+                </a:solidFill>
+                <a:effectLst/>
+                <a:uFillTx/>
+                <a:latin typeface="Calibri"/>
+              </a:defRPr>
+            </a:lvl1pPr>
+          </a:lstStyle>
+          <a:p>
+            <a:pPr indent="0" algn="ctr" defTabSz="457200">
+              <a:lnSpc>
+                <a:spcPct val="100000"/>
+              </a:lnSpc>
+              <a:buNone/>
+              <a:tabLst>
+                <a:tab pos="0" algn="l"/>
+              </a:tabLst>
+            </a:pPr>
+            <a:r>
+              <a:rPr lang="en-US" sz="4400" b="0" u="none" strike="noStrike">
+                <a:solidFill>
+                  <a:schemeClr val="dk1"/>
+                </a:solidFill>
+                <a:effectLst/>
+                <a:uFillTx/>
+                <a:latin typeface="Calibri"/>
+              </a:rPr>
+              <a:t>Click to edit Master title style</a:t>
+            </a:r>
+            <a:endParaRPr lang="en-US" sz="4400" b="0" u="none" strike="noStrike">
+              <a:solidFill>
+                <a:schemeClr val="dk1"/>
+              </a:solidFill>
+              <a:effectLst/>
+              <a:uFillTx/>
+              <a:latin typeface="Calibri"/>
+            </a:endParaRPr>
+          </a:p>
+        </p:txBody>
+      </p:sp>
+      <p:sp>
+        <p:nvSpPr>
+          <p:cNvPr id="18" name="PlaceHolder 2"/>
+          <p:cNvSpPr>
+            <a:spLocks noGrp="1"/>
+          </p:cNvSpPr>
+          <p:nvPr>
+            <p:ph type="body"/>
+          </p:nvPr>
+        </p:nvSpPr>
+        <p:spPr>
+          <a:xfrm>
+            <a:off x="457200" y="1600200"/>
+            <a:ext cx="4037040" cy="4524480"/>
+          </a:xfrm>
+          <a:prstGeom prst="rect">
+            <a:avLst/>
+          </a:prstGeom>
+          <a:noFill/>
+          <a:ln w="0">
+            <a:noFill/>
+          </a:ln>
+        </p:spPr>
+        <p:txBody>
+          <a:bodyPr lIns="91440" tIns="45720" rIns="91440" bIns="45720" anchor="t">
+            <a:noAutofit/>
+          </a:bodyPr>
+          <a:lstStyle>
+            <a:lvl1pPr algn="l" defTabSz="457200">
+              <a:lnSpc>
+                <a:spcPct val="100000"/>
+              </a:lnSpc>
+              <a:spcBef>
+                <a:spcPts val="561"/>
+              </a:spcBef>
+              <a:buClr>
+                <a:srgbClr val="000000"/>
+              </a:buClr>
+              <a:buFont typeface="Arial"/>
+              <a:buChar char="•"/>
+              <a:defRPr lang="en-US" sz="2800" b="0" u="none" strike="noStrike">
+                <a:solidFill>
+                  <a:schemeClr val="dk1"/>
+                </a:solidFill>
+                <a:effectLst/>
+                <a:uFillTx/>
+                <a:latin typeface="Calibri"/>
+              </a:defRPr>
+            </a:lvl1pPr>
+            <a:lvl2pPr lvl="1" algn="l" defTabSz="457200">
+              <a:lnSpc>
+                <a:spcPct val="100000"/>
+              </a:lnSpc>
+              <a:spcBef>
+                <a:spcPts val="479"/>
+              </a:spcBef>
+              <a:buClr>
+                <a:srgbClr val="000000"/>
+              </a:buClr>
+              <a:buFont typeface="Arial"/>
+              <a:buChar char="–"/>
+              <a:defRPr lang="en-US" sz="2400" b="0" u="none" strike="noStrike">
+                <a:solidFill>
+                  <a:schemeClr val="dk1"/>
+                </a:solidFill>
+                <a:effectLst/>
+                <a:uFillTx/>
+                <a:latin typeface="Calibri"/>
+              </a:defRPr>
+            </a:lvl2pPr>
+            <a:lvl3pPr lvl="2" algn="l" defTabSz="457200">
+              <a:lnSpc>
+                <a:spcPct val="100000"/>
+              </a:lnSpc>
+              <a:spcBef>
+                <a:spcPts val="400"/>
+              </a:spcBef>
+              <a:buClr>
+                <a:srgbClr val="000000"/>
+              </a:buClr>
+              <a:buFont typeface="Arial"/>
+              <a:buChar char="•"/>
+              <a:defRPr lang="en-US" sz="2000" b="0" u="none" strike="noStrike">
+                <a:solidFill>
+                  <a:schemeClr val="dk1"/>
+                </a:solidFill>
+                <a:effectLst/>
+                <a:uFillTx/>
+                <a:latin typeface="Calibri"/>
+              </a:defRPr>
+            </a:lvl3pPr>
+            <a:lvl4pPr lvl="3" algn="l" defTabSz="457200">
+              <a:lnSpc>
+                <a:spcPct val="100000"/>
+              </a:lnSpc>
+              <a:spcBef>
+                <a:spcPts val="360"/>
+              </a:spcBef>
+              <a:buClr>
+                <a:srgbClr val="000000"/>
+              </a:buClr>
+              <a:buFont typeface="Arial"/>
+              <a:buChar char="–"/>
+              <a:defRPr lang="en-US" sz="1800" b="0" u="none" strike="noStrike">
+                <a:solidFill>
+                  <a:schemeClr val="dk1"/>
+                </a:solidFill>
+                <a:effectLst/>
+                <a:uFillTx/>
+                <a:latin typeface="Calibri"/>
+              </a:defRPr>
+            </a:lvl4pPr>
+            <a:lvl5pPr lvl="4" algn="l" defTabSz="457200">
+              <a:lnSpc>
+                <a:spcPct val="100000"/>
+              </a:lnSpc>
+              <a:spcBef>
+                <a:spcPts val="360"/>
+              </a:spcBef>
+              <a:buClr>
+                <a:srgbClr val="000000"/>
+              </a:buClr>
+              <a:buFont typeface="Arial"/>
+              <a:buChar char="»"/>
+              <a:defRPr lang="en-US" sz="1800" b="0" u="none" strike="noStrike">
+                <a:solidFill>
+                  <a:schemeClr val="dk1"/>
+                </a:solidFill>
+                <a:effectLst/>
+                <a:uFillTx/>
+                <a:latin typeface="Calibri"/>
+              </a:defRPr>
+            </a:lvl5pPr>
+          </a:lstStyle>
+          <a:p>
+            <a:pPr marL="343080" indent="-343080" algn="l" defTabSz="457200">
+              <a:lnSpc>
+                <a:spcPct val="100000"/>
+              </a:lnSpc>
+              <a:spcBef>
+                <a:spcPts val="561"/>
+              </a:spcBef>
+              <a:buClr>
+                <a:srgbClr val="000000"/>
+              </a:buClr>
+              <a:buFont typeface="Arial"/>
+              <a:buChar char="•"/>
+            </a:pPr>
+            <a:r>
+              <a:rPr lang="en-US" sz="2800" b="0" u="none" strike="noStrike">
+                <a:solidFill>
+                  <a:schemeClr val="dk1"/>
+                </a:solidFill>
+                <a:effectLst/>
+                <a:uFillTx/>
+                <a:latin typeface="Calibri"/>
+              </a:rPr>
+              <a:t>Click to edit Master text styles</a:t>
+            </a:r>
+            <a:endParaRPr lang="en-US" sz="2800" b="0" u="none" strike="noStrike">
+              <a:solidFill>
+                <a:schemeClr val="dk1"/>
+              </a:solidFill>
+              <a:effectLst/>
+              <a:uFillTx/>
+              <a:latin typeface="Calibri"/>
+            </a:endParaRPr>
+          </a:p>
+          <a:p>
+            <a:pPr marL="743040" lvl="1" indent="-285840" algn="l" defTabSz="457200">
+              <a:lnSpc>
+                <a:spcPct val="100000"/>
+              </a:lnSpc>
+              <a:spcBef>
+                <a:spcPts val="479"/>
+              </a:spcBef>
+              <a:buClr>
+                <a:srgbClr val="000000"/>
+              </a:buClr>
+              <a:buFont typeface="Arial"/>
+              <a:buChar char="–"/>
+            </a:pPr>
+            <a:r>
+              <a:rPr lang="en-US" sz="2400" b="0" u="none" strike="noStrike">
+                <a:solidFill>
+                  <a:schemeClr val="dk1"/>
+                </a:solidFill>
+                <a:effectLst/>
+                <a:uFillTx/>
+                <a:latin typeface="Calibri"/>
+              </a:rPr>
+              <a:t>Second level</a:t>
+            </a:r>
+            <a:endParaRPr lang="en-US" sz="2400" b="0" u="none" strike="noStrike">
+              <a:solidFill>
+                <a:schemeClr val="dk1"/>
+              </a:solidFill>
+              <a:effectLst/>
+              <a:uFillTx/>
+              <a:latin typeface="Calibri"/>
+            </a:endParaRPr>
+          </a:p>
+          <a:p>
+            <a:pPr marL="1143000" lvl="2" indent="-228600" algn="l" defTabSz="457200">
+              <a:lnSpc>
+                <a:spcPct val="100000"/>
+              </a:lnSpc>
+              <a:spcBef>
+                <a:spcPts val="400"/>
+              </a:spcBef>
+              <a:buClr>
+                <a:srgbClr val="000000"/>
+              </a:buClr>
+              <a:buFont typeface="Arial"/>
+              <a:buChar char="•"/>
+            </a:pPr>
+            <a:r>
+              <a:rPr lang="en-US" sz="2000" b="0" u="none" strike="noStrike">
+                <a:solidFill>
+                  <a:schemeClr val="dk1"/>
+                </a:solidFill>
+                <a:effectLst/>
+                <a:uFillTx/>
+                <a:latin typeface="Calibri"/>
+              </a:rPr>
+              <a:t>Third level</a:t>
+            </a:r>
+            <a:endParaRPr lang="en-US" sz="2000" b="0" u="none" strike="noStrike">
+              <a:solidFill>
+                <a:schemeClr val="dk1"/>
+              </a:solidFill>
+              <a:effectLst/>
+              <a:uFillTx/>
+              <a:latin typeface="Calibri"/>
+            </a:endParaRPr>
+          </a:p>
+          <a:p>
+            <a:pPr marL="1600200" lvl="3" indent="-228600" algn="l" defTabSz="457200">
+              <a:lnSpc>
+                <a:spcPct val="100000"/>
+              </a:lnSpc>
+              <a:spcBef>
+                <a:spcPts val="360"/>
+              </a:spcBef>
+              <a:buClr>
+                <a:srgbClr val="000000"/>
+              </a:buClr>
+              <a:buFont typeface="Arial"/>
+              <a:buChar char="–"/>
+            </a:pPr>
+            <a:r>
+              <a:rPr lang="en-US" sz="1800" b="0" u="none" strike="noStrike">
+                <a:solidFill>
+                  <a:schemeClr val="dk1"/>
+                </a:solidFill>
+                <a:effectLst/>
+                <a:uFillTx/>
+                <a:latin typeface="Calibri"/>
+              </a:rPr>
+              <a:t>Fourth level</a:t>
+            </a:r>
+            <a:endParaRPr lang="en-US" sz="1800" b="0" u="none" strike="noStrike">
+              <a:solidFill>
+                <a:schemeClr val="dk1"/>
+              </a:solidFill>
+              <a:effectLst/>
+              <a:uFillTx/>
+              <a:latin typeface="Calibri"/>
+            </a:endParaRPr>
+          </a:p>
+          <a:p>
+            <a:pPr marL="2057400" lvl="4" indent="-228600" algn="l" defTabSz="457200">
+              <a:lnSpc>
+                <a:spcPct val="100000"/>
+              </a:lnSpc>
+              <a:spcBef>
+                <a:spcPts val="360"/>
+              </a:spcBef>
+              <a:buClr>
+                <a:srgbClr val="000000"/>
+              </a:buClr>
+              <a:buFont typeface="Arial"/>
+              <a:buChar char="»"/>
+            </a:pPr>
+            <a:r>
+              <a:rPr lang="en-US" sz="1800" b="0" u="none" strike="noStrike">
+                <a:solidFill>
+                  <a:schemeClr val="dk1"/>
+                </a:solidFill>
+                <a:effectLst/>
+                <a:uFillTx/>
+                <a:latin typeface="Calibri"/>
+              </a:rPr>
+              <a:t>Fifth level</a:t>
+            </a:r>
+            <a:endParaRPr lang="en-US" sz="1800" b="0" u="none" strike="noStrike">
+              <a:solidFill>
+                <a:schemeClr val="dk1"/>
+              </a:solidFill>
+              <a:effectLst/>
+              <a:uFillTx/>
+              <a:latin typeface="Calibri"/>
+            </a:endParaRPr>
+          </a:p>
+        </p:txBody>
+      </p:sp>
+      <p:sp>
+        <p:nvSpPr>
+          <p:cNvPr id="19" name="PlaceHolder 3"/>
+          <p:cNvSpPr>
+            <a:spLocks noGrp="1"/>
+          </p:cNvSpPr>
+          <p:nvPr>
+            <p:ph type="body"/>
+          </p:nvPr>
+        </p:nvSpPr>
+        <p:spPr>
+          <a:xfrm>
+            <a:off x="4648320" y="1600200"/>
+            <a:ext cx="4037040" cy="4524480"/>
+          </a:xfrm>
+          <a:prstGeom prst="rect">
+            <a:avLst/>
+          </a:prstGeom>
+          <a:noFill/>
+          <a:ln w="0">
+            <a:noFill/>
+          </a:ln>
+        </p:spPr>
+        <p:txBody>
+          <a:bodyPr lIns="91440" tIns="45720" rIns="91440" bIns="45720" anchor="t">
+            <a:noAutofit/>
+          </a:bodyPr>
+          <a:lstStyle>
+            <a:lvl1pPr algn="l" defTabSz="457200">
+              <a:lnSpc>
+                <a:spcPct val="100000"/>
+              </a:lnSpc>
+              <a:spcBef>
+                <a:spcPts val="561"/>
+              </a:spcBef>
+              <a:buClr>
+                <a:srgbClr val="000000"/>
+              </a:buClr>
+              <a:buFont typeface="Arial"/>
+              <a:buChar char="•"/>
+              <a:defRPr lang="en-US" sz="2800" b="0" u="none" strike="noStrike">
+                <a:solidFill>
+                  <a:schemeClr val="dk1"/>
+                </a:solidFill>
+                <a:effectLst/>
+                <a:uFillTx/>
+                <a:latin typeface="Calibri"/>
+              </a:defRPr>
+            </a:lvl1pPr>
+            <a:lvl2pPr lvl="1" algn="l" defTabSz="457200">
+              <a:lnSpc>
+                <a:spcPct val="100000"/>
+              </a:lnSpc>
+              <a:spcBef>
+                <a:spcPts val="479"/>
+              </a:spcBef>
+              <a:buClr>
+                <a:srgbClr val="000000"/>
+              </a:buClr>
+              <a:buFont typeface="Arial"/>
+              <a:buChar char="–"/>
+              <a:defRPr lang="en-US" sz="2400" b="0" u="none" strike="noStrike">
+                <a:solidFill>
+                  <a:schemeClr val="dk1"/>
+                </a:solidFill>
+                <a:effectLst/>
+                <a:uFillTx/>
+                <a:latin typeface="Calibri"/>
+              </a:defRPr>
+            </a:lvl2pPr>
+            <a:lvl3pPr lvl="2" algn="l" defTabSz="457200">
+              <a:lnSpc>
+                <a:spcPct val="100000"/>
+              </a:lnSpc>
+              <a:spcBef>
+                <a:spcPts val="400"/>
+              </a:spcBef>
+              <a:buClr>
+                <a:srgbClr val="000000"/>
+              </a:buClr>
+              <a:buFont typeface="Arial"/>
+              <a:buChar char="•"/>
+              <a:defRPr lang="en-US" sz="2000" b="0" u="none" strike="noStrike">
+                <a:solidFill>
+                  <a:schemeClr val="dk1"/>
+                </a:solidFill>
+                <a:effectLst/>
+                <a:uFillTx/>
+                <a:latin typeface="Calibri"/>
+              </a:defRPr>
+            </a:lvl3pPr>
+            <a:lvl4pPr lvl="3" algn="l" defTabSz="457200">
+              <a:lnSpc>
+                <a:spcPct val="100000"/>
+              </a:lnSpc>
+              <a:spcBef>
+                <a:spcPts val="360"/>
+              </a:spcBef>
+              <a:buClr>
+                <a:srgbClr val="000000"/>
+              </a:buClr>
+              <a:buFont typeface="Arial"/>
+              <a:buChar char="–"/>
+              <a:defRPr lang="en-US" sz="1800" b="0" u="none" strike="noStrike">
+                <a:solidFill>
+                  <a:schemeClr val="dk1"/>
+                </a:solidFill>
+                <a:effectLst/>
+                <a:uFillTx/>
+                <a:latin typeface="Calibri"/>
+              </a:defRPr>
+            </a:lvl4pPr>
+            <a:lvl5pPr lvl="4" algn="l" defTabSz="457200">
+              <a:lnSpc>
+                <a:spcPct val="100000"/>
+              </a:lnSpc>
+              <a:spcBef>
+                <a:spcPts val="360"/>
+              </a:spcBef>
+              <a:buClr>
+                <a:srgbClr val="000000"/>
+              </a:buClr>
+              <a:buFont typeface="Arial"/>
+              <a:buChar char="»"/>
+              <a:defRPr lang="en-US" sz="1800" b="0" u="none" strike="noStrike">
+                <a:solidFill>
+                  <a:schemeClr val="dk1"/>
+                </a:solidFill>
+                <a:effectLst/>
+                <a:uFillTx/>
+                <a:latin typeface="Calibri"/>
+              </a:defRPr>
+            </a:lvl5pPr>
+          </a:lstStyle>
+          <a:p>
+            <a:pPr marL="343080" indent="-343080" algn="l" defTabSz="457200">
+              <a:lnSpc>
+                <a:spcPct val="100000"/>
+              </a:lnSpc>
+              <a:spcBef>
+                <a:spcPts val="561"/>
+              </a:spcBef>
+              <a:buClr>
+                <a:srgbClr val="000000"/>
+              </a:buClr>
+              <a:buFont typeface="Arial"/>
+              <a:buChar char="•"/>
+            </a:pPr>
+            <a:r>
+              <a:rPr lang="en-US" sz="2800" b="0" u="none" strike="noStrike">
+                <a:solidFill>
+                  <a:schemeClr val="dk1"/>
+                </a:solidFill>
+                <a:effectLst/>
+                <a:uFillTx/>
+                <a:latin typeface="Calibri"/>
+              </a:rPr>
+              <a:t>Click to edit Master text styles</a:t>
+            </a:r>
+            <a:endParaRPr lang="en-US" sz="2800" b="0" u="none" strike="noStrike">
+              <a:solidFill>
+                <a:schemeClr val="dk1"/>
+              </a:solidFill>
+              <a:effectLst/>
+              <a:uFillTx/>
+              <a:latin typeface="Calibri"/>
+            </a:endParaRPr>
+          </a:p>
+          <a:p>
+            <a:pPr marL="743040" lvl="1" indent="-285840" algn="l" defTabSz="457200">
+              <a:lnSpc>
+                <a:spcPct val="100000"/>
+              </a:lnSpc>
+              <a:spcBef>
+                <a:spcPts val="479"/>
+              </a:spcBef>
+              <a:buClr>
+                <a:srgbClr val="000000"/>
+              </a:buClr>
+              <a:buFont typeface="Arial"/>
+              <a:buChar char="–"/>
+            </a:pPr>
+            <a:r>
+              <a:rPr lang="en-US" sz="2400" b="0" u="none" strike="noStrike">
+                <a:solidFill>
+                  <a:schemeClr val="dk1"/>
+                </a:solidFill>
+                <a:effectLst/>
+                <a:uFillTx/>
+                <a:latin typeface="Calibri"/>
+              </a:rPr>
+              <a:t>Second level</a:t>
+            </a:r>
+            <a:endParaRPr lang="en-US" sz="2400" b="0" u="none" strike="noStrike">
+              <a:solidFill>
+                <a:schemeClr val="dk1"/>
+              </a:solidFill>
+              <a:effectLst/>
+              <a:uFillTx/>
+              <a:latin typeface="Calibri"/>
+            </a:endParaRPr>
+          </a:p>
+          <a:p>
+            <a:pPr marL="1143000" lvl="2" indent="-228600" algn="l" defTabSz="457200">
+              <a:lnSpc>
+                <a:spcPct val="100000"/>
+              </a:lnSpc>
+              <a:spcBef>
+                <a:spcPts val="400"/>
+              </a:spcBef>
+              <a:buClr>
+                <a:srgbClr val="000000"/>
+              </a:buClr>
+              <a:buFont typeface="Arial"/>
+              <a:buChar char="•"/>
+            </a:pPr>
+            <a:r>
+              <a:rPr lang="en-US" sz="2000" b="0" u="none" strike="noStrike">
+                <a:solidFill>
+                  <a:schemeClr val="dk1"/>
+                </a:solidFill>
+                <a:effectLst/>
+                <a:uFillTx/>
+                <a:latin typeface="Calibri"/>
+              </a:rPr>
+              <a:t>Third level</a:t>
+            </a:r>
+            <a:endParaRPr lang="en-US" sz="2000" b="0" u="none" strike="noStrike">
+              <a:solidFill>
+                <a:schemeClr val="dk1"/>
+              </a:solidFill>
+              <a:effectLst/>
+              <a:uFillTx/>
+              <a:latin typeface="Calibri"/>
+            </a:endParaRPr>
+          </a:p>
+          <a:p>
+            <a:pPr marL="1600200" lvl="3" indent="-228600" algn="l" defTabSz="457200">
+              <a:lnSpc>
+                <a:spcPct val="100000"/>
+              </a:lnSpc>
+              <a:spcBef>
+                <a:spcPts val="360"/>
+              </a:spcBef>
+              <a:buClr>
+                <a:srgbClr val="000000"/>
+              </a:buClr>
+              <a:buFont typeface="Arial"/>
+              <a:buChar char="–"/>
+            </a:pPr>
+            <a:r>
+              <a:rPr lang="en-US" sz="1800" b="0" u="none" strike="noStrike">
+                <a:solidFill>
+                  <a:schemeClr val="dk1"/>
+                </a:solidFill>
+                <a:effectLst/>
+                <a:uFillTx/>
+                <a:latin typeface="Calibri"/>
+              </a:rPr>
+              <a:t>Fourth level</a:t>
+            </a:r>
+            <a:endParaRPr lang="en-US" sz="1800" b="0" u="none" strike="noStrike">
+              <a:solidFill>
+                <a:schemeClr val="dk1"/>
+              </a:solidFill>
+              <a:effectLst/>
+              <a:uFillTx/>
+              <a:latin typeface="Calibri"/>
+            </a:endParaRPr>
+          </a:p>
+          <a:p>
+            <a:pPr marL="2057400" lvl="4" indent="-228600" algn="l" defTabSz="457200">
+              <a:lnSpc>
+                <a:spcPct val="100000"/>
+              </a:lnSpc>
+              <a:spcBef>
+                <a:spcPts val="360"/>
+              </a:spcBef>
+              <a:buClr>
+                <a:srgbClr val="000000"/>
+              </a:buClr>
+              <a:buFont typeface="Arial"/>
+              <a:buChar char="»"/>
+            </a:pPr>
+            <a:r>
+              <a:rPr lang="en-US" sz="1800" b="0" u="none" strike="noStrike">
+                <a:solidFill>
+                  <a:schemeClr val="dk1"/>
+                </a:solidFill>
+                <a:effectLst/>
+                <a:uFillTx/>
+                <a:latin typeface="Calibri"/>
+              </a:rPr>
+              <a:t>Fifth level</a:t>
+            </a:r>
+            <a:endParaRPr lang="en-US" sz="1800" b="0" u="none" strike="noStrike">
+              <a:solidFill>
+                <a:schemeClr val="dk1"/>
+              </a:solidFill>
+              <a:effectLst/>
+              <a:uFillTx/>
+              <a:latin typeface="Calibri"/>
+            </a:endParaRPr>
+          </a:p>
+        </p:txBody>
+      </p:sp>
+      <p:sp>
+        <p:nvSpPr>
+          <p:cNvPr id="20" name="PlaceHolder 4"/>
           <p:cNvSpPr>
             <a:spLocks noGrp="1"/>
           </p:cNvSpPr>
@@ -6346,7 +6525,7 @@
         <p:spPr>
           <a:xfrm>
             <a:off x="457200" y="6356520"/>
-            <a:ext cx="2132640" cy="363960"/>
+            <a:ext cx="2132280" cy="363600"/>
           </a:xfrm>
           <a:prstGeom prst="rect">
             <a:avLst/>
@@ -6402,7 +6581,7 @@
                 <a:uFillTx/>
                 <a:latin typeface="Calibri"/>
               </a:rPr>
-              <a:t>&lt;fecha/hora&gt;</a:t>
+              <a:t> </a:t>
             </a:r>
             <a:endParaRPr lang="es-CO" sz="1200" b="0" u="none" strike="noStrike">
               <a:solidFill>
@@ -6417,7 +6596,7 @@
       </p:sp>
       <p:sp>
         <p:nvSpPr>
-          <p:cNvPr id="21" name="PlaceHolder 2"/>
+          <p:cNvPr id="21" name="PlaceHolder 5"/>
           <p:cNvSpPr>
             <a:spLocks noGrp="1"/>
           </p:cNvSpPr>
@@ -6428,7 +6607,7 @@
         <p:spPr>
           <a:xfrm>
             <a:off x="3124080" y="6356520"/>
-            <a:ext cx="2894400" cy="363960"/>
+            <a:ext cx="2894040" cy="363600"/>
           </a:xfrm>
           <a:prstGeom prst="rect">
             <a:avLst/>
@@ -6480,7 +6659,7 @@
                 <a:uFillTx/>
                 <a:latin typeface="Times New Roman"/>
               </a:rPr>
-              <a:t>&lt;pie de página&gt;</a:t>
+              <a:t> </a:t>
             </a:r>
             <a:endParaRPr lang="es-CO" sz="1400" b="0" u="none" strike="noStrike">
               <a:solidFill>
@@ -6495,7 +6674,7 @@
       </p:sp>
       <p:sp>
         <p:nvSpPr>
-          <p:cNvPr id="22" name="PlaceHolder 3"/>
+          <p:cNvPr id="22" name="PlaceHolder 6"/>
           <p:cNvSpPr>
             <a:spLocks noGrp="1"/>
           </p:cNvSpPr>
@@ -6506,7 +6685,7 @@
         <p:spPr>
           <a:xfrm>
             <a:off x="6553080" y="6356520"/>
-            <a:ext cx="2132640" cy="363960"/>
+            <a:ext cx="2132280" cy="363600"/>
           </a:xfrm>
           <a:prstGeom prst="rect">
             <a:avLst/>
@@ -6551,7 +6730,7 @@
                 <a:tab pos="0" algn="l"/>
               </a:tabLst>
             </a:pPr>
-            <a:fld id="{863060CD-B67B-4006-9171-DF5F366E7CBF}" type="slidenum">
+            <a:fld id="{827DFF34-0391-4CDE-A81D-A366C2EC5B16}" type="slidenum">
               <a:rPr lang="en-US" sz="1200" b="0" u="none" strike="noStrike">
                 <a:solidFill>
                   <a:schemeClr val="dk1">
@@ -6562,7 +6741,7 @@
                 <a:uFillTx/>
                 <a:latin typeface="Calibri"/>
               </a:rPr>
-              <a:t>&lt;número&gt;</a:t>
+              <a:t>8</a:t>
             </a:fld>
             <a:endParaRPr lang="es-CO" sz="1200" b="0" u="none" strike="noStrike">
               <a:solidFill>
@@ -6582,7 +6761,7 @@
 
 <file path=ppt/slideLayouts/slideLayout5.xml><?xml version="1.0" encoding="utf-8"?>
 <p:sldLayout xmlns:a="http://schemas.openxmlformats.org/drawingml/2006/main" xmlns:p="http://schemas.openxmlformats.org/presentationml/2006/main" xmlns:r="http://schemas.openxmlformats.org/officeDocument/2006/relationships" xmlns:p14="http://schemas.microsoft.com/office/powerpoint/2010/main" xmlns:p15="http://schemas.microsoft.com/office/powerpoint/2012/main" xmlns:mc="http://schemas.openxmlformats.org/markup-compatibility/2006" type="blank" preserve="1">
-  <p:cSld name="Content with Caption">
+  <p:cSld name="Comparison">
     <p:bg>
       <p:bgPr>
         <a:solidFill>
@@ -6616,8 +6795,86 @@
         </p:nvSpPr>
         <p:spPr>
           <a:xfrm>
-            <a:off x="457200" y="272880"/>
-            <a:ext cx="3007080" cy="1161000"/>
+            <a:off x="457200" y="274680"/>
+            <a:ext cx="8228160" cy="1141560"/>
+          </a:xfrm>
+          <a:prstGeom prst="rect">
+            <a:avLst/>
+          </a:prstGeom>
+          <a:noFill/>
+          <a:ln w="0">
+            <a:noFill/>
+          </a:ln>
+        </p:spPr>
+        <p:txBody>
+          <a:bodyPr lIns="91440" tIns="45720" rIns="91440" bIns="45720" anchor="ctr">
+            <a:noAutofit/>
+          </a:bodyPr>
+          <a:lstStyle>
+            <a:lvl1pPr indent="0" algn="ctr" defTabSz="457200">
+              <a:lnSpc>
+                <a:spcPct val="100000"/>
+              </a:lnSpc>
+              <a:buNone/>
+              <a:tabLst>
+                <a:tab pos="0" algn="l"/>
+              </a:tabLst>
+              <a:defRPr lang="en-US" sz="4400" b="0" u="none" strike="noStrike">
+                <a:solidFill>
+                  <a:schemeClr val="dk1"/>
+                </a:solidFill>
+                <a:effectLst/>
+                <a:uFillTx/>
+                <a:latin typeface="Calibri"/>
+              </a:defRPr>
+            </a:lvl1pPr>
+          </a:lstStyle>
+          <a:p>
+            <a:pPr indent="0" algn="ctr" defTabSz="457200">
+              <a:lnSpc>
+                <a:spcPct val="100000"/>
+              </a:lnSpc>
+              <a:buNone/>
+              <a:tabLst>
+                <a:tab pos="0" algn="l"/>
+              </a:tabLst>
+            </a:pPr>
+            <a:r>
+              <a:rPr lang="en-US" sz="4400" b="0" u="none" strike="noStrike">
+                <a:solidFill>
+                  <a:schemeClr val="dk1"/>
+                </a:solidFill>
+                <a:effectLst/>
+                <a:uFillTx/>
+                <a:latin typeface="Calibri"/>
+              </a:rPr>
+              <a:t>Click to edit Master title style</a:t>
+            </a:r>
+            <a:endParaRPr lang="en-US" sz="4400" b="0" u="none" strike="noStrike">
+              <a:solidFill>
+                <a:schemeClr val="dk1"/>
+              </a:solidFill>
+              <a:effectLst/>
+              <a:uFillTx/>
+              <a:latin typeface="Calibri"/>
+            </a:endParaRPr>
+          </a:p>
+        </p:txBody>
+      </p:sp>
+      <p:sp>
+        <p:nvSpPr>
+          <p:cNvPr id="24" name="PlaceHolder 2"/>
+          <p:cNvSpPr>
+            <a:spLocks noGrp="1"/>
+          </p:cNvSpPr>
+          <p:nvPr>
+            <p:ph type="body"/>
+          </p:nvPr>
+        </p:nvSpPr>
+        <p:spPr>
+          <a:xfrm>
+            <a:off x="457200" y="1535040"/>
+            <a:ext cx="4038840" cy="638280"/>
           </a:xfrm>
           <a:prstGeom prst="rect">
             <a:avLst/>
@@ -6636,11 +6893,14 @@
               <a:lnSpc>
                 <a:spcPct val="100000"/>
               </a:lnSpc>
-              <a:buNone/>
-              <a:tabLst>
-                <a:tab pos="0" algn="l"/>
-              </a:tabLst>
-              <a:defRPr lang="en-US" sz="2000" b="1" u="none" strike="noStrike">
+              <a:spcBef>
+                <a:spcPts val="479"/>
+              </a:spcBef>
+              <a:buNone/>
+              <a:tabLst>
+                <a:tab pos="0" algn="l"/>
+              </a:tabLst>
+              <a:defRPr lang="en-US" sz="2400" b="1" u="none" strike="noStrike">
                 <a:solidFill>
                   <a:schemeClr val="dk1"/>
                 </a:solidFill>
@@ -6655,23 +6915,26 @@
               <a:lnSpc>
                 <a:spcPct val="100000"/>
               </a:lnSpc>
-              <a:buNone/>
-              <a:tabLst>
-                <a:tab pos="0" algn="l"/>
-              </a:tabLst>
-            </a:pPr>
-            <a:r>
-              <a:rPr lang="en-US" sz="2000" b="1" u="none" strike="noStrike">
-                <a:solidFill>
-                  <a:schemeClr val="dk1"/>
-                </a:solidFill>
-                <a:effectLst/>
-                <a:uFillTx/>
-                <a:latin typeface="Calibri"/>
-              </a:rPr>
-              <a:t>Click to edit Master title style</a:t>
-            </a:r>
-            <a:endParaRPr lang="en-US" sz="2000" b="1" u="none" strike="noStrike">
+              <a:spcBef>
+                <a:spcPts val="479"/>
+              </a:spcBef>
+              <a:buNone/>
+              <a:tabLst>
+                <a:tab pos="0" algn="l"/>
+              </a:tabLst>
+            </a:pPr>
+            <a:r>
+              <a:rPr lang="en-US" sz="2400" b="1" u="none" strike="noStrike">
+                <a:solidFill>
+                  <a:schemeClr val="dk1"/>
+                </a:solidFill>
+                <a:effectLst/>
+                <a:uFillTx/>
+                <a:latin typeface="Calibri"/>
+              </a:rPr>
+              <a:t>Click to edit Master text styles</a:t>
+            </a:r>
+            <a:endParaRPr lang="en-US" sz="2400" b="0" u="none" strike="noStrike">
               <a:solidFill>
                 <a:schemeClr val="dk1"/>
               </a:solidFill>
@@ -6684,7 +6947,7 @@
       </p:sp>
       <p:sp>
         <p:nvSpPr>
-          <p:cNvPr id="24" name="PlaceHolder 2"/>
+          <p:cNvPr id="25" name="PlaceHolder 3"/>
           <p:cNvSpPr>
             <a:spLocks noGrp="1"/>
           </p:cNvSpPr>
@@ -6694,8 +6957,8 @@
         </p:nvSpPr>
         <p:spPr>
           <a:xfrm>
-            <a:off x="3575160" y="272880"/>
-            <a:ext cx="5110560" cy="5852160"/>
+            <a:off x="457200" y="2174760"/>
+            <a:ext cx="4038840" cy="3949920"/>
           </a:xfrm>
           <a:prstGeom prst="rect">
             <a:avLst/>
@@ -6715,14 +6978,17 @@
                 <a:spcPct val="100000"/>
               </a:lnSpc>
               <a:spcBef>
-                <a:spcPts val="641"/>
+                <a:spcPts val="479"/>
               </a:spcBef>
               <a:buClr>
                 <a:srgbClr val="000000"/>
               </a:buClr>
               <a:buFont typeface="Arial"/>
               <a:buChar char="•"/>
-              <a:defRPr lang="en-US" sz="3200" b="0" u="none" strike="noStrike">
+              <a:tabLst>
+                <a:tab pos="0" algn="l"/>
+              </a:tabLst>
+              <a:defRPr lang="en-US" sz="2400" b="0" u="none" strike="noStrike">
                 <a:solidFill>
                   <a:schemeClr val="dk1"/>
                 </a:solidFill>
@@ -6736,14 +7002,17 @@
                 <a:spcPct val="100000"/>
               </a:lnSpc>
               <a:spcBef>
-                <a:spcPts val="561"/>
+                <a:spcPts val="400"/>
               </a:spcBef>
               <a:buClr>
                 <a:srgbClr val="000000"/>
               </a:buClr>
               <a:buFont typeface="Arial"/>
               <a:buChar char="–"/>
-              <a:defRPr lang="en-US" sz="2800" b="0" u="none" strike="noStrike">
+              <a:tabLst>
+                <a:tab pos="0" algn="l"/>
+              </a:tabLst>
+              <a:defRPr lang="en-US" sz="2000" b="0" u="none" strike="noStrike">
                 <a:solidFill>
                   <a:schemeClr val="dk1"/>
                 </a:solidFill>
@@ -6753,6 +7022,80 @@
               </a:defRPr>
             </a:lvl2pPr>
             <a:lvl3pPr lvl="2" algn="l" defTabSz="457200">
+              <a:lnSpc>
+                <a:spcPct val="100000"/>
+              </a:lnSpc>
+              <a:spcBef>
+                <a:spcPts val="360"/>
+              </a:spcBef>
+              <a:buClr>
+                <a:srgbClr val="000000"/>
+              </a:buClr>
+              <a:buFont typeface="Arial"/>
+              <a:buChar char="•"/>
+              <a:tabLst>
+                <a:tab pos="0" algn="l"/>
+              </a:tabLst>
+              <a:defRPr lang="en-US" sz="1800" b="0" u="none" strike="noStrike">
+                <a:solidFill>
+                  <a:schemeClr val="dk1"/>
+                </a:solidFill>
+                <a:effectLst/>
+                <a:uFillTx/>
+                <a:latin typeface="Calibri"/>
+              </a:defRPr>
+            </a:lvl3pPr>
+            <a:lvl4pPr lvl="3" algn="l" defTabSz="457200">
+              <a:lnSpc>
+                <a:spcPct val="100000"/>
+              </a:lnSpc>
+              <a:spcBef>
+                <a:spcPts val="320"/>
+              </a:spcBef>
+              <a:buClr>
+                <a:srgbClr val="000000"/>
+              </a:buClr>
+              <a:buFont typeface="Arial"/>
+              <a:buChar char="–"/>
+              <a:tabLst>
+                <a:tab pos="0" algn="l"/>
+              </a:tabLst>
+              <a:defRPr lang="en-US" sz="1600" b="0" u="none" strike="noStrike">
+                <a:solidFill>
+                  <a:schemeClr val="dk1"/>
+                </a:solidFill>
+                <a:effectLst/>
+                <a:uFillTx/>
+                <a:latin typeface="Calibri"/>
+              </a:defRPr>
+            </a:lvl4pPr>
+            <a:lvl5pPr lvl="4" algn="l" defTabSz="457200">
+              <a:lnSpc>
+                <a:spcPct val="100000"/>
+              </a:lnSpc>
+              <a:spcBef>
+                <a:spcPts val="320"/>
+              </a:spcBef>
+              <a:buClr>
+                <a:srgbClr val="000000"/>
+              </a:buClr>
+              <a:buFont typeface="Arial"/>
+              <a:buChar char="»"/>
+              <a:tabLst>
+                <a:tab pos="0" algn="l"/>
+              </a:tabLst>
+              <a:defRPr lang="en-US" sz="1600" b="0" u="none" strike="noStrike">
+                <a:solidFill>
+                  <a:schemeClr val="dk1"/>
+                </a:solidFill>
+                <a:effectLst/>
+                <a:uFillTx/>
+                <a:latin typeface="Calibri"/>
+              </a:defRPr>
+            </a:lvl5pPr>
+          </a:lstStyle>
+          <a:p>
+            <a:pPr marL="343080" indent="-343080" algn="l" defTabSz="457200">
               <a:lnSpc>
                 <a:spcPct val="100000"/>
               </a:lnSpc>
@@ -6764,16 +7107,32 @@
               </a:buClr>
               <a:buFont typeface="Arial"/>
               <a:buChar char="•"/>
-              <a:defRPr lang="en-US" sz="2400" b="0" u="none" strike="noStrike">
-                <a:solidFill>
-                  <a:schemeClr val="dk1"/>
-                </a:solidFill>
-                <a:effectLst/>
-                <a:uFillTx/>
-                <a:latin typeface="Calibri"/>
-              </a:defRPr>
-            </a:lvl3pPr>
-            <a:lvl4pPr lvl="3" algn="l" defTabSz="457200">
+              <a:tabLst>
+                <a:tab pos="0" algn="l"/>
+              </a:tabLst>
+            </a:pPr>
+            <a:r>
+              <a:rPr lang="en-US" sz="2400" b="0" u="none" strike="noStrike">
+                <a:solidFill>
+                  <a:schemeClr val="dk1"/>
+                </a:solidFill>
+                <a:effectLst/>
+                <a:uFillTx/>
+                <a:latin typeface="Calibri"/>
+              </a:rPr>
+              <a:t>Click to edit Master text styles</a:t>
+            </a:r>
+            <a:endParaRPr lang="en-US" sz="2400" b="0" u="none" strike="noStrike">
+              <a:solidFill>
+                <a:schemeClr val="dk1"/>
+              </a:solidFill>
+              <a:effectLst/>
+              <a:uFillTx/>
+              <a:latin typeface="Calibri"/>
+            </a:endParaRPr>
+          </a:p>
+          <a:p>
+            <a:pPr marL="743040" lvl="1" indent="-285840" algn="l" defTabSz="457200">
               <a:lnSpc>
                 <a:spcPct val="100000"/>
               </a:lnSpc>
@@ -6785,200 +7144,123 @@
               </a:buClr>
               <a:buFont typeface="Arial"/>
               <a:buChar char="–"/>
-              <a:defRPr lang="en-US" sz="2000" b="0" u="none" strike="noStrike">
-                <a:solidFill>
-                  <a:schemeClr val="dk1"/>
-                </a:solidFill>
-                <a:effectLst/>
-                <a:uFillTx/>
-                <a:latin typeface="Calibri"/>
-              </a:defRPr>
-            </a:lvl4pPr>
-            <a:lvl5pPr lvl="4" algn="l" defTabSz="457200">
+              <a:tabLst>
+                <a:tab pos="0" algn="l"/>
+              </a:tabLst>
+            </a:pPr>
+            <a:r>
+              <a:rPr lang="en-US" sz="2000" b="0" u="none" strike="noStrike">
+                <a:solidFill>
+                  <a:schemeClr val="dk1"/>
+                </a:solidFill>
+                <a:effectLst/>
+                <a:uFillTx/>
+                <a:latin typeface="Calibri"/>
+              </a:rPr>
+              <a:t>Second level</a:t>
+            </a:r>
+            <a:endParaRPr lang="en-US" sz="2000" b="0" u="none" strike="noStrike">
+              <a:solidFill>
+                <a:schemeClr val="dk1"/>
+              </a:solidFill>
+              <a:effectLst/>
+              <a:uFillTx/>
+              <a:latin typeface="Calibri"/>
+            </a:endParaRPr>
+          </a:p>
+          <a:p>
+            <a:pPr marL="1143000" lvl="2" indent="-228600" algn="l" defTabSz="457200">
               <a:lnSpc>
                 <a:spcPct val="100000"/>
               </a:lnSpc>
               <a:spcBef>
-                <a:spcPts val="400"/>
+                <a:spcPts val="360"/>
+              </a:spcBef>
+              <a:buClr>
+                <a:srgbClr val="000000"/>
+              </a:buClr>
+              <a:buFont typeface="Arial"/>
+              <a:buChar char="•"/>
+              <a:tabLst>
+                <a:tab pos="0" algn="l"/>
+              </a:tabLst>
+            </a:pPr>
+            <a:r>
+              <a:rPr lang="en-US" sz="1800" b="0" u="none" strike="noStrike">
+                <a:solidFill>
+                  <a:schemeClr val="dk1"/>
+                </a:solidFill>
+                <a:effectLst/>
+                <a:uFillTx/>
+                <a:latin typeface="Calibri"/>
+              </a:rPr>
+              <a:t>Third level</a:t>
+            </a:r>
+            <a:endParaRPr lang="en-US" sz="1800" b="0" u="none" strike="noStrike">
+              <a:solidFill>
+                <a:schemeClr val="dk1"/>
+              </a:solidFill>
+              <a:effectLst/>
+              <a:uFillTx/>
+              <a:latin typeface="Calibri"/>
+            </a:endParaRPr>
+          </a:p>
+          <a:p>
+            <a:pPr marL="1600200" lvl="3" indent="-228600" algn="l" defTabSz="457200">
+              <a:lnSpc>
+                <a:spcPct val="100000"/>
+              </a:lnSpc>
+              <a:spcBef>
+                <a:spcPts val="320"/>
+              </a:spcBef>
+              <a:buClr>
+                <a:srgbClr val="000000"/>
+              </a:buClr>
+              <a:buFont typeface="Arial"/>
+              <a:buChar char="–"/>
+              <a:tabLst>
+                <a:tab pos="0" algn="l"/>
+              </a:tabLst>
+            </a:pPr>
+            <a:r>
+              <a:rPr lang="en-US" sz="1600" b="0" u="none" strike="noStrike">
+                <a:solidFill>
+                  <a:schemeClr val="dk1"/>
+                </a:solidFill>
+                <a:effectLst/>
+                <a:uFillTx/>
+                <a:latin typeface="Calibri"/>
+              </a:rPr>
+              <a:t>Fourth level</a:t>
+            </a:r>
+            <a:endParaRPr lang="en-US" sz="1600" b="0" u="none" strike="noStrike">
+              <a:solidFill>
+                <a:schemeClr val="dk1"/>
+              </a:solidFill>
+              <a:effectLst/>
+              <a:uFillTx/>
+              <a:latin typeface="Calibri"/>
+            </a:endParaRPr>
+          </a:p>
+          <a:p>
+            <a:pPr marL="2057400" lvl="4" indent="-228600" algn="l" defTabSz="457200">
+              <a:lnSpc>
+                <a:spcPct val="100000"/>
+              </a:lnSpc>
+              <a:spcBef>
+                <a:spcPts val="320"/>
               </a:spcBef>
               <a:buClr>
                 <a:srgbClr val="000000"/>
               </a:buClr>
               <a:buFont typeface="Arial"/>
               <a:buChar char="»"/>
-              <a:defRPr lang="en-US" sz="2000" b="0" u="none" strike="noStrike">
-                <a:solidFill>
-                  <a:schemeClr val="dk1"/>
-                </a:solidFill>
-                <a:effectLst/>
-                <a:uFillTx/>
-                <a:latin typeface="Calibri"/>
-              </a:defRPr>
-            </a:lvl5pPr>
-          </a:lstStyle>
-          <a:p>
-            <a:pPr marL="343080" indent="-343080" algn="l" defTabSz="457200">
-              <a:lnSpc>
-                <a:spcPct val="100000"/>
-              </a:lnSpc>
-              <a:spcBef>
-                <a:spcPts val="641"/>
-              </a:spcBef>
-              <a:buClr>
-                <a:srgbClr val="000000"/>
-              </a:buClr>
-              <a:buFont typeface="Arial"/>
-              <a:buChar char="•"/>
-            </a:pPr>
-            <a:r>
-              <a:rPr lang="en-US" sz="3200" b="0" u="none" strike="noStrike">
-                <a:solidFill>
-                  <a:schemeClr val="dk1"/>
-                </a:solidFill>
-                <a:effectLst/>
-                <a:uFillTx/>
-                <a:latin typeface="Calibri"/>
-              </a:rPr>
-              <a:t>Click to edit Master </a:t>
-            </a:r>
-            <a:r>
-              <a:rPr lang="en-US" sz="3200" b="0" u="none" strike="noStrike">
-                <a:solidFill>
-                  <a:schemeClr val="dk1"/>
-                </a:solidFill>
-                <a:effectLst/>
-                <a:uFillTx/>
-                <a:latin typeface="Calibri"/>
-              </a:rPr>
-              <a:t>text styles</a:t>
-            </a:r>
-            <a:endParaRPr lang="en-US" sz="3200" b="0" u="none" strike="noStrike">
-              <a:solidFill>
-                <a:schemeClr val="dk1"/>
-              </a:solidFill>
-              <a:effectLst/>
-              <a:uFillTx/>
-              <a:latin typeface="Calibri"/>
-            </a:endParaRPr>
-          </a:p>
-          <a:p>
-            <a:pPr marL="743040" lvl="1" indent="-285840" algn="l" defTabSz="457200">
-              <a:lnSpc>
-                <a:spcPct val="100000"/>
-              </a:lnSpc>
-              <a:spcBef>
-                <a:spcPts val="561"/>
-              </a:spcBef>
-              <a:buClr>
-                <a:srgbClr val="000000"/>
-              </a:buClr>
-              <a:buFont typeface="Arial"/>
-              <a:buChar char="–"/>
-            </a:pPr>
-            <a:r>
-              <a:rPr lang="en-US" sz="2800" b="0" u="none" strike="noStrike">
-                <a:solidFill>
-                  <a:schemeClr val="dk1"/>
-                </a:solidFill>
-                <a:effectLst/>
-                <a:uFillTx/>
-                <a:latin typeface="Calibri"/>
-              </a:rPr>
-              <a:t>Second level</a:t>
-            </a:r>
-            <a:endParaRPr lang="en-US" sz="2800" b="0" u="none" strike="noStrike">
-              <a:solidFill>
-                <a:schemeClr val="dk1"/>
-              </a:solidFill>
-              <a:effectLst/>
-              <a:uFillTx/>
-              <a:latin typeface="Calibri"/>
-            </a:endParaRPr>
-          </a:p>
-          <a:p>
-            <a:pPr marL="1143000" lvl="2" indent="-228600" algn="l" defTabSz="457200">
-              <a:lnSpc>
-                <a:spcPct val="100000"/>
-              </a:lnSpc>
-              <a:spcBef>
-                <a:spcPts val="479"/>
-              </a:spcBef>
-              <a:buClr>
-                <a:srgbClr val="000000"/>
-              </a:buClr>
-              <a:buFont typeface="Arial"/>
-              <a:buChar char="•"/>
-            </a:pPr>
-            <a:r>
-              <a:rPr lang="en-US" sz="2400" b="0" u="none" strike="noStrike">
-                <a:solidFill>
-                  <a:schemeClr val="dk1"/>
-                </a:solidFill>
-                <a:effectLst/>
-                <a:uFillTx/>
-                <a:latin typeface="Calibri"/>
-              </a:rPr>
-              <a:t>Third level</a:t>
-            </a:r>
-            <a:endParaRPr lang="en-US" sz="2400" b="0" u="none" strike="noStrike">
-              <a:solidFill>
-                <a:schemeClr val="dk1"/>
-              </a:solidFill>
-              <a:effectLst/>
-              <a:uFillTx/>
-              <a:latin typeface="Calibri"/>
-            </a:endParaRPr>
-          </a:p>
-          <a:p>
-            <a:pPr marL="1600200" lvl="3" indent="-228600" algn="l" defTabSz="457200">
-              <a:lnSpc>
-                <a:spcPct val="100000"/>
-              </a:lnSpc>
-              <a:spcBef>
-                <a:spcPts val="400"/>
-              </a:spcBef>
-              <a:buClr>
-                <a:srgbClr val="000000"/>
-              </a:buClr>
-              <a:buFont typeface="Arial"/>
-              <a:buChar char="–"/>
-            </a:pPr>
-            <a:r>
-              <a:rPr lang="en-US" sz="2000" b="0" u="none" strike="noStrike">
-                <a:solidFill>
-                  <a:schemeClr val="dk1"/>
-                </a:solidFill>
-                <a:effectLst/>
-                <a:uFillTx/>
-                <a:latin typeface="Calibri"/>
-              </a:rPr>
-              <a:t>Fourth level</a:t>
-            </a:r>
-            <a:endParaRPr lang="en-US" sz="2000" b="0" u="none" strike="noStrike">
-              <a:solidFill>
-                <a:schemeClr val="dk1"/>
-              </a:solidFill>
-              <a:effectLst/>
-              <a:uFillTx/>
-              <a:latin typeface="Calibri"/>
-            </a:endParaRPr>
-          </a:p>
-          <a:p>
-            <a:pPr marL="2057400" lvl="4" indent="-228600" algn="l" defTabSz="457200">
-              <a:lnSpc>
-                <a:spcPct val="100000"/>
-              </a:lnSpc>
-              <a:spcBef>
-                <a:spcPts val="400"/>
-              </a:spcBef>
-              <a:buClr>
-                <a:srgbClr val="000000"/>
-              </a:buClr>
-              <a:buFont typeface="Arial"/>
-              <a:buChar char="»"/>
-            </a:pPr>
-            <a:r>
-              <a:rPr lang="en-US" sz="2000" b="0" u="none" strike="noStrike">
+              <a:tabLst>
+                <a:tab pos="0" algn="l"/>
+              </a:tabLst>
+            </a:pPr>
+            <a:r>
+              <a:rPr lang="en-US" sz="1600" b="0" u="none" strike="noStrike">
                 <a:solidFill>
                   <a:schemeClr val="dk1"/>
                 </a:solidFill>
@@ -6988,7 +7270,7 @@
               </a:rPr>
               <a:t>Fifth level</a:t>
             </a:r>
-            <a:endParaRPr lang="en-US" sz="2000" b="0" u="none" strike="noStrike">
+            <a:endParaRPr lang="en-US" sz="1600" b="0" u="none" strike="noStrike">
               <a:solidFill>
                 <a:schemeClr val="dk1"/>
               </a:solidFill>
@@ -7001,7 +7283,7 @@
       </p:sp>
       <p:sp>
         <p:nvSpPr>
-          <p:cNvPr id="25" name="PlaceHolder 3"/>
+          <p:cNvPr id="26" name="PlaceHolder 4"/>
           <p:cNvSpPr>
             <a:spLocks noGrp="1"/>
           </p:cNvSpPr>
@@ -7011,8 +7293,92 @@
         </p:nvSpPr>
         <p:spPr>
           <a:xfrm>
-            <a:off x="457200" y="1434960"/>
-            <a:ext cx="3007080" cy="4690080"/>
+            <a:off x="4645080" y="1535040"/>
+            <a:ext cx="4040280" cy="638280"/>
+          </a:xfrm>
+          <a:prstGeom prst="rect">
+            <a:avLst/>
+          </a:prstGeom>
+          <a:noFill/>
+          <a:ln w="0">
+            <a:noFill/>
+          </a:ln>
+        </p:spPr>
+        <p:txBody>
+          <a:bodyPr lIns="91440" tIns="45720" rIns="91440" bIns="45720" anchor="b">
+            <a:noAutofit/>
+          </a:bodyPr>
+          <a:lstStyle>
+            <a:lvl1pPr indent="0" algn="l" defTabSz="457200">
+              <a:lnSpc>
+                <a:spcPct val="100000"/>
+              </a:lnSpc>
+              <a:spcBef>
+                <a:spcPts val="479"/>
+              </a:spcBef>
+              <a:buNone/>
+              <a:tabLst>
+                <a:tab pos="0" algn="l"/>
+              </a:tabLst>
+              <a:defRPr lang="en-US" sz="2400" b="1" u="none" strike="noStrike">
+                <a:solidFill>
+                  <a:schemeClr val="dk1"/>
+                </a:solidFill>
+                <a:effectLst/>
+                <a:uFillTx/>
+                <a:latin typeface="Calibri"/>
+              </a:defRPr>
+            </a:lvl1pPr>
+          </a:lstStyle>
+          <a:p>
+            <a:pPr indent="0" algn="l" defTabSz="457200">
+              <a:lnSpc>
+                <a:spcPct val="100000"/>
+              </a:lnSpc>
+              <a:spcBef>
+                <a:spcPts val="479"/>
+              </a:spcBef>
+              <a:buNone/>
+              <a:tabLst>
+                <a:tab pos="0" algn="l"/>
+              </a:tabLst>
+            </a:pPr>
+            <a:r>
+              <a:rPr lang="en-US" sz="2400" b="1" u="none" strike="noStrike">
+                <a:solidFill>
+                  <a:schemeClr val="dk1"/>
+                </a:solidFill>
+                <a:effectLst/>
+                <a:uFillTx/>
+                <a:latin typeface="Calibri"/>
+              </a:rPr>
+              <a:t>Click to edit Master text styles</a:t>
+            </a:r>
+            <a:endParaRPr lang="en-US" sz="2400" b="0" u="none" strike="noStrike">
+              <a:solidFill>
+                <a:schemeClr val="dk1"/>
+              </a:solidFill>
+              <a:effectLst/>
+              <a:uFillTx/>
+              <a:latin typeface="Calibri"/>
+            </a:endParaRPr>
+          </a:p>
+        </p:txBody>
+      </p:sp>
+      <p:sp>
+        <p:nvSpPr>
+          <p:cNvPr id="27" name="PlaceHolder 5"/>
+          <p:cNvSpPr>
+            <a:spLocks noGrp="1"/>
+          </p:cNvSpPr>
+          <p:nvPr>
+            <p:ph type="body"/>
+          </p:nvPr>
+        </p:nvSpPr>
+        <p:spPr>
+          <a:xfrm>
+            <a:off x="4645080" y="2174760"/>
+            <a:ext cx="4040280" cy="3949920"/>
           </a:xfrm>
           <a:prstGeom prst="rect">
             <a:avLst/>
@@ -7027,18 +7393,22 @@
             <a:noAutofit/>
           </a:bodyPr>
           <a:lstStyle>
-            <a:lvl1pPr indent="0" algn="l" defTabSz="457200">
+            <a:lvl1pPr algn="l" defTabSz="457200">
               <a:lnSpc>
                 <a:spcPct val="100000"/>
               </a:lnSpc>
               <a:spcBef>
-                <a:spcPts val="281"/>
+                <a:spcPts val="479"/>
               </a:spcBef>
-              <a:buNone/>
-              <a:tabLst>
-                <a:tab pos="0" algn="l"/>
-              </a:tabLst>
-              <a:defRPr lang="en-US" sz="1400" b="0" u="none" strike="noStrike">
+              <a:buClr>
+                <a:srgbClr val="000000"/>
+              </a:buClr>
+              <a:buFont typeface="Arial"/>
+              <a:buChar char="•"/>
+              <a:tabLst>
+                <a:tab pos="0" algn="l"/>
+              </a:tabLst>
+              <a:defRPr lang="en-US" sz="2400" b="0" u="none" strike="noStrike">
                 <a:solidFill>
                   <a:schemeClr val="dk1"/>
                 </a:solidFill>
@@ -7047,22 +7417,122 @@
                 <a:latin typeface="Calibri"/>
               </a:defRPr>
             </a:lvl1pPr>
+            <a:lvl2pPr lvl="1" algn="l" defTabSz="457200">
+              <a:lnSpc>
+                <a:spcPct val="100000"/>
+              </a:lnSpc>
+              <a:spcBef>
+                <a:spcPts val="400"/>
+              </a:spcBef>
+              <a:buClr>
+                <a:srgbClr val="000000"/>
+              </a:buClr>
+              <a:buFont typeface="Arial"/>
+              <a:buChar char="–"/>
+              <a:tabLst>
+                <a:tab pos="0" algn="l"/>
+              </a:tabLst>
+              <a:defRPr lang="en-US" sz="2000" b="0" u="none" strike="noStrike">
+                <a:solidFill>
+                  <a:schemeClr val="dk1"/>
+                </a:solidFill>
+                <a:effectLst/>
+                <a:uFillTx/>
+                <a:latin typeface="Calibri"/>
+              </a:defRPr>
+            </a:lvl2pPr>
+            <a:lvl3pPr lvl="2" algn="l" defTabSz="457200">
+              <a:lnSpc>
+                <a:spcPct val="100000"/>
+              </a:lnSpc>
+              <a:spcBef>
+                <a:spcPts val="360"/>
+              </a:spcBef>
+              <a:buClr>
+                <a:srgbClr val="000000"/>
+              </a:buClr>
+              <a:buFont typeface="Arial"/>
+              <a:buChar char="•"/>
+              <a:tabLst>
+                <a:tab pos="0" algn="l"/>
+              </a:tabLst>
+              <a:defRPr lang="en-US" sz="1800" b="0" u="none" strike="noStrike">
+                <a:solidFill>
+                  <a:schemeClr val="dk1"/>
+                </a:solidFill>
+                <a:effectLst/>
+                <a:uFillTx/>
+                <a:latin typeface="Calibri"/>
+              </a:defRPr>
+            </a:lvl3pPr>
+            <a:lvl4pPr lvl="3" algn="l" defTabSz="457200">
+              <a:lnSpc>
+                <a:spcPct val="100000"/>
+              </a:lnSpc>
+              <a:spcBef>
+                <a:spcPts val="320"/>
+              </a:spcBef>
+              <a:buClr>
+                <a:srgbClr val="000000"/>
+              </a:buClr>
+              <a:buFont typeface="Arial"/>
+              <a:buChar char="–"/>
+              <a:tabLst>
+                <a:tab pos="0" algn="l"/>
+              </a:tabLst>
+              <a:defRPr lang="en-US" sz="1600" b="0" u="none" strike="noStrike">
+                <a:solidFill>
+                  <a:schemeClr val="dk1"/>
+                </a:solidFill>
+                <a:effectLst/>
+                <a:uFillTx/>
+                <a:latin typeface="Calibri"/>
+              </a:defRPr>
+            </a:lvl4pPr>
+            <a:lvl5pPr lvl="4" algn="l" defTabSz="457200">
+              <a:lnSpc>
+                <a:spcPct val="100000"/>
+              </a:lnSpc>
+              <a:spcBef>
+                <a:spcPts val="320"/>
+              </a:spcBef>
+              <a:buClr>
+                <a:srgbClr val="000000"/>
+              </a:buClr>
+              <a:buFont typeface="Arial"/>
+              <a:buChar char="»"/>
+              <a:tabLst>
+                <a:tab pos="0" algn="l"/>
+              </a:tabLst>
+              <a:defRPr lang="en-US" sz="1600" b="0" u="none" strike="noStrike">
+                <a:solidFill>
+                  <a:schemeClr val="dk1"/>
+                </a:solidFill>
+                <a:effectLst/>
+                <a:uFillTx/>
+                <a:latin typeface="Calibri"/>
+              </a:defRPr>
+            </a:lvl5pPr>
           </a:lstStyle>
           <a:p>
-            <a:pPr indent="0" algn="l" defTabSz="457200">
+            <a:pPr marL="343080" indent="-343080" algn="l" defTabSz="457200">
               <a:lnSpc>
                 <a:spcPct val="100000"/>
               </a:lnSpc>
               <a:spcBef>
-                <a:spcPts val="281"/>
+                <a:spcPts val="479"/>
               </a:spcBef>
-              <a:buNone/>
-              <a:tabLst>
-                <a:tab pos="0" algn="l"/>
-              </a:tabLst>
-            </a:pPr>
-            <a:r>
-              <a:rPr lang="en-US" sz="1400" b="0" u="none" strike="noStrike">
+              <a:buClr>
+                <a:srgbClr val="000000"/>
+              </a:buClr>
+              <a:buFont typeface="Arial"/>
+              <a:buChar char="•"/>
+              <a:tabLst>
+                <a:tab pos="0" algn="l"/>
+              </a:tabLst>
+            </a:pPr>
+            <a:r>
+              <a:rPr lang="en-US" sz="2400" b="0" u="none" strike="noStrike">
                 <a:solidFill>
                   <a:schemeClr val="dk1"/>
                 </a:solidFill>
@@ -7072,7 +7542,155 @@
               </a:rPr>
               <a:t>Click to edit Master text styles</a:t>
             </a:r>
-            <a:endParaRPr lang="en-US" sz="1400" b="0" u="none" strike="noStrike">
+            <a:endParaRPr lang="en-US" sz="2400" b="0" u="none" strike="noStrike">
+              <a:solidFill>
+                <a:schemeClr val="dk1"/>
+              </a:solidFill>
+              <a:effectLst/>
+              <a:uFillTx/>
+              <a:latin typeface="Calibri"/>
+            </a:endParaRPr>
+          </a:p>
+          <a:p>
+            <a:pPr marL="743040" lvl="1" indent="-285840" algn="l" defTabSz="457200">
+              <a:lnSpc>
+                <a:spcPct val="100000"/>
+              </a:lnSpc>
+              <a:spcBef>
+                <a:spcPts val="400"/>
+              </a:spcBef>
+              <a:buClr>
+                <a:srgbClr val="000000"/>
+              </a:buClr>
+              <a:buFont typeface="Arial"/>
+              <a:buChar char="–"/>
+              <a:tabLst>
+                <a:tab pos="0" algn="l"/>
+              </a:tabLst>
+            </a:pPr>
+            <a:r>
+              <a:rPr lang="en-US" sz="2000" b="0" u="none" strike="noStrike">
+                <a:solidFill>
+                  <a:schemeClr val="dk1"/>
+                </a:solidFill>
+                <a:effectLst/>
+                <a:uFillTx/>
+                <a:latin typeface="Calibri"/>
+              </a:rPr>
+              <a:t>Second level</a:t>
+            </a:r>
+            <a:endParaRPr lang="en-US" sz="2000" b="0" u="none" strike="noStrike">
+              <a:solidFill>
+                <a:schemeClr val="dk1"/>
+              </a:solidFill>
+              <a:effectLst/>
+              <a:uFillTx/>
+              <a:latin typeface="Calibri"/>
+            </a:endParaRPr>
+          </a:p>
+          <a:p>
+            <a:pPr marL="1143000" lvl="2" indent="-228600" algn="l" defTabSz="457200">
+              <a:lnSpc>
+                <a:spcPct val="100000"/>
+              </a:lnSpc>
+              <a:spcBef>
+                <a:spcPts val="360"/>
+              </a:spcBef>
+              <a:buClr>
+                <a:srgbClr val="000000"/>
+              </a:buClr>
+              <a:buFont typeface="Arial"/>
+              <a:buChar char="•"/>
+              <a:tabLst>
+                <a:tab pos="0" algn="l"/>
+              </a:tabLst>
+            </a:pPr>
+            <a:r>
+              <a:rPr lang="en-US" sz="1800" b="0" u="none" strike="noStrike">
+                <a:solidFill>
+                  <a:schemeClr val="dk1"/>
+                </a:solidFill>
+                <a:effectLst/>
+                <a:uFillTx/>
+                <a:latin typeface="Calibri"/>
+              </a:rPr>
+              <a:t>Third level</a:t>
+            </a:r>
+            <a:endParaRPr lang="en-US" sz="1800" b="0" u="none" strike="noStrike">
+              <a:solidFill>
+                <a:schemeClr val="dk1"/>
+              </a:solidFill>
+              <a:effectLst/>
+              <a:uFillTx/>
+              <a:latin typeface="Calibri"/>
+            </a:endParaRPr>
+          </a:p>
+          <a:p>
+            <a:pPr marL="1600200" lvl="3" indent="-228600" algn="l" defTabSz="457200">
+              <a:lnSpc>
+                <a:spcPct val="100000"/>
+              </a:lnSpc>
+              <a:spcBef>
+                <a:spcPts val="320"/>
+              </a:spcBef>
+              <a:buClr>
+                <a:srgbClr val="000000"/>
+              </a:buClr>
+              <a:buFont typeface="Arial"/>
+              <a:buChar char="–"/>
+              <a:tabLst>
+                <a:tab pos="0" algn="l"/>
+              </a:tabLst>
+            </a:pPr>
+            <a:r>
+              <a:rPr lang="en-US" sz="1600" b="0" u="none" strike="noStrike">
+                <a:solidFill>
+                  <a:schemeClr val="dk1"/>
+                </a:solidFill>
+                <a:effectLst/>
+                <a:uFillTx/>
+                <a:latin typeface="Calibri"/>
+              </a:rPr>
+              <a:t>Fourth level</a:t>
+            </a:r>
+            <a:endParaRPr lang="en-US" sz="1600" b="0" u="none" strike="noStrike">
+              <a:solidFill>
+                <a:schemeClr val="dk1"/>
+              </a:solidFill>
+              <a:effectLst/>
+              <a:uFillTx/>
+              <a:latin typeface="Calibri"/>
+            </a:endParaRPr>
+          </a:p>
+          <a:p>
+            <a:pPr marL="2057400" lvl="4" indent="-228600" algn="l" defTabSz="457200">
+              <a:lnSpc>
+                <a:spcPct val="100000"/>
+              </a:lnSpc>
+              <a:spcBef>
+                <a:spcPts val="320"/>
+              </a:spcBef>
+              <a:buClr>
+                <a:srgbClr val="000000"/>
+              </a:buClr>
+              <a:buFont typeface="Arial"/>
+              <a:buChar char="»"/>
+              <a:tabLst>
+                <a:tab pos="0" algn="l"/>
+              </a:tabLst>
+            </a:pPr>
+            <a:r>
+              <a:rPr lang="en-US" sz="1600" b="0" u="none" strike="noStrike">
+                <a:solidFill>
+                  <a:schemeClr val="dk1"/>
+                </a:solidFill>
+                <a:effectLst/>
+                <a:uFillTx/>
+                <a:latin typeface="Calibri"/>
+              </a:rPr>
+              <a:t>Fifth level</a:t>
+            </a:r>
+            <a:endParaRPr lang="en-US" sz="1600" b="0" u="none" strike="noStrike">
               <a:solidFill>
                 <a:schemeClr val="dk1"/>
               </a:solidFill>
@@ -7085,7 +7703,7 @@
       </p:sp>
       <p:sp>
         <p:nvSpPr>
-          <p:cNvPr id="26" name="PlaceHolder 4"/>
+          <p:cNvPr id="28" name="PlaceHolder 6"/>
           <p:cNvSpPr>
             <a:spLocks noGrp="1"/>
           </p:cNvSpPr>
@@ -7096,7 +7714,7 @@
         <p:spPr>
           <a:xfrm>
             <a:off x="457200" y="6356520"/>
-            <a:ext cx="2132640" cy="363960"/>
+            <a:ext cx="2132280" cy="363600"/>
           </a:xfrm>
           <a:prstGeom prst="rect">
             <a:avLst/>
@@ -7152,7 +7770,7 @@
                 <a:uFillTx/>
                 <a:latin typeface="Calibri"/>
               </a:rPr>
-              <a:t>&lt;fecha/hora&gt;</a:t>
+              <a:t> </a:t>
             </a:r>
             <a:endParaRPr lang="es-CO" sz="1200" b="0" u="none" strike="noStrike">
               <a:solidFill>
@@ -7167,7 +7785,7 @@
       </p:sp>
       <p:sp>
         <p:nvSpPr>
-          <p:cNvPr id="27" name="PlaceHolder 5"/>
+          <p:cNvPr id="29" name="PlaceHolder 7"/>
           <p:cNvSpPr>
             <a:spLocks noGrp="1"/>
           </p:cNvSpPr>
@@ -7178,7 +7796,7 @@
         <p:spPr>
           <a:xfrm>
             <a:off x="3124080" y="6356520"/>
-            <a:ext cx="2894400" cy="363960"/>
+            <a:ext cx="2894040" cy="363600"/>
           </a:xfrm>
           <a:prstGeom prst="rect">
             <a:avLst/>
@@ -7230,7 +7848,7 @@
                 <a:uFillTx/>
                 <a:latin typeface="Times New Roman"/>
               </a:rPr>
-              <a:t>&lt;pie de página&gt;</a:t>
+              <a:t> </a:t>
             </a:r>
             <a:endParaRPr lang="es-CO" sz="1400" b="0" u="none" strike="noStrike">
               <a:solidFill>
@@ -7245,7 +7863,7 @@
       </p:sp>
       <p:sp>
         <p:nvSpPr>
-          <p:cNvPr id="28" name="PlaceHolder 6"/>
+          <p:cNvPr id="30" name="PlaceHolder 8"/>
           <p:cNvSpPr>
             <a:spLocks noGrp="1"/>
           </p:cNvSpPr>
@@ -7256,7 +7874,7 @@
         <p:spPr>
           <a:xfrm>
             <a:off x="6553080" y="6356520"/>
-            <a:ext cx="2132640" cy="363960"/>
+            <a:ext cx="2132280" cy="363600"/>
           </a:xfrm>
           <a:prstGeom prst="rect">
             <a:avLst/>
@@ -7301,7 +7919,7 @@
                 <a:tab pos="0" algn="l"/>
               </a:tabLst>
             </a:pPr>
-            <a:fld id="{5AF7702C-86AD-4D56-B21A-F6E999011526}" type="slidenum">
+            <a:fld id="{FD86C2E6-06C7-44B8-88F8-5C94256992E2}" type="slidenum">
               <a:rPr lang="en-US" sz="1200" b="0" u="none" strike="noStrike">
                 <a:solidFill>
                   <a:schemeClr val="dk1">
@@ -7312,7 +7930,7 @@
                 <a:uFillTx/>
                 <a:latin typeface="Calibri"/>
               </a:rPr>
-              <a:t>&lt;número&gt;</a:t>
+              <a:t>8</a:t>
             </a:fld>
             <a:endParaRPr lang="es-CO" sz="1200" b="0" u="none" strike="noStrike">
               <a:solidFill>
@@ -7331,8 +7949,8 @@
 </file>
 
 <file path=ppt/slideLayouts/slideLayout6.xml><?xml version="1.0" encoding="utf-8"?>
-<p:sldLayout xmlns:a="http://schemas.openxmlformats.org/drawingml/2006/main" xmlns:p="http://schemas.openxmlformats.org/presentationml/2006/main" xmlns:r="http://schemas.openxmlformats.org/officeDocument/2006/relationships" xmlns:p14="http://schemas.microsoft.com/office/powerpoint/2010/main" xmlns:p15="http://schemas.microsoft.com/office/powerpoint/2012/main" xmlns:mc="http://schemas.openxmlformats.org/markup-compatibility/2006" type="blank" preserve="1">
-  <p:cSld name="Picture with Caption">
+<p:sldLayout xmlns:a="http://schemas.openxmlformats.org/drawingml/2006/main" xmlns:p="http://schemas.openxmlformats.org/presentationml/2006/main" xmlns:r="http://schemas.openxmlformats.org/officeDocument/2006/relationships" xmlns:p14="http://schemas.microsoft.com/office/powerpoint/2010/main" xmlns:p15="http://schemas.microsoft.com/office/powerpoint/2012/main" xmlns:mc="http://schemas.openxmlformats.org/markup-compatibility/2006" type="titleOnly" preserve="1">
+  <p:cSld name="Title Only">
     <p:bg>
       <p:bgPr>
         <a:solidFill>
@@ -7356,7 +7974,7 @@
       </p:grpSpPr>
       <p:sp>
         <p:nvSpPr>
-          <p:cNvPr id="29" name="PlaceHolder 1"/>
+          <p:cNvPr id="31" name="PlaceHolder 1"/>
           <p:cNvSpPr>
             <a:spLocks noGrp="1"/>
           </p:cNvSpPr>
@@ -7366,8 +7984,8 @@
         </p:nvSpPr>
         <p:spPr>
           <a:xfrm>
-            <a:off x="1792440" y="4800600"/>
-            <a:ext cx="5485320" cy="565560"/>
+            <a:off x="457200" y="274680"/>
+            <a:ext cx="8228160" cy="1141560"/>
           </a:xfrm>
           <a:prstGeom prst="rect">
             <a:avLst/>
@@ -7378,19 +7996,19 @@
           </a:ln>
         </p:spPr>
         <p:txBody>
-          <a:bodyPr lIns="91440" tIns="45720" rIns="91440" bIns="45720" anchor="b">
+          <a:bodyPr lIns="91440" tIns="45720" rIns="91440" bIns="45720" anchor="ctr">
             <a:noAutofit/>
           </a:bodyPr>
           <a:lstStyle>
-            <a:lvl1pPr indent="0" algn="l" defTabSz="457200">
-              <a:lnSpc>
-                <a:spcPct val="100000"/>
-              </a:lnSpc>
-              <a:buNone/>
-              <a:tabLst>
-                <a:tab pos="0" algn="l"/>
-              </a:tabLst>
-              <a:defRPr lang="en-US" sz="2000" b="1" u="none" strike="noStrike">
+            <a:lvl1pPr indent="0" algn="ctr" defTabSz="457200">
+              <a:lnSpc>
+                <a:spcPct val="100000"/>
+              </a:lnSpc>
+              <a:buNone/>
+              <a:tabLst>
+                <a:tab pos="0" algn="l"/>
+              </a:tabLst>
+              <a:defRPr lang="en-US" sz="4400" b="0" u="none" strike="noStrike">
                 <a:solidFill>
                   <a:schemeClr val="dk1"/>
                 </a:solidFill>
@@ -7401,203 +8019,27 @@
             </a:lvl1pPr>
           </a:lstStyle>
           <a:p>
-            <a:pPr indent="0" algn="l" defTabSz="457200">
-              <a:lnSpc>
-                <a:spcPct val="100000"/>
-              </a:lnSpc>
-              <a:buNone/>
-              <a:tabLst>
-                <a:tab pos="0" algn="l"/>
-              </a:tabLst>
-            </a:pPr>
-            <a:r>
-              <a:rPr lang="en-US" sz="2000" b="1" u="none" strike="noStrike">
-                <a:solidFill>
-                  <a:schemeClr val="dk1"/>
-                </a:solidFill>
-                <a:effectLst/>
-                <a:uFillTx/>
-                <a:latin typeface="Calibri"/>
-              </a:rPr>
-              <a:t>Cl</a:t>
-            </a:r>
-            <a:r>
-              <a:rPr lang="en-US" sz="2000" b="1" u="none" strike="noStrike">
-                <a:solidFill>
-                  <a:schemeClr val="dk1"/>
-                </a:solidFill>
-                <a:effectLst/>
-                <a:uFillTx/>
-                <a:latin typeface="Calibri"/>
-              </a:rPr>
-              <a:t>ic</a:t>
-            </a:r>
-            <a:r>
-              <a:rPr lang="en-US" sz="2000" b="1" u="none" strike="noStrike">
-                <a:solidFill>
-                  <a:schemeClr val="dk1"/>
-                </a:solidFill>
-                <a:effectLst/>
-                <a:uFillTx/>
-                <a:latin typeface="Calibri"/>
-              </a:rPr>
-              <a:t>k </a:t>
-            </a:r>
-            <a:r>
-              <a:rPr lang="en-US" sz="2000" b="1" u="none" strike="noStrike">
-                <a:solidFill>
-                  <a:schemeClr val="dk1"/>
-                </a:solidFill>
-                <a:effectLst/>
-                <a:uFillTx/>
-                <a:latin typeface="Calibri"/>
-              </a:rPr>
-              <a:t>to </a:t>
-            </a:r>
-            <a:r>
-              <a:rPr lang="en-US" sz="2000" b="1" u="none" strike="noStrike">
-                <a:solidFill>
-                  <a:schemeClr val="dk1"/>
-                </a:solidFill>
-                <a:effectLst/>
-                <a:uFillTx/>
-                <a:latin typeface="Calibri"/>
-              </a:rPr>
-              <a:t>e</a:t>
-            </a:r>
-            <a:r>
-              <a:rPr lang="en-US" sz="2000" b="1" u="none" strike="noStrike">
-                <a:solidFill>
-                  <a:schemeClr val="dk1"/>
-                </a:solidFill>
-                <a:effectLst/>
-                <a:uFillTx/>
-                <a:latin typeface="Calibri"/>
-              </a:rPr>
-              <a:t>di</a:t>
-            </a:r>
-            <a:r>
-              <a:rPr lang="en-US" sz="2000" b="1" u="none" strike="noStrike">
-                <a:solidFill>
-                  <a:schemeClr val="dk1"/>
-                </a:solidFill>
-                <a:effectLst/>
-                <a:uFillTx/>
-                <a:latin typeface="Calibri"/>
-              </a:rPr>
-              <a:t>t </a:t>
-            </a:r>
-            <a:r>
-              <a:rPr lang="en-US" sz="2000" b="1" u="none" strike="noStrike">
-                <a:solidFill>
-                  <a:schemeClr val="dk1"/>
-                </a:solidFill>
-                <a:effectLst/>
-                <a:uFillTx/>
-                <a:latin typeface="Calibri"/>
-              </a:rPr>
-              <a:t>M</a:t>
-            </a:r>
-            <a:r>
-              <a:rPr lang="en-US" sz="2000" b="1" u="none" strike="noStrike">
-                <a:solidFill>
-                  <a:schemeClr val="dk1"/>
-                </a:solidFill>
-                <a:effectLst/>
-                <a:uFillTx/>
-                <a:latin typeface="Calibri"/>
-              </a:rPr>
-              <a:t>as</a:t>
-            </a:r>
-            <a:r>
-              <a:rPr lang="en-US" sz="2000" b="1" u="none" strike="noStrike">
-                <a:solidFill>
-                  <a:schemeClr val="dk1"/>
-                </a:solidFill>
-                <a:effectLst/>
-                <a:uFillTx/>
-                <a:latin typeface="Calibri"/>
-              </a:rPr>
-              <a:t>te</a:t>
-            </a:r>
-            <a:r>
-              <a:rPr lang="en-US" sz="2000" b="1" u="none" strike="noStrike">
-                <a:solidFill>
-                  <a:schemeClr val="dk1"/>
-                </a:solidFill>
-                <a:effectLst/>
-                <a:uFillTx/>
-                <a:latin typeface="Calibri"/>
-              </a:rPr>
-              <a:t>r </a:t>
-            </a:r>
-            <a:r>
-              <a:rPr lang="en-US" sz="2000" b="1" u="none" strike="noStrike">
-                <a:solidFill>
-                  <a:schemeClr val="dk1"/>
-                </a:solidFill>
-                <a:effectLst/>
-                <a:uFillTx/>
-                <a:latin typeface="Calibri"/>
-              </a:rPr>
-              <a:t>ti</a:t>
-            </a:r>
-            <a:r>
-              <a:rPr lang="en-US" sz="2000" b="1" u="none" strike="noStrike">
-                <a:solidFill>
-                  <a:schemeClr val="dk1"/>
-                </a:solidFill>
-                <a:effectLst/>
-                <a:uFillTx/>
-                <a:latin typeface="Calibri"/>
-              </a:rPr>
-              <a:t>tl</a:t>
-            </a:r>
-            <a:r>
-              <a:rPr lang="en-US" sz="2000" b="1" u="none" strike="noStrike">
-                <a:solidFill>
-                  <a:schemeClr val="dk1"/>
-                </a:solidFill>
-                <a:effectLst/>
-                <a:uFillTx/>
-                <a:latin typeface="Calibri"/>
-              </a:rPr>
-              <a:t>e </a:t>
-            </a:r>
-            <a:r>
-              <a:rPr lang="en-US" sz="2000" b="1" u="none" strike="noStrike">
-                <a:solidFill>
-                  <a:schemeClr val="dk1"/>
-                </a:solidFill>
-                <a:effectLst/>
-                <a:uFillTx/>
-                <a:latin typeface="Calibri"/>
-              </a:rPr>
-              <a:t>st</a:t>
-            </a:r>
-            <a:r>
-              <a:rPr lang="en-US" sz="2000" b="1" u="none" strike="noStrike">
-                <a:solidFill>
-                  <a:schemeClr val="dk1"/>
-                </a:solidFill>
-                <a:effectLst/>
-                <a:uFillTx/>
-                <a:latin typeface="Calibri"/>
-              </a:rPr>
-              <a:t>yl</a:t>
-            </a:r>
-            <a:r>
-              <a:rPr lang="en-US" sz="2000" b="1" u="none" strike="noStrike">
-                <a:solidFill>
-                  <a:schemeClr val="dk1"/>
-                </a:solidFill>
-                <a:effectLst/>
-                <a:uFillTx/>
-                <a:latin typeface="Calibri"/>
-              </a:rPr>
-              <a:t>e</a:t>
-            </a:r>
-            <a:endParaRPr lang="en-US" sz="2000" b="1" u="none" strike="noStrike">
+            <a:pPr indent="0" algn="ctr" defTabSz="457200">
+              <a:lnSpc>
+                <a:spcPct val="100000"/>
+              </a:lnSpc>
+              <a:buNone/>
+              <a:tabLst>
+                <a:tab pos="0" algn="l"/>
+              </a:tabLst>
+            </a:pPr>
+            <a:r>
+              <a:rPr lang="en-US" sz="4400" b="0" u="none" strike="noStrike">
+                <a:solidFill>
+                  <a:schemeClr val="dk1"/>
+                </a:solidFill>
+                <a:effectLst/>
+                <a:uFillTx/>
+                <a:latin typeface="Calibri"/>
+              </a:rPr>
+              <a:t>Click to edit Master title style</a:t>
+            </a:r>
+            <a:endParaRPr lang="en-US" sz="4400" b="0" u="none" strike="noStrike">
               <a:solidFill>
                 <a:schemeClr val="dk1"/>
               </a:solidFill>
@@ -7610,561 +8052,7 @@
       </p:sp>
       <p:sp>
         <p:nvSpPr>
-          <p:cNvPr id="30" name="PlaceHolder 2"/>
-          <p:cNvSpPr>
-            <a:spLocks noGrp="1"/>
-          </p:cNvSpPr>
-          <p:nvPr>
-            <p:ph type="body"/>
-          </p:nvPr>
-        </p:nvSpPr>
-        <p:spPr>
-          <a:xfrm>
-            <a:off x="1792440" y="612720"/>
-            <a:ext cx="5485320" cy="4113720"/>
-          </a:xfrm>
-          <a:prstGeom prst="rect">
-            <a:avLst/>
-          </a:prstGeom>
-          <a:noFill/>
-          <a:ln w="0">
-            <a:noFill/>
-          </a:ln>
-        </p:spPr>
-        <p:txBody>
-          <a:bodyPr lIns="90000" tIns="45000" rIns="90000" bIns="45000" anchor="t">
-            <a:noAutofit/>
-          </a:bodyPr>
-          <a:lstStyle>
-            <a:lvl1pPr algn="l" defTabSz="457200">
-              <a:lnSpc>
-                <a:spcPct val="100000"/>
-              </a:lnSpc>
-              <a:spcBef>
-                <a:spcPts val="281"/>
-              </a:spcBef>
-              <a:buClr>
-                <a:srgbClr val="000000"/>
-              </a:buClr>
-              <a:buFont typeface="Arial"/>
-              <a:buChar char="•"/>
-              <a:tabLst>
-                <a:tab pos="0" algn="l"/>
-              </a:tabLst>
-              <a:defRPr lang="en-US" sz="3200" b="0" u="none" strike="noStrike">
-                <a:solidFill>
-                  <a:schemeClr val="dk1"/>
-                </a:solidFill>
-                <a:effectLst/>
-                <a:uFillTx/>
-                <a:latin typeface="Calibri"/>
-              </a:defRPr>
-            </a:lvl1pPr>
-            <a:lvl2pPr lvl="1" algn="l" defTabSz="457200">
-              <a:lnSpc>
-                <a:spcPct val="100000"/>
-              </a:lnSpc>
-              <a:spcBef>
-                <a:spcPts val="561"/>
-              </a:spcBef>
-              <a:buClr>
-                <a:srgbClr val="000000"/>
-              </a:buClr>
-              <a:buSzPct val="75000"/>
-              <a:buFont typeface="Symbol" charset="2"/>
-              <a:buChar char=""/>
-              <a:tabLst>
-                <a:tab pos="0" algn="l"/>
-              </a:tabLst>
-              <a:defRPr lang="en-US" sz="3200" b="0" u="none" strike="noStrike">
-                <a:solidFill>
-                  <a:schemeClr val="dk1"/>
-                </a:solidFill>
-                <a:effectLst/>
-                <a:uFillTx/>
-                <a:latin typeface="Calibri"/>
-              </a:defRPr>
-            </a:lvl2pPr>
-            <a:lvl3pPr lvl="2" algn="l" defTabSz="457200">
-              <a:lnSpc>
-                <a:spcPct val="100000"/>
-              </a:lnSpc>
-              <a:spcBef>
-                <a:spcPts val="479"/>
-              </a:spcBef>
-              <a:buClr>
-                <a:srgbClr val="000000"/>
-              </a:buClr>
-              <a:buSzPct val="45000"/>
-              <a:buFont typeface="Wingdings" charset="2"/>
-              <a:buChar char=""/>
-              <a:tabLst>
-                <a:tab pos="0" algn="l"/>
-              </a:tabLst>
-              <a:defRPr lang="en-US" sz="3200" b="0" u="none" strike="noStrike">
-                <a:solidFill>
-                  <a:schemeClr val="dk1"/>
-                </a:solidFill>
-                <a:effectLst/>
-                <a:uFillTx/>
-                <a:latin typeface="Calibri"/>
-              </a:defRPr>
-            </a:lvl3pPr>
-            <a:lvl4pPr lvl="3" algn="l" defTabSz="457200">
-              <a:lnSpc>
-                <a:spcPct val="100000"/>
-              </a:lnSpc>
-              <a:spcBef>
-                <a:spcPts val="400"/>
-              </a:spcBef>
-              <a:buClr>
-                <a:srgbClr val="000000"/>
-              </a:buClr>
-              <a:buSzPct val="75000"/>
-              <a:buFont typeface="Symbol" charset="2"/>
-              <a:buChar char=""/>
-              <a:tabLst>
-                <a:tab pos="0" algn="l"/>
-              </a:tabLst>
-              <a:defRPr lang="en-US" sz="3200" b="0" u="none" strike="noStrike">
-                <a:solidFill>
-                  <a:schemeClr val="dk1"/>
-                </a:solidFill>
-                <a:effectLst/>
-                <a:uFillTx/>
-                <a:latin typeface="Calibri"/>
-              </a:defRPr>
-            </a:lvl4pPr>
-            <a:lvl5pPr lvl="4" algn="l" defTabSz="457200">
-              <a:lnSpc>
-                <a:spcPct val="100000"/>
-              </a:lnSpc>
-              <a:spcBef>
-                <a:spcPts val="400"/>
-              </a:spcBef>
-              <a:buClr>
-                <a:srgbClr val="000000"/>
-              </a:buClr>
-              <a:buSzPct val="45000"/>
-              <a:buFont typeface="Wingdings" charset="2"/>
-              <a:buChar char=""/>
-              <a:tabLst>
-                <a:tab pos="0" algn="l"/>
-              </a:tabLst>
-              <a:defRPr lang="en-US" sz="3200" b="0" u="none" strike="noStrike">
-                <a:solidFill>
-                  <a:schemeClr val="dk1"/>
-                </a:solidFill>
-                <a:effectLst/>
-                <a:uFillTx/>
-                <a:latin typeface="Calibri"/>
-              </a:defRPr>
-            </a:lvl5pPr>
-            <a:lvl6pPr lvl="5" algn="l" defTabSz="457200">
-              <a:lnSpc>
-                <a:spcPct val="100000"/>
-              </a:lnSpc>
-              <a:spcBef>
-                <a:spcPts val="283"/>
-              </a:spcBef>
-              <a:buClr>
-                <a:srgbClr val="000000"/>
-              </a:buClr>
-              <a:buSzPct val="45000"/>
-              <a:buFont typeface="Wingdings" charset="2"/>
-              <a:buChar char=""/>
-              <a:tabLst>
-                <a:tab pos="0" algn="l"/>
-              </a:tabLst>
-              <a:defRPr lang="en-US" sz="3200" b="0" u="none" strike="noStrike">
-                <a:solidFill>
-                  <a:schemeClr val="dk1"/>
-                </a:solidFill>
-                <a:effectLst/>
-                <a:uFillTx/>
-                <a:latin typeface="Calibri"/>
-              </a:defRPr>
-            </a:lvl6pPr>
-            <a:lvl7pPr lvl="6" algn="l" defTabSz="457200">
-              <a:lnSpc>
-                <a:spcPct val="100000"/>
-              </a:lnSpc>
-              <a:spcBef>
-                <a:spcPts val="283"/>
-              </a:spcBef>
-              <a:buClr>
-                <a:srgbClr val="000000"/>
-              </a:buClr>
-              <a:buSzPct val="45000"/>
-              <a:buFont typeface="Wingdings" charset="2"/>
-              <a:buChar char=""/>
-              <a:tabLst>
-                <a:tab pos="0" algn="l"/>
-              </a:tabLst>
-              <a:defRPr lang="en-US" sz="3200" b="0" u="none" strike="noStrike">
-                <a:solidFill>
-                  <a:schemeClr val="dk1"/>
-                </a:solidFill>
-                <a:effectLst/>
-                <a:uFillTx/>
-                <a:latin typeface="Calibri"/>
-              </a:defRPr>
-            </a:lvl7pPr>
-          </a:lstStyle>
-          <a:p>
-            <a:pPr marL="432000" indent="-324000" algn="l" defTabSz="457200">
-              <a:lnSpc>
-                <a:spcPct val="100000"/>
-              </a:lnSpc>
-              <a:spcBef>
-                <a:spcPts val="281"/>
-              </a:spcBef>
-              <a:buClr>
-                <a:srgbClr val="000000"/>
-              </a:buClr>
-              <a:buFont typeface="Arial"/>
-              <a:buChar char="•"/>
-              <a:tabLst>
-                <a:tab pos="0" algn="l"/>
-              </a:tabLst>
-            </a:pPr>
-            <a:r>
-              <a:rPr lang="en-US" sz="3200" b="0" u="none" strike="noStrike">
-                <a:solidFill>
-                  <a:schemeClr val="dk1"/>
-                </a:solidFill>
-                <a:effectLst/>
-                <a:uFillTx/>
-                <a:latin typeface="Calibri"/>
-              </a:rPr>
-              <a:t>Pulse para editar el formato de texto del esquema</a:t>
-            </a:r>
-            <a:endParaRPr lang="en-US" sz="3200" b="0" u="none" strike="noStrike">
-              <a:solidFill>
-                <a:schemeClr val="dk1"/>
-              </a:solidFill>
-              <a:effectLst/>
-              <a:uFillTx/>
-              <a:latin typeface="Calibri"/>
-            </a:endParaRPr>
-          </a:p>
-          <a:p>
-            <a:pPr marL="457200" lvl="1" indent="-324000" algn="l" defTabSz="457200">
-              <a:lnSpc>
-                <a:spcPct val="100000"/>
-              </a:lnSpc>
-              <a:spcBef>
-                <a:spcPts val="561"/>
-              </a:spcBef>
-              <a:buClr>
-                <a:srgbClr val="000000"/>
-              </a:buClr>
-              <a:buSzPct val="75000"/>
-              <a:buFont typeface="Symbol" charset="2"/>
-              <a:buChar char=""/>
-              <a:tabLst>
-                <a:tab pos="0" algn="l"/>
-              </a:tabLst>
-            </a:pPr>
-            <a:r>
-              <a:rPr lang="en-US" sz="3200" b="0" u="none" strike="noStrike">
-                <a:solidFill>
-                  <a:schemeClr val="dk1"/>
-                </a:solidFill>
-                <a:effectLst/>
-                <a:uFillTx/>
-                <a:latin typeface="Calibri"/>
-              </a:rPr>
-              <a:t>Segundo nivel del esquema</a:t>
-            </a:r>
-            <a:endParaRPr lang="en-US" sz="3200" b="0" u="none" strike="noStrike">
-              <a:solidFill>
-                <a:schemeClr val="dk1"/>
-              </a:solidFill>
-              <a:effectLst/>
-              <a:uFillTx/>
-              <a:latin typeface="Calibri"/>
-            </a:endParaRPr>
-          </a:p>
-          <a:p>
-            <a:pPr marL="914400" lvl="2" indent="-288000" algn="l" defTabSz="457200">
-              <a:lnSpc>
-                <a:spcPct val="100000"/>
-              </a:lnSpc>
-              <a:spcBef>
-                <a:spcPts val="479"/>
-              </a:spcBef>
-              <a:buClr>
-                <a:srgbClr val="000000"/>
-              </a:buClr>
-              <a:buSzPct val="45000"/>
-              <a:buFont typeface="Wingdings" charset="2"/>
-              <a:buChar char=""/>
-              <a:tabLst>
-                <a:tab pos="0" algn="l"/>
-              </a:tabLst>
-            </a:pPr>
-            <a:r>
-              <a:rPr lang="en-US" sz="3200" b="0" u="none" strike="noStrike">
-                <a:solidFill>
-                  <a:schemeClr val="dk1"/>
-                </a:solidFill>
-                <a:effectLst/>
-                <a:uFillTx/>
-                <a:latin typeface="Calibri"/>
-              </a:rPr>
-              <a:t>Tercer nivel del esquema</a:t>
-            </a:r>
-            <a:endParaRPr lang="en-US" sz="3200" b="0" u="none" strike="noStrike">
-              <a:solidFill>
-                <a:schemeClr val="dk1"/>
-              </a:solidFill>
-              <a:effectLst/>
-              <a:uFillTx/>
-              <a:latin typeface="Calibri"/>
-            </a:endParaRPr>
-          </a:p>
-          <a:p>
-            <a:pPr marL="1371600" lvl="3" indent="-216000" algn="l" defTabSz="457200">
-              <a:lnSpc>
-                <a:spcPct val="100000"/>
-              </a:lnSpc>
-              <a:spcBef>
-                <a:spcPts val="400"/>
-              </a:spcBef>
-              <a:buClr>
-                <a:srgbClr val="000000"/>
-              </a:buClr>
-              <a:buSzPct val="75000"/>
-              <a:buFont typeface="Symbol" charset="2"/>
-              <a:buChar char=""/>
-              <a:tabLst>
-                <a:tab pos="0" algn="l"/>
-              </a:tabLst>
-            </a:pPr>
-            <a:r>
-              <a:rPr lang="en-US" sz="3200" b="0" u="none" strike="noStrike">
-                <a:solidFill>
-                  <a:schemeClr val="dk1"/>
-                </a:solidFill>
-                <a:effectLst/>
-                <a:uFillTx/>
-                <a:latin typeface="Calibri"/>
-              </a:rPr>
-              <a:t>Cuarto nivel del esquema</a:t>
-            </a:r>
-            <a:endParaRPr lang="en-US" sz="3200" b="0" u="none" strike="noStrike">
-              <a:solidFill>
-                <a:schemeClr val="dk1"/>
-              </a:solidFill>
-              <a:effectLst/>
-              <a:uFillTx/>
-              <a:latin typeface="Calibri"/>
-            </a:endParaRPr>
-          </a:p>
-          <a:p>
-            <a:pPr marL="1828800" lvl="4" indent="-216000" algn="l" defTabSz="457200">
-              <a:lnSpc>
-                <a:spcPct val="100000"/>
-              </a:lnSpc>
-              <a:spcBef>
-                <a:spcPts val="400"/>
-              </a:spcBef>
-              <a:buClr>
-                <a:srgbClr val="000000"/>
-              </a:buClr>
-              <a:buSzPct val="45000"/>
-              <a:buFont typeface="Wingdings" charset="2"/>
-              <a:buChar char=""/>
-              <a:tabLst>
-                <a:tab pos="0" algn="l"/>
-              </a:tabLst>
-            </a:pPr>
-            <a:r>
-              <a:rPr lang="en-US" sz="3200" b="0" u="none" strike="noStrike">
-                <a:solidFill>
-                  <a:schemeClr val="dk1"/>
-                </a:solidFill>
-                <a:effectLst/>
-                <a:uFillTx/>
-                <a:latin typeface="Calibri"/>
-              </a:rPr>
-              <a:t>Quinto nivel del esquema</a:t>
-            </a:r>
-            <a:endParaRPr lang="en-US" sz="3200" b="0" u="none" strike="noStrike">
-              <a:solidFill>
-                <a:schemeClr val="dk1"/>
-              </a:solidFill>
-              <a:effectLst/>
-              <a:uFillTx/>
-              <a:latin typeface="Calibri"/>
-            </a:endParaRPr>
-          </a:p>
-          <a:p>
-            <a:pPr marL="2286000" lvl="5" indent="-216000" algn="l" defTabSz="457200">
-              <a:lnSpc>
-                <a:spcPct val="100000"/>
-              </a:lnSpc>
-              <a:spcBef>
-                <a:spcPts val="283"/>
-              </a:spcBef>
-              <a:buClr>
-                <a:srgbClr val="000000"/>
-              </a:buClr>
-              <a:buSzPct val="45000"/>
-              <a:buFont typeface="Wingdings" charset="2"/>
-              <a:buChar char=""/>
-              <a:tabLst>
-                <a:tab pos="0" algn="l"/>
-              </a:tabLst>
-            </a:pPr>
-            <a:r>
-              <a:rPr lang="en-US" sz="3200" b="0" u="none" strike="noStrike">
-                <a:solidFill>
-                  <a:schemeClr val="dk1"/>
-                </a:solidFill>
-                <a:effectLst/>
-                <a:uFillTx/>
-                <a:latin typeface="Calibri"/>
-              </a:rPr>
-              <a:t>Sexto nivel del esquema</a:t>
-            </a:r>
-            <a:endParaRPr lang="en-US" sz="3200" b="0" u="none" strike="noStrike">
-              <a:solidFill>
-                <a:schemeClr val="dk1"/>
-              </a:solidFill>
-              <a:effectLst/>
-              <a:uFillTx/>
-              <a:latin typeface="Calibri"/>
-            </a:endParaRPr>
-          </a:p>
-          <a:p>
-            <a:pPr marL="2743200" lvl="6" indent="-216000" algn="l" defTabSz="457200">
-              <a:lnSpc>
-                <a:spcPct val="100000"/>
-              </a:lnSpc>
-              <a:spcBef>
-                <a:spcPts val="283"/>
-              </a:spcBef>
-              <a:buClr>
-                <a:srgbClr val="000000"/>
-              </a:buClr>
-              <a:buSzPct val="45000"/>
-              <a:buFont typeface="Wingdings" charset="2"/>
-              <a:buChar char=""/>
-              <a:tabLst>
-                <a:tab pos="0" algn="l"/>
-              </a:tabLst>
-            </a:pPr>
-            <a:r>
-              <a:rPr lang="en-US" sz="3200" b="0" u="none" strike="noStrike">
-                <a:solidFill>
-                  <a:schemeClr val="dk1"/>
-                </a:solidFill>
-                <a:effectLst/>
-                <a:uFillTx/>
-                <a:latin typeface="Calibri"/>
-              </a:rPr>
-              <a:t>Séptimo nivel del esquema</a:t>
-            </a:r>
-            <a:endParaRPr lang="en-US" sz="3200" b="0" u="none" strike="noStrike">
-              <a:solidFill>
-                <a:schemeClr val="dk1"/>
-              </a:solidFill>
-              <a:effectLst/>
-              <a:uFillTx/>
-              <a:latin typeface="Calibri"/>
-            </a:endParaRPr>
-          </a:p>
-        </p:txBody>
-      </p:sp>
-      <p:sp>
-        <p:nvSpPr>
-          <p:cNvPr id="31" name="PlaceHolder 3"/>
-          <p:cNvSpPr>
-            <a:spLocks noGrp="1"/>
-          </p:cNvSpPr>
-          <p:nvPr>
-            <p:ph type="body"/>
-          </p:nvPr>
-        </p:nvSpPr>
-        <p:spPr>
-          <a:xfrm>
-            <a:off x="1792440" y="5367240"/>
-            <a:ext cx="5485320" cy="803880"/>
-          </a:xfrm>
-          <a:prstGeom prst="rect">
-            <a:avLst/>
-          </a:prstGeom>
-          <a:noFill/>
-          <a:ln w="0">
-            <a:noFill/>
-          </a:ln>
-        </p:spPr>
-        <p:txBody>
-          <a:bodyPr lIns="91440" tIns="45720" rIns="91440" bIns="45720" anchor="t">
-            <a:noAutofit/>
-          </a:bodyPr>
-          <a:lstStyle>
-            <a:lvl1pPr indent="0" algn="l" defTabSz="457200">
-              <a:lnSpc>
-                <a:spcPct val="100000"/>
-              </a:lnSpc>
-              <a:spcBef>
-                <a:spcPts val="281"/>
-              </a:spcBef>
-              <a:buNone/>
-              <a:tabLst>
-                <a:tab pos="0" algn="l"/>
-              </a:tabLst>
-              <a:defRPr lang="en-US" sz="1400" b="0" u="none" strike="noStrike">
-                <a:solidFill>
-                  <a:schemeClr val="dk1"/>
-                </a:solidFill>
-                <a:effectLst/>
-                <a:uFillTx/>
-                <a:latin typeface="Calibri"/>
-              </a:defRPr>
-            </a:lvl1pPr>
-          </a:lstStyle>
-          <a:p>
-            <a:pPr indent="0" algn="l" defTabSz="457200">
-              <a:lnSpc>
-                <a:spcPct val="100000"/>
-              </a:lnSpc>
-              <a:spcBef>
-                <a:spcPts val="281"/>
-              </a:spcBef>
-              <a:buNone/>
-              <a:tabLst>
-                <a:tab pos="0" algn="l"/>
-              </a:tabLst>
-            </a:pPr>
-            <a:r>
-              <a:rPr lang="en-US" sz="1400" b="0" u="none" strike="noStrike">
-                <a:solidFill>
-                  <a:schemeClr val="dk1"/>
-                </a:solidFill>
-                <a:effectLst/>
-                <a:uFillTx/>
-                <a:latin typeface="Calibri"/>
-              </a:rPr>
-              <a:t>Click to edit Master text styles</a:t>
-            </a:r>
-            <a:endParaRPr lang="en-US" sz="1400" b="0" u="none" strike="noStrike">
-              <a:solidFill>
-                <a:schemeClr val="dk1"/>
-              </a:solidFill>
-              <a:effectLst/>
-              <a:uFillTx/>
-              <a:latin typeface="Calibri"/>
-            </a:endParaRPr>
-          </a:p>
-        </p:txBody>
-      </p:sp>
-      <p:sp>
-        <p:nvSpPr>
-          <p:cNvPr id="32" name="PlaceHolder 4"/>
+          <p:cNvPr id="32" name="PlaceHolder 2"/>
           <p:cNvSpPr>
             <a:spLocks noGrp="1"/>
           </p:cNvSpPr>
@@ -8175,7 +8063,7 @@
         <p:spPr>
           <a:xfrm>
             <a:off x="457200" y="6356520"/>
-            <a:ext cx="2132640" cy="363960"/>
+            <a:ext cx="2132280" cy="363600"/>
           </a:xfrm>
           <a:prstGeom prst="rect">
             <a:avLst/>
@@ -8231,7 +8119,7 @@
                 <a:uFillTx/>
                 <a:latin typeface="Calibri"/>
               </a:rPr>
-              <a:t>&lt;fecha/hora&gt;</a:t>
+              <a:t> </a:t>
             </a:r>
             <a:endParaRPr lang="es-CO" sz="1200" b="0" u="none" strike="noStrike">
               <a:solidFill>
@@ -8246,7 +8134,7 @@
       </p:sp>
       <p:sp>
         <p:nvSpPr>
-          <p:cNvPr id="33" name="PlaceHolder 5"/>
+          <p:cNvPr id="33" name="PlaceHolder 3"/>
           <p:cNvSpPr>
             <a:spLocks noGrp="1"/>
           </p:cNvSpPr>
@@ -8257,7 +8145,7 @@
         <p:spPr>
           <a:xfrm>
             <a:off x="3124080" y="6356520"/>
-            <a:ext cx="2894400" cy="363960"/>
+            <a:ext cx="2894040" cy="363600"/>
           </a:xfrm>
           <a:prstGeom prst="rect">
             <a:avLst/>
@@ -8309,7 +8197,7 @@
                 <a:uFillTx/>
                 <a:latin typeface="Times New Roman"/>
               </a:rPr>
-              <a:t>&lt;pie de página&gt;</a:t>
+              <a:t> </a:t>
             </a:r>
             <a:endParaRPr lang="es-CO" sz="1400" b="0" u="none" strike="noStrike">
               <a:solidFill>
@@ -8324,7 +8212,7 @@
       </p:sp>
       <p:sp>
         <p:nvSpPr>
-          <p:cNvPr id="34" name="PlaceHolder 6"/>
+          <p:cNvPr id="34" name="PlaceHolder 4"/>
           <p:cNvSpPr>
             <a:spLocks noGrp="1"/>
           </p:cNvSpPr>
@@ -8335,7 +8223,7 @@
         <p:spPr>
           <a:xfrm>
             <a:off x="6553080" y="6356520"/>
-            <a:ext cx="2132640" cy="363960"/>
+            <a:ext cx="2132280" cy="363600"/>
           </a:xfrm>
           <a:prstGeom prst="rect">
             <a:avLst/>
@@ -8380,7 +8268,7 @@
                 <a:tab pos="0" algn="l"/>
               </a:tabLst>
             </a:pPr>
-            <a:fld id="{3E4208DB-3602-45D1-A959-DE29C065B73E}" type="slidenum">
+            <a:fld id="{7C25AB9B-80F0-4831-AB3A-313825FBC7D3}" type="slidenum">
               <a:rPr lang="en-US" sz="1200" b="0" u="none" strike="noStrike">
                 <a:solidFill>
                   <a:schemeClr val="dk1">
@@ -8391,7 +8279,7 @@
                 <a:uFillTx/>
                 <a:latin typeface="Calibri"/>
               </a:rPr>
-              <a:t>&lt;número&gt;</a:t>
+              <a:t>8</a:t>
             </a:fld>
             <a:endParaRPr lang="es-CO" sz="1200" b="0" u="none" strike="noStrike">
               <a:solidFill>
@@ -8410,8 +8298,8 @@
 </file>
 
 <file path=ppt/slideLayouts/slideLayout7.xml><?xml version="1.0" encoding="utf-8"?>
-<p:sldLayout xmlns:a="http://schemas.openxmlformats.org/drawingml/2006/main" xmlns:p="http://schemas.openxmlformats.org/presentationml/2006/main" xmlns:r="http://schemas.openxmlformats.org/officeDocument/2006/relationships" xmlns:p14="http://schemas.microsoft.com/office/powerpoint/2010/main" xmlns:p15="http://schemas.microsoft.com/office/powerpoint/2012/main" xmlns:mc="http://schemas.openxmlformats.org/markup-compatibility/2006" type="title" preserve="1">
-  <p:cSld name="Title Slide">
+<p:sldLayout xmlns:a="http://schemas.openxmlformats.org/drawingml/2006/main" xmlns:p="http://schemas.openxmlformats.org/presentationml/2006/main" xmlns:r="http://schemas.openxmlformats.org/officeDocument/2006/relationships" xmlns:p14="http://schemas.microsoft.com/office/powerpoint/2010/main" xmlns:p15="http://schemas.microsoft.com/office/powerpoint/2012/main" xmlns:mc="http://schemas.openxmlformats.org/markup-compatibility/2006" type="blank" preserve="1">
+  <p:cSld name="Blank">
     <p:bg>
       <p:bgPr>
         <a:solidFill>
@@ -8440,333 +8328,13 @@
             <a:spLocks noGrp="1"/>
           </p:cNvSpPr>
           <p:nvPr>
-            <p:ph type="title"/>
-          </p:nvPr>
-        </p:nvSpPr>
-        <p:spPr>
-          <a:xfrm>
-            <a:off x="685800" y="2130480"/>
-            <a:ext cx="7771320" cy="1468800"/>
-          </a:xfrm>
-          <a:prstGeom prst="rect">
-            <a:avLst/>
-          </a:prstGeom>
-          <a:noFill/>
-          <a:ln w="0">
-            <a:noFill/>
-          </a:ln>
-        </p:spPr>
-        <p:txBody>
-          <a:bodyPr lIns="91440" tIns="45720" rIns="91440" bIns="45720" anchor="ctr">
-            <a:noAutofit/>
-          </a:bodyPr>
-          <a:lstStyle>
-            <a:lvl1pPr indent="0" algn="ctr" defTabSz="457200">
-              <a:lnSpc>
-                <a:spcPct val="100000"/>
-              </a:lnSpc>
-              <a:buNone/>
-              <a:tabLst>
-                <a:tab pos="0" algn="l"/>
-              </a:tabLst>
-              <a:defRPr lang="en-US" sz="4400" b="0" u="none" strike="noStrike">
-                <a:solidFill>
-                  <a:schemeClr val="dk1"/>
-                </a:solidFill>
-                <a:effectLst/>
-                <a:uFillTx/>
-                <a:latin typeface="Calibri"/>
-              </a:defRPr>
-            </a:lvl1pPr>
-          </a:lstStyle>
-          <a:p>
-            <a:pPr indent="0" algn="ctr" defTabSz="457200">
-              <a:lnSpc>
-                <a:spcPct val="100000"/>
-              </a:lnSpc>
-              <a:buNone/>
-              <a:tabLst>
-                <a:tab pos="0" algn="l"/>
-              </a:tabLst>
-            </a:pPr>
-            <a:r>
-              <a:rPr lang="en-US" sz="4400" b="0" u="none" strike="noStrike">
-                <a:solidFill>
-                  <a:schemeClr val="dk1"/>
-                </a:solidFill>
-                <a:effectLst/>
-                <a:uFillTx/>
-                <a:latin typeface="Calibri"/>
-              </a:rPr>
-              <a:t>C</a:t>
-            </a:r>
-            <a:r>
-              <a:rPr lang="en-US" sz="4400" b="0" u="none" strike="noStrike">
-                <a:solidFill>
-                  <a:schemeClr val="dk1"/>
-                </a:solidFill>
-                <a:effectLst/>
-                <a:uFillTx/>
-                <a:latin typeface="Calibri"/>
-              </a:rPr>
-              <a:t>li</a:t>
-            </a:r>
-            <a:r>
-              <a:rPr lang="en-US" sz="4400" b="0" u="none" strike="noStrike">
-                <a:solidFill>
-                  <a:schemeClr val="dk1"/>
-                </a:solidFill>
-                <a:effectLst/>
-                <a:uFillTx/>
-                <a:latin typeface="Calibri"/>
-              </a:rPr>
-              <a:t>c</a:t>
-            </a:r>
-            <a:r>
-              <a:rPr lang="en-US" sz="4400" b="0" u="none" strike="noStrike">
-                <a:solidFill>
-                  <a:schemeClr val="dk1"/>
-                </a:solidFill>
-                <a:effectLst/>
-                <a:uFillTx/>
-                <a:latin typeface="Calibri"/>
-              </a:rPr>
-              <a:t>k </a:t>
-            </a:r>
-            <a:r>
-              <a:rPr lang="en-US" sz="4400" b="0" u="none" strike="noStrike">
-                <a:solidFill>
-                  <a:schemeClr val="dk1"/>
-                </a:solidFill>
-                <a:effectLst/>
-                <a:uFillTx/>
-                <a:latin typeface="Calibri"/>
-              </a:rPr>
-              <a:t>t</a:t>
-            </a:r>
-            <a:r>
-              <a:rPr lang="en-US" sz="4400" b="0" u="none" strike="noStrike">
-                <a:solidFill>
-                  <a:schemeClr val="dk1"/>
-                </a:solidFill>
-                <a:effectLst/>
-                <a:uFillTx/>
-                <a:latin typeface="Calibri"/>
-              </a:rPr>
-              <a:t>o </a:t>
-            </a:r>
-            <a:r>
-              <a:rPr lang="en-US" sz="4400" b="0" u="none" strike="noStrike">
-                <a:solidFill>
-                  <a:schemeClr val="dk1"/>
-                </a:solidFill>
-                <a:effectLst/>
-                <a:uFillTx/>
-                <a:latin typeface="Calibri"/>
-              </a:rPr>
-              <a:t>e</a:t>
-            </a:r>
-            <a:r>
-              <a:rPr lang="en-US" sz="4400" b="0" u="none" strike="noStrike">
-                <a:solidFill>
-                  <a:schemeClr val="dk1"/>
-                </a:solidFill>
-                <a:effectLst/>
-                <a:uFillTx/>
-                <a:latin typeface="Calibri"/>
-              </a:rPr>
-              <a:t>d</a:t>
-            </a:r>
-            <a:r>
-              <a:rPr lang="en-US" sz="4400" b="0" u="none" strike="noStrike">
-                <a:solidFill>
-                  <a:schemeClr val="dk1"/>
-                </a:solidFill>
-                <a:effectLst/>
-                <a:uFillTx/>
-                <a:latin typeface="Calibri"/>
-              </a:rPr>
-              <a:t>it </a:t>
-            </a:r>
-            <a:r>
-              <a:rPr lang="en-US" sz="4400" b="0" u="none" strike="noStrike">
-                <a:solidFill>
-                  <a:schemeClr val="dk1"/>
-                </a:solidFill>
-                <a:effectLst/>
-                <a:uFillTx/>
-                <a:latin typeface="Calibri"/>
-              </a:rPr>
-              <a:t>M</a:t>
-            </a:r>
-            <a:r>
-              <a:rPr lang="en-US" sz="4400" b="0" u="none" strike="noStrike">
-                <a:solidFill>
-                  <a:schemeClr val="dk1"/>
-                </a:solidFill>
-                <a:effectLst/>
-                <a:uFillTx/>
-                <a:latin typeface="Calibri"/>
-              </a:rPr>
-              <a:t>a</a:t>
-            </a:r>
-            <a:r>
-              <a:rPr lang="en-US" sz="4400" b="0" u="none" strike="noStrike">
-                <a:solidFill>
-                  <a:schemeClr val="dk1"/>
-                </a:solidFill>
-                <a:effectLst/>
-                <a:uFillTx/>
-                <a:latin typeface="Calibri"/>
-              </a:rPr>
-              <a:t>s</a:t>
-            </a:r>
-            <a:r>
-              <a:rPr lang="en-US" sz="4400" b="0" u="none" strike="noStrike">
-                <a:solidFill>
-                  <a:schemeClr val="dk1"/>
-                </a:solidFill>
-                <a:effectLst/>
-                <a:uFillTx/>
-                <a:latin typeface="Calibri"/>
-              </a:rPr>
-              <a:t>t</a:t>
-            </a:r>
-            <a:r>
-              <a:rPr lang="en-US" sz="4400" b="0" u="none" strike="noStrike">
-                <a:solidFill>
-                  <a:schemeClr val="dk1"/>
-                </a:solidFill>
-                <a:effectLst/>
-                <a:uFillTx/>
-                <a:latin typeface="Calibri"/>
-              </a:rPr>
-              <a:t>e</a:t>
-            </a:r>
-            <a:r>
-              <a:rPr lang="en-US" sz="4400" b="0" u="none" strike="noStrike">
-                <a:solidFill>
-                  <a:schemeClr val="dk1"/>
-                </a:solidFill>
-                <a:effectLst/>
-                <a:uFillTx/>
-                <a:latin typeface="Calibri"/>
-              </a:rPr>
-              <a:t>r </a:t>
-            </a:r>
-            <a:r>
-              <a:rPr lang="en-US" sz="4400" b="0" u="none" strike="noStrike">
-                <a:solidFill>
-                  <a:schemeClr val="dk1"/>
-                </a:solidFill>
-                <a:effectLst/>
-                <a:uFillTx/>
-                <a:latin typeface="Calibri"/>
-              </a:rPr>
-              <a:t>ti</a:t>
-            </a:r>
-            <a:r>
-              <a:rPr lang="en-US" sz="4400" b="0" u="none" strike="noStrike">
-                <a:solidFill>
-                  <a:schemeClr val="dk1"/>
-                </a:solidFill>
-                <a:effectLst/>
-                <a:uFillTx/>
-                <a:latin typeface="Calibri"/>
-              </a:rPr>
-              <a:t>tl</a:t>
-            </a:r>
-            <a:r>
-              <a:rPr lang="en-US" sz="4400" b="0" u="none" strike="noStrike">
-                <a:solidFill>
-                  <a:schemeClr val="dk1"/>
-                </a:solidFill>
-                <a:effectLst/>
-                <a:uFillTx/>
-                <a:latin typeface="Calibri"/>
-              </a:rPr>
-              <a:t>e </a:t>
-            </a:r>
-            <a:r>
-              <a:rPr lang="en-US" sz="4400" b="0" u="none" strike="noStrike">
-                <a:solidFill>
-                  <a:schemeClr val="dk1"/>
-                </a:solidFill>
-                <a:effectLst/>
-                <a:uFillTx/>
-                <a:latin typeface="Calibri"/>
-              </a:rPr>
-              <a:t>s</a:t>
-            </a:r>
-            <a:r>
-              <a:rPr lang="en-US" sz="4400" b="0" u="none" strike="noStrike">
-                <a:solidFill>
-                  <a:schemeClr val="dk1"/>
-                </a:solidFill>
-                <a:effectLst/>
-                <a:uFillTx/>
-                <a:latin typeface="Calibri"/>
-              </a:rPr>
-              <a:t>t</a:t>
-            </a:r>
-            <a:r>
-              <a:rPr lang="en-US" sz="4400" b="0" u="none" strike="noStrike">
-                <a:solidFill>
-                  <a:schemeClr val="dk1"/>
-                </a:solidFill>
-                <a:effectLst/>
-                <a:uFillTx/>
-                <a:latin typeface="Calibri"/>
-              </a:rPr>
-              <a:t>y</a:t>
-            </a:r>
-            <a:r>
-              <a:rPr lang="en-US" sz="4400" b="0" u="none" strike="noStrike">
-                <a:solidFill>
-                  <a:schemeClr val="dk1"/>
-                </a:solidFill>
-                <a:effectLst/>
-                <a:uFillTx/>
-                <a:latin typeface="Calibri"/>
-              </a:rPr>
-              <a:t>l</a:t>
-            </a:r>
-            <a:r>
-              <a:rPr lang="en-US" sz="4400" b="0" u="none" strike="noStrike">
-                <a:solidFill>
-                  <a:schemeClr val="dk1"/>
-                </a:solidFill>
-                <a:effectLst/>
-                <a:uFillTx/>
-                <a:latin typeface="Calibri"/>
-              </a:rPr>
-              <a:t>e</a:t>
-            </a:r>
-            <a:endParaRPr lang="en-US" sz="4400" b="0" u="none" strike="noStrike">
-              <a:solidFill>
-                <a:schemeClr val="dk1"/>
-              </a:solidFill>
-              <a:effectLst/>
-              <a:uFillTx/>
-              <a:latin typeface="Calibri"/>
-            </a:endParaRPr>
-          </a:p>
-        </p:txBody>
-      </p:sp>
-      <p:sp>
-        <p:nvSpPr>
-          <p:cNvPr id="36" name="PlaceHolder 2"/>
-          <p:cNvSpPr>
-            <a:spLocks noGrp="1"/>
-          </p:cNvSpPr>
-          <p:nvPr>
             <p:ph type="dt" idx="19"/>
           </p:nvPr>
         </p:nvSpPr>
         <p:spPr>
           <a:xfrm>
             <a:off x="457200" y="6356520"/>
-            <a:ext cx="2132640" cy="363960"/>
+            <a:ext cx="2132280" cy="363600"/>
           </a:xfrm>
           <a:prstGeom prst="rect">
             <a:avLst/>
@@ -8822,7 +8390,7 @@
                 <a:uFillTx/>
                 <a:latin typeface="Calibri"/>
               </a:rPr>
-              <a:t>&lt;fecha/hora&gt;</a:t>
+              <a:t> </a:t>
             </a:r>
             <a:endParaRPr lang="es-CO" sz="1200" b="0" u="none" strike="noStrike">
               <a:solidFill>
@@ -8837,7 +8405,7 @@
       </p:sp>
       <p:sp>
         <p:nvSpPr>
-          <p:cNvPr id="37" name="PlaceHolder 3"/>
+          <p:cNvPr id="36" name="PlaceHolder 2"/>
           <p:cNvSpPr>
             <a:spLocks noGrp="1"/>
           </p:cNvSpPr>
@@ -8848,7 +8416,7 @@
         <p:spPr>
           <a:xfrm>
             <a:off x="3124080" y="6356520"/>
-            <a:ext cx="2894400" cy="363960"/>
+            <a:ext cx="2894040" cy="363600"/>
           </a:xfrm>
           <a:prstGeom prst="rect">
             <a:avLst/>
@@ -8900,7 +8468,7 @@
                 <a:uFillTx/>
                 <a:latin typeface="Times New Roman"/>
               </a:rPr>
-              <a:t>&lt;pie de página&gt;</a:t>
+              <a:t> </a:t>
             </a:r>
             <a:endParaRPr lang="es-CO" sz="1400" b="0" u="none" strike="noStrike">
               <a:solidFill>
@@ -8915,7 +8483,7 @@
       </p:sp>
       <p:sp>
         <p:nvSpPr>
-          <p:cNvPr id="38" name="PlaceHolder 4"/>
+          <p:cNvPr id="37" name="PlaceHolder 3"/>
           <p:cNvSpPr>
             <a:spLocks noGrp="1"/>
           </p:cNvSpPr>
@@ -8926,7 +8494,7 @@
         <p:spPr>
           <a:xfrm>
             <a:off x="6553080" y="6356520"/>
-            <a:ext cx="2132640" cy="363960"/>
+            <a:ext cx="2132280" cy="363600"/>
           </a:xfrm>
           <a:prstGeom prst="rect">
             <a:avLst/>
@@ -8971,7 +8539,7 @@
                 <a:tab pos="0" algn="l"/>
               </a:tabLst>
             </a:pPr>
-            <a:fld id="{F351F786-284E-4D56-A502-ECCFB8BBB941}" type="slidenum">
+            <a:fld id="{74E32DE2-997E-4574-BBBA-6A719301D086}" type="slidenum">
               <a:rPr lang="en-US" sz="1200" b="0" u="none" strike="noStrike">
                 <a:solidFill>
                   <a:schemeClr val="dk1">
@@ -8982,7 +8550,7 @@
                 <a:uFillTx/>
                 <a:latin typeface="Calibri"/>
               </a:rPr>
-              <a:t>&lt;número&gt;</a:t>
+              <a:t>8</a:t>
             </a:fld>
             <a:endParaRPr lang="es-CO" sz="1200" b="0" u="none" strike="noStrike">
               <a:solidFill>
@@ -8991,434 +8559,6 @@
               <a:effectLst/>
               <a:uFillTx/>
               <a:latin typeface="Times New Roman"/>
-            </a:endParaRPr>
-          </a:p>
-        </p:txBody>
-      </p:sp>
-      <p:sp>
-        <p:nvSpPr>
-          <p:cNvPr id="39" name="PlaceHolder 5"/>
-          <p:cNvSpPr>
-            <a:spLocks noGrp="1"/>
-          </p:cNvSpPr>
-          <p:nvPr>
-            <p:ph type="body"/>
-          </p:nvPr>
-        </p:nvSpPr>
-        <p:spPr>
-          <a:xfrm>
-            <a:off x="457200" y="1604520"/>
-            <a:ext cx="8228520" cy="3976560"/>
-          </a:xfrm>
-          <a:prstGeom prst="rect">
-            <a:avLst/>
-          </a:prstGeom>
-          <a:noFill/>
-          <a:ln w="0">
-            <a:noFill/>
-          </a:ln>
-        </p:spPr>
-        <p:txBody>
-          <a:bodyPr lIns="0" tIns="0" rIns="0" bIns="0" anchor="t">
-            <a:normAutofit/>
-          </a:bodyPr>
-          <a:lstStyle>
-            <a:lvl1pPr algn="l" defTabSz="457200">
-              <a:lnSpc>
-                <a:spcPct val="100000"/>
-              </a:lnSpc>
-              <a:spcBef>
-                <a:spcPts val="641"/>
-              </a:spcBef>
-              <a:buClr>
-                <a:srgbClr val="000000"/>
-              </a:buClr>
-              <a:buFont typeface="Arial"/>
-              <a:buChar char="•"/>
-              <a:defRPr lang="en-US" sz="3200" b="0" u="none" strike="noStrike">
-                <a:solidFill>
-                  <a:schemeClr val="dk1"/>
-                </a:solidFill>
-                <a:effectLst/>
-                <a:uFillTx/>
-                <a:latin typeface="Calibri"/>
-              </a:defRPr>
-            </a:lvl1pPr>
-            <a:lvl2pPr lvl="1" algn="l" defTabSz="457200">
-              <a:lnSpc>
-                <a:spcPct val="100000"/>
-              </a:lnSpc>
-              <a:spcBef>
-                <a:spcPts val="561"/>
-              </a:spcBef>
-              <a:buClr>
-                <a:srgbClr val="000000"/>
-              </a:buClr>
-              <a:buSzPct val="75000"/>
-              <a:buFont typeface="Symbol" charset="2"/>
-              <a:buChar char=""/>
-              <a:defRPr lang="en-US" sz="2800" b="0" u="none" strike="noStrike">
-                <a:solidFill>
-                  <a:schemeClr val="dk1"/>
-                </a:solidFill>
-                <a:effectLst/>
-                <a:uFillTx/>
-                <a:latin typeface="Calibri"/>
-              </a:defRPr>
-            </a:lvl2pPr>
-            <a:lvl3pPr lvl="2" algn="l" defTabSz="457200">
-              <a:lnSpc>
-                <a:spcPct val="100000"/>
-              </a:lnSpc>
-              <a:spcBef>
-                <a:spcPts val="479"/>
-              </a:spcBef>
-              <a:buClr>
-                <a:srgbClr val="000000"/>
-              </a:buClr>
-              <a:buSzPct val="45000"/>
-              <a:buFont typeface="Wingdings" charset="2"/>
-              <a:buChar char=""/>
-              <a:defRPr lang="en-US" sz="2400" b="0" u="none" strike="noStrike">
-                <a:solidFill>
-                  <a:schemeClr val="dk1"/>
-                </a:solidFill>
-                <a:effectLst/>
-                <a:uFillTx/>
-                <a:latin typeface="Calibri"/>
-              </a:defRPr>
-            </a:lvl3pPr>
-            <a:lvl4pPr lvl="3" algn="l" defTabSz="457200">
-              <a:lnSpc>
-                <a:spcPct val="100000"/>
-              </a:lnSpc>
-              <a:spcBef>
-                <a:spcPts val="400"/>
-              </a:spcBef>
-              <a:buClr>
-                <a:srgbClr val="000000"/>
-              </a:buClr>
-              <a:buSzPct val="75000"/>
-              <a:buFont typeface="Symbol" charset="2"/>
-              <a:buChar char=""/>
-              <a:defRPr lang="en-US" sz="2000" b="0" u="none" strike="noStrike">
-                <a:solidFill>
-                  <a:schemeClr val="dk1"/>
-                </a:solidFill>
-                <a:effectLst/>
-                <a:uFillTx/>
-                <a:latin typeface="Calibri"/>
-              </a:defRPr>
-            </a:lvl4pPr>
-            <a:lvl5pPr lvl="4" algn="l" defTabSz="457200">
-              <a:lnSpc>
-                <a:spcPct val="100000"/>
-              </a:lnSpc>
-              <a:spcBef>
-                <a:spcPts val="400"/>
-              </a:spcBef>
-              <a:buClr>
-                <a:srgbClr val="000000"/>
-              </a:buClr>
-              <a:buSzPct val="45000"/>
-              <a:buFont typeface="Wingdings" charset="2"/>
-              <a:buChar char=""/>
-              <a:defRPr lang="en-US" sz="2000" b="0" u="none" strike="noStrike">
-                <a:solidFill>
-                  <a:schemeClr val="dk1"/>
-                </a:solidFill>
-                <a:effectLst/>
-                <a:uFillTx/>
-                <a:latin typeface="Calibri"/>
-              </a:defRPr>
-            </a:lvl5pPr>
-            <a:lvl6pPr lvl="5" algn="l" defTabSz="457200">
-              <a:lnSpc>
-                <a:spcPct val="100000"/>
-              </a:lnSpc>
-              <a:spcBef>
-                <a:spcPts val="283"/>
-              </a:spcBef>
-              <a:buClr>
-                <a:srgbClr val="000000"/>
-              </a:buClr>
-              <a:buSzPct val="45000"/>
-              <a:buFont typeface="Wingdings" charset="2"/>
-              <a:buChar char=""/>
-              <a:defRPr lang="en-US" sz="2000" b="0" u="none" strike="noStrike">
-                <a:solidFill>
-                  <a:schemeClr val="dk1"/>
-                </a:solidFill>
-                <a:effectLst/>
-                <a:uFillTx/>
-                <a:latin typeface="Calibri"/>
-              </a:defRPr>
-            </a:lvl6pPr>
-            <a:lvl7pPr lvl="6" algn="l" defTabSz="457200">
-              <a:lnSpc>
-                <a:spcPct val="100000"/>
-              </a:lnSpc>
-              <a:spcBef>
-                <a:spcPts val="283"/>
-              </a:spcBef>
-              <a:buClr>
-                <a:srgbClr val="000000"/>
-              </a:buClr>
-              <a:buSzPct val="45000"/>
-              <a:buFont typeface="Wingdings" charset="2"/>
-              <a:buChar char=""/>
-              <a:defRPr lang="en-US" sz="2000" b="0" u="none" strike="noStrike">
-                <a:solidFill>
-                  <a:schemeClr val="dk1"/>
-                </a:solidFill>
-                <a:effectLst/>
-                <a:uFillTx/>
-                <a:latin typeface="Calibri"/>
-              </a:defRPr>
-            </a:lvl7pPr>
-          </a:lstStyle>
-          <a:p>
-            <a:pPr marL="343080" indent="-343080" algn="l" defTabSz="457200">
-              <a:lnSpc>
-                <a:spcPct val="100000"/>
-              </a:lnSpc>
-              <a:spcBef>
-                <a:spcPts val="641"/>
-              </a:spcBef>
-              <a:buClr>
-                <a:srgbClr val="000000"/>
-              </a:buClr>
-              <a:buFont typeface="Arial"/>
-              <a:buChar char="•"/>
-            </a:pPr>
-            <a:r>
-              <a:rPr lang="en-US" sz="3200" b="0" u="none" strike="noStrike">
-                <a:solidFill>
-                  <a:schemeClr val="dk1"/>
-                </a:solidFill>
-                <a:effectLst/>
-                <a:uFillTx/>
-                <a:latin typeface="Calibri"/>
-              </a:rPr>
-              <a:t>Pulse para editar el formato de texto del esquema</a:t>
-            </a:r>
-            <a:endParaRPr lang="en-US" sz="3200" b="0" u="none" strike="noStrike">
-              <a:solidFill>
-                <a:schemeClr val="dk1"/>
-              </a:solidFill>
-              <a:effectLst/>
-              <a:uFillTx/>
-              <a:latin typeface="Calibri"/>
-            </a:endParaRPr>
-          </a:p>
-          <a:p>
-            <a:pPr marL="864000" lvl="1" indent="-324000" algn="l" defTabSz="457200">
-              <a:lnSpc>
-                <a:spcPct val="100000"/>
-              </a:lnSpc>
-              <a:spcBef>
-                <a:spcPts val="561"/>
-              </a:spcBef>
-              <a:buClr>
-                <a:srgbClr val="000000"/>
-              </a:buClr>
-              <a:buSzPct val="75000"/>
-              <a:buFont typeface="Symbol" charset="2"/>
-              <a:buChar char=""/>
-            </a:pPr>
-            <a:r>
-              <a:rPr lang="en-US" sz="2800" b="0" u="none" strike="noStrike">
-                <a:solidFill>
-                  <a:schemeClr val="dk1"/>
-                </a:solidFill>
-                <a:effectLst/>
-                <a:uFillTx/>
-                <a:latin typeface="Calibri"/>
-              </a:rPr>
-              <a:t>Segundo nivel del esquema</a:t>
-            </a:r>
-            <a:endParaRPr lang="en-US" sz="2800" b="0" u="none" strike="noStrike">
-              <a:solidFill>
-                <a:schemeClr val="dk1"/>
-              </a:solidFill>
-              <a:effectLst/>
-              <a:uFillTx/>
-              <a:latin typeface="Calibri"/>
-            </a:endParaRPr>
-          </a:p>
-          <a:p>
-            <a:pPr marL="1296000" lvl="2" indent="-288000" algn="l" defTabSz="457200">
-              <a:lnSpc>
-                <a:spcPct val="100000"/>
-              </a:lnSpc>
-              <a:spcBef>
-                <a:spcPts val="479"/>
-              </a:spcBef>
-              <a:buClr>
-                <a:srgbClr val="000000"/>
-              </a:buClr>
-              <a:buSzPct val="45000"/>
-              <a:buFont typeface="Wingdings" charset="2"/>
-              <a:buChar char=""/>
-            </a:pPr>
-            <a:r>
-              <a:rPr lang="en-US" sz="2400" b="0" u="none" strike="noStrike">
-                <a:solidFill>
-                  <a:schemeClr val="dk1"/>
-                </a:solidFill>
-                <a:effectLst/>
-                <a:uFillTx/>
-                <a:latin typeface="Calibri"/>
-              </a:rPr>
-              <a:t>Tercer nivel del esquema</a:t>
-            </a:r>
-            <a:endParaRPr lang="en-US" sz="2400" b="0" u="none" strike="noStrike">
-              <a:solidFill>
-                <a:schemeClr val="dk1"/>
-              </a:solidFill>
-              <a:effectLst/>
-              <a:uFillTx/>
-              <a:latin typeface="Calibri"/>
-            </a:endParaRPr>
-          </a:p>
-          <a:p>
-            <a:pPr marL="1728000" lvl="3" indent="-216000" algn="l" defTabSz="457200">
-              <a:lnSpc>
-                <a:spcPct val="100000"/>
-              </a:lnSpc>
-              <a:spcBef>
-                <a:spcPts val="400"/>
-              </a:spcBef>
-              <a:buClr>
-                <a:srgbClr val="000000"/>
-              </a:buClr>
-              <a:buSzPct val="75000"/>
-              <a:buFont typeface="Symbol" charset="2"/>
-              <a:buChar char=""/>
-            </a:pPr>
-            <a:r>
-              <a:rPr lang="en-US" sz="2000" b="0" u="none" strike="noStrike">
-                <a:solidFill>
-                  <a:schemeClr val="dk1"/>
-                </a:solidFill>
-                <a:effectLst/>
-                <a:uFillTx/>
-                <a:latin typeface="Calibri"/>
-              </a:rPr>
-              <a:t>Cuarto nivel del esquema</a:t>
-            </a:r>
-            <a:endParaRPr lang="en-US" sz="2000" b="0" u="none" strike="noStrike">
-              <a:solidFill>
-                <a:schemeClr val="dk1"/>
-              </a:solidFill>
-              <a:effectLst/>
-              <a:uFillTx/>
-              <a:latin typeface="Calibri"/>
-            </a:endParaRPr>
-          </a:p>
-          <a:p>
-            <a:pPr marL="2160000" lvl="4" indent="-216000" algn="l" defTabSz="457200">
-              <a:lnSpc>
-                <a:spcPct val="100000"/>
-              </a:lnSpc>
-              <a:spcBef>
-                <a:spcPts val="400"/>
-              </a:spcBef>
-              <a:buClr>
-                <a:srgbClr val="000000"/>
-              </a:buClr>
-              <a:buSzPct val="45000"/>
-              <a:buFont typeface="Wingdings" charset="2"/>
-              <a:buChar char=""/>
-            </a:pPr>
-            <a:r>
-              <a:rPr lang="en-US" sz="2000" b="0" u="none" strike="noStrike">
-                <a:solidFill>
-                  <a:schemeClr val="dk1"/>
-                </a:solidFill>
-                <a:effectLst/>
-                <a:uFillTx/>
-                <a:latin typeface="Calibri"/>
-              </a:rPr>
-              <a:t>Quinto nivel del esquema</a:t>
-            </a:r>
-            <a:endParaRPr lang="en-US" sz="2000" b="0" u="none" strike="noStrike">
-              <a:solidFill>
-                <a:schemeClr val="dk1"/>
-              </a:solidFill>
-              <a:effectLst/>
-              <a:uFillTx/>
-              <a:latin typeface="Calibri"/>
-            </a:endParaRPr>
-          </a:p>
-          <a:p>
-            <a:pPr marL="2592000" lvl="5" indent="-216000" algn="l" defTabSz="457200">
-              <a:lnSpc>
-                <a:spcPct val="100000"/>
-              </a:lnSpc>
-              <a:spcBef>
-                <a:spcPts val="283"/>
-              </a:spcBef>
-              <a:buClr>
-                <a:srgbClr val="000000"/>
-              </a:buClr>
-              <a:buSzPct val="45000"/>
-              <a:buFont typeface="Wingdings" charset="2"/>
-              <a:buChar char=""/>
-            </a:pPr>
-            <a:r>
-              <a:rPr lang="en-US" sz="2000" b="0" u="none" strike="noStrike">
-                <a:solidFill>
-                  <a:schemeClr val="dk1"/>
-                </a:solidFill>
-                <a:effectLst/>
-                <a:uFillTx/>
-                <a:latin typeface="Calibri"/>
-              </a:rPr>
-              <a:t>Sexto nivel del esquema</a:t>
-            </a:r>
-            <a:endParaRPr lang="en-US" sz="2000" b="0" u="none" strike="noStrike">
-              <a:solidFill>
-                <a:schemeClr val="dk1"/>
-              </a:solidFill>
-              <a:effectLst/>
-              <a:uFillTx/>
-              <a:latin typeface="Calibri"/>
-            </a:endParaRPr>
-          </a:p>
-          <a:p>
-            <a:pPr marL="3024000" lvl="6" indent="-216000" algn="l" defTabSz="457200">
-              <a:lnSpc>
-                <a:spcPct val="100000"/>
-              </a:lnSpc>
-              <a:spcBef>
-                <a:spcPts val="283"/>
-              </a:spcBef>
-              <a:buClr>
-                <a:srgbClr val="000000"/>
-              </a:buClr>
-              <a:buSzPct val="45000"/>
-              <a:buFont typeface="Wingdings" charset="2"/>
-              <a:buChar char=""/>
-            </a:pPr>
-            <a:r>
-              <a:rPr lang="en-US" sz="2000" b="0" u="none" strike="noStrike">
-                <a:solidFill>
-                  <a:schemeClr val="dk1"/>
-                </a:solidFill>
-                <a:effectLst/>
-                <a:uFillTx/>
-                <a:latin typeface="Calibri"/>
-              </a:rPr>
-              <a:t>Séptimo nivel del esquema</a:t>
-            </a:r>
-            <a:endParaRPr lang="en-US" sz="2000" b="0" u="none" strike="noStrike">
-              <a:solidFill>
-                <a:schemeClr val="dk1"/>
-              </a:solidFill>
-              <a:effectLst/>
-              <a:uFillTx/>
-              <a:latin typeface="Calibri"/>
             </a:endParaRPr>
           </a:p>
         </p:txBody>
@@ -9429,8 +8569,8 @@
 </file>
 
 <file path=ppt/slideLayouts/slideLayout8.xml><?xml version="1.0" encoding="utf-8"?>
-<p:sldLayout xmlns:a="http://schemas.openxmlformats.org/drawingml/2006/main" xmlns:p="http://schemas.openxmlformats.org/presentationml/2006/main" xmlns:r="http://schemas.openxmlformats.org/officeDocument/2006/relationships" xmlns:p14="http://schemas.microsoft.com/office/powerpoint/2010/main" xmlns:p15="http://schemas.microsoft.com/office/powerpoint/2012/main" xmlns:mc="http://schemas.openxmlformats.org/markup-compatibility/2006" type="vertTx" preserve="1">
-  <p:cSld name="Title and Vertical Text">
+<p:sldLayout xmlns:a="http://schemas.openxmlformats.org/drawingml/2006/main" xmlns:p="http://schemas.openxmlformats.org/presentationml/2006/main" xmlns:r="http://schemas.openxmlformats.org/officeDocument/2006/relationships" xmlns:p14="http://schemas.microsoft.com/office/powerpoint/2010/main" xmlns:p15="http://schemas.microsoft.com/office/powerpoint/2012/main" xmlns:mc="http://schemas.openxmlformats.org/markup-compatibility/2006" type="blank" preserve="1">
+  <p:cSld name="Content with Caption">
     <p:bg>
       <p:bgPr>
         <a:solidFill>
@@ -9454,7 +8594,7 @@
       </p:grpSpPr>
       <p:sp>
         <p:nvSpPr>
-          <p:cNvPr id="40" name="PlaceHolder 1"/>
+          <p:cNvPr id="38" name="PlaceHolder 1"/>
           <p:cNvSpPr>
             <a:spLocks noGrp="1"/>
           </p:cNvSpPr>
@@ -9464,8 +8604,8 @@
         </p:nvSpPr>
         <p:spPr>
           <a:xfrm>
-            <a:off x="457200" y="274680"/>
-            <a:ext cx="8228520" cy="1141920"/>
+            <a:off x="457200" y="272880"/>
+            <a:ext cx="3006720" cy="1160640"/>
           </a:xfrm>
           <a:prstGeom prst="rect">
             <a:avLst/>
@@ -9476,19 +8616,19 @@
           </a:ln>
         </p:spPr>
         <p:txBody>
-          <a:bodyPr lIns="91440" tIns="45720" rIns="91440" bIns="45720" anchor="ctr">
+          <a:bodyPr lIns="91440" tIns="45720" rIns="91440" bIns="45720" anchor="b">
             <a:noAutofit/>
           </a:bodyPr>
           <a:lstStyle>
-            <a:lvl1pPr indent="0" algn="ctr" defTabSz="457200">
-              <a:lnSpc>
-                <a:spcPct val="100000"/>
-              </a:lnSpc>
-              <a:buNone/>
-              <a:tabLst>
-                <a:tab pos="0" algn="l"/>
-              </a:tabLst>
-              <a:defRPr lang="en-US" sz="4400" b="0" u="none" strike="noStrike">
+            <a:lvl1pPr indent="0" algn="l" defTabSz="457200">
+              <a:lnSpc>
+                <a:spcPct val="100000"/>
+              </a:lnSpc>
+              <a:buNone/>
+              <a:tabLst>
+                <a:tab pos="0" algn="l"/>
+              </a:tabLst>
+              <a:defRPr lang="en-US" sz="2000" b="1" u="none" strike="noStrike">
                 <a:solidFill>
                   <a:schemeClr val="dk1"/>
                 </a:solidFill>
@@ -9499,346 +8639,27 @@
             </a:lvl1pPr>
           </a:lstStyle>
           <a:p>
-            <a:pPr indent="0" algn="ctr" defTabSz="457200">
-              <a:lnSpc>
-                <a:spcPct val="100000"/>
-              </a:lnSpc>
-              <a:buNone/>
-              <a:tabLst>
-                <a:tab pos="0" algn="l"/>
-              </a:tabLst>
-            </a:pPr>
-            <a:r>
-              <a:rPr lang="en-US" sz="4400" b="0" u="none" strike="noStrike">
-                <a:solidFill>
-                  <a:schemeClr val="dk1"/>
-                </a:solidFill>
-                <a:effectLst/>
-                <a:uFillTx/>
-                <a:latin typeface="Calibri"/>
-              </a:rPr>
-              <a:t>C</a:t>
-            </a:r>
-            <a:r>
-              <a:rPr lang="en-US" sz="4400" b="0" u="none" strike="noStrike">
-                <a:solidFill>
-                  <a:schemeClr val="dk1"/>
-                </a:solidFill>
-                <a:effectLst/>
-                <a:uFillTx/>
-                <a:latin typeface="Calibri"/>
-              </a:rPr>
-              <a:t>l</a:t>
-            </a:r>
-            <a:r>
-              <a:rPr lang="en-US" sz="4400" b="0" u="none" strike="noStrike">
-                <a:solidFill>
-                  <a:schemeClr val="dk1"/>
-                </a:solidFill>
-                <a:effectLst/>
-                <a:uFillTx/>
-                <a:latin typeface="Calibri"/>
-              </a:rPr>
-              <a:t>i</a:t>
-            </a:r>
-            <a:r>
-              <a:rPr lang="en-US" sz="4400" b="0" u="none" strike="noStrike">
-                <a:solidFill>
-                  <a:schemeClr val="dk1"/>
-                </a:solidFill>
-                <a:effectLst/>
-                <a:uFillTx/>
-                <a:latin typeface="Calibri"/>
-              </a:rPr>
-              <a:t>c</a:t>
-            </a:r>
-            <a:r>
-              <a:rPr lang="en-US" sz="4400" b="0" u="none" strike="noStrike">
-                <a:solidFill>
-                  <a:schemeClr val="dk1"/>
-                </a:solidFill>
-                <a:effectLst/>
-                <a:uFillTx/>
-                <a:latin typeface="Calibri"/>
-              </a:rPr>
-              <a:t>k</a:t>
-            </a:r>
-            <a:r>
-              <a:rPr lang="en-US" sz="4400" b="0" u="none" strike="noStrike">
-                <a:solidFill>
-                  <a:schemeClr val="dk1"/>
-                </a:solidFill>
-                <a:effectLst/>
-                <a:uFillTx/>
-                <a:latin typeface="Calibri"/>
-              </a:rPr>
-              <a:t> </a:t>
-            </a:r>
-            <a:r>
-              <a:rPr lang="en-US" sz="4400" b="0" u="none" strike="noStrike">
-                <a:solidFill>
-                  <a:schemeClr val="dk1"/>
-                </a:solidFill>
-                <a:effectLst/>
-                <a:uFillTx/>
-                <a:latin typeface="Calibri"/>
-              </a:rPr>
-              <a:t>t</a:t>
-            </a:r>
-            <a:r>
-              <a:rPr lang="en-US" sz="4400" b="0" u="none" strike="noStrike">
-                <a:solidFill>
-                  <a:schemeClr val="dk1"/>
-                </a:solidFill>
-                <a:effectLst/>
-                <a:uFillTx/>
-                <a:latin typeface="Calibri"/>
-              </a:rPr>
-              <a:t>o</a:t>
-            </a:r>
-            <a:r>
-              <a:rPr lang="en-US" sz="4400" b="0" u="none" strike="noStrike">
-                <a:solidFill>
-                  <a:schemeClr val="dk1"/>
-                </a:solidFill>
-                <a:effectLst/>
-                <a:uFillTx/>
-                <a:latin typeface="Calibri"/>
-              </a:rPr>
-              <a:t> </a:t>
-            </a:r>
-            <a:r>
-              <a:rPr lang="en-US" sz="4400" b="0" u="none" strike="noStrike">
-                <a:solidFill>
-                  <a:schemeClr val="dk1"/>
-                </a:solidFill>
-                <a:effectLst/>
-                <a:uFillTx/>
-                <a:latin typeface="Calibri"/>
-              </a:rPr>
-              <a:t>e</a:t>
-            </a:r>
-            <a:r>
-              <a:rPr lang="en-US" sz="4400" b="0" u="none" strike="noStrike">
-                <a:solidFill>
-                  <a:schemeClr val="dk1"/>
-                </a:solidFill>
-                <a:effectLst/>
-                <a:uFillTx/>
-                <a:latin typeface="Calibri"/>
-              </a:rPr>
-              <a:t>d</a:t>
-            </a:r>
-            <a:r>
-              <a:rPr lang="en-US" sz="4400" b="0" u="none" strike="noStrike">
-                <a:solidFill>
-                  <a:schemeClr val="dk1"/>
-                </a:solidFill>
-                <a:effectLst/>
-                <a:uFillTx/>
-                <a:latin typeface="Calibri"/>
-              </a:rPr>
-              <a:t>i</a:t>
-            </a:r>
-            <a:r>
-              <a:rPr lang="en-US" sz="4400" b="0" u="none" strike="noStrike">
-                <a:solidFill>
-                  <a:schemeClr val="dk1"/>
-                </a:solidFill>
-                <a:effectLst/>
-                <a:uFillTx/>
-                <a:latin typeface="Calibri"/>
-              </a:rPr>
-              <a:t>t </a:t>
-            </a:r>
-            <a:r>
-              <a:rPr lang="en-US" sz="4400" b="0" u="none" strike="noStrike">
-                <a:solidFill>
-                  <a:schemeClr val="dk1"/>
-                </a:solidFill>
-                <a:effectLst/>
-                <a:uFillTx/>
-                <a:latin typeface="Calibri"/>
-              </a:rPr>
-              <a:t>M</a:t>
-            </a:r>
-            <a:r>
-              <a:rPr lang="en-US" sz="4400" b="0" u="none" strike="noStrike">
-                <a:solidFill>
-                  <a:schemeClr val="dk1"/>
-                </a:solidFill>
-                <a:effectLst/>
-                <a:uFillTx/>
-                <a:latin typeface="Calibri"/>
-              </a:rPr>
-              <a:t>a</a:t>
-            </a:r>
-            <a:r>
-              <a:rPr lang="en-US" sz="4400" b="0" u="none" strike="noStrike">
-                <a:solidFill>
-                  <a:schemeClr val="dk1"/>
-                </a:solidFill>
-                <a:effectLst/>
-                <a:uFillTx/>
-                <a:latin typeface="Calibri"/>
-              </a:rPr>
-              <a:t>s</a:t>
-            </a:r>
-            <a:r>
-              <a:rPr lang="en-US" sz="4400" b="0" u="none" strike="noStrike">
-                <a:solidFill>
-                  <a:schemeClr val="dk1"/>
-                </a:solidFill>
-                <a:effectLst/>
-                <a:uFillTx/>
-                <a:latin typeface="Calibri"/>
-              </a:rPr>
-              <a:t>t</a:t>
-            </a:r>
-            <a:r>
-              <a:rPr lang="en-US" sz="4400" b="0" u="none" strike="noStrike">
-                <a:solidFill>
-                  <a:schemeClr val="dk1"/>
-                </a:solidFill>
-                <a:effectLst/>
-                <a:uFillTx/>
-                <a:latin typeface="Calibri"/>
-              </a:rPr>
-              <a:t>e</a:t>
-            </a:r>
-            <a:r>
-              <a:rPr lang="en-US" sz="4400" b="0" u="none" strike="noStrike">
-                <a:solidFill>
-                  <a:schemeClr val="dk1"/>
-                </a:solidFill>
-                <a:effectLst/>
-                <a:uFillTx/>
-                <a:latin typeface="Calibri"/>
-              </a:rPr>
-              <a:t>r </a:t>
-            </a:r>
-            <a:r>
-              <a:rPr lang="en-US" sz="4400" b="0" u="none" strike="noStrike">
-                <a:solidFill>
-                  <a:schemeClr val="dk1"/>
-                </a:solidFill>
-                <a:effectLst/>
-                <a:uFillTx/>
-                <a:latin typeface="Calibri"/>
-              </a:rPr>
-              <a:t>t</a:t>
-            </a:r>
-            <a:r>
-              <a:rPr lang="en-US" sz="4400" b="0" u="none" strike="noStrike">
-                <a:solidFill>
-                  <a:schemeClr val="dk1"/>
-                </a:solidFill>
-                <a:effectLst/>
-                <a:uFillTx/>
-                <a:latin typeface="Calibri"/>
-              </a:rPr>
-              <a:t>i</a:t>
-            </a:r>
-            <a:r>
-              <a:rPr lang="en-US" sz="4400" b="0" u="none" strike="noStrike">
-                <a:solidFill>
-                  <a:schemeClr val="dk1"/>
-                </a:solidFill>
-                <a:effectLst/>
-                <a:uFillTx/>
-                <a:latin typeface="Calibri"/>
-              </a:rPr>
-              <a:t>t</a:t>
-            </a:r>
-            <a:r>
-              <a:rPr lang="en-US" sz="4400" b="0" u="none" strike="noStrike">
-                <a:solidFill>
-                  <a:schemeClr val="dk1"/>
-                </a:solidFill>
-                <a:effectLst/>
-                <a:uFillTx/>
-                <a:latin typeface="Calibri"/>
-              </a:rPr>
-              <a:t>l</a:t>
-            </a:r>
-            <a:r>
-              <a:rPr lang="en-US" sz="4400" b="0" u="none" strike="noStrike">
-                <a:solidFill>
-                  <a:schemeClr val="dk1"/>
-                </a:solidFill>
-                <a:effectLst/>
-                <a:uFillTx/>
-                <a:latin typeface="Calibri"/>
-              </a:rPr>
-              <a:t>e</a:t>
-            </a:r>
-            <a:r>
-              <a:rPr lang="en-US" sz="4400" b="0" u="none" strike="noStrike">
-                <a:solidFill>
-                  <a:schemeClr val="dk1"/>
-                </a:solidFill>
-                <a:effectLst/>
-                <a:uFillTx/>
-                <a:latin typeface="Calibri"/>
-              </a:rPr>
-              <a:t> </a:t>
-            </a:r>
-            <a:r>
-              <a:rPr lang="en-US" sz="4400" b="0" u="none" strike="noStrike">
-                <a:solidFill>
-                  <a:schemeClr val="dk1"/>
-                </a:solidFill>
-                <a:effectLst/>
-                <a:uFillTx/>
-                <a:latin typeface="Calibri"/>
-              </a:rPr>
-              <a:t>s</a:t>
-            </a:r>
-            <a:r>
-              <a:rPr lang="en-US" sz="4400" b="0" u="none" strike="noStrike">
-                <a:solidFill>
-                  <a:schemeClr val="dk1"/>
-                </a:solidFill>
-                <a:effectLst/>
-                <a:uFillTx/>
-                <a:latin typeface="Calibri"/>
-              </a:rPr>
-              <a:t>t</a:t>
-            </a:r>
-            <a:r>
-              <a:rPr lang="en-US" sz="4400" b="0" u="none" strike="noStrike">
-                <a:solidFill>
-                  <a:schemeClr val="dk1"/>
-                </a:solidFill>
-                <a:effectLst/>
-                <a:uFillTx/>
-                <a:latin typeface="Calibri"/>
-              </a:rPr>
-              <a:t>y</a:t>
-            </a:r>
-            <a:r>
-              <a:rPr lang="en-US" sz="4400" b="0" u="none" strike="noStrike">
-                <a:solidFill>
-                  <a:schemeClr val="dk1"/>
-                </a:solidFill>
-                <a:effectLst/>
-                <a:uFillTx/>
-                <a:latin typeface="Calibri"/>
-              </a:rPr>
-              <a:t>l</a:t>
-            </a:r>
-            <a:r>
-              <a:rPr lang="en-US" sz="4400" b="0" u="none" strike="noStrike">
-                <a:solidFill>
-                  <a:schemeClr val="dk1"/>
-                </a:solidFill>
-                <a:effectLst/>
-                <a:uFillTx/>
-                <a:latin typeface="Calibri"/>
-              </a:rPr>
-              <a:t>e</a:t>
-            </a:r>
-            <a:endParaRPr lang="en-US" sz="4400" b="0" u="none" strike="noStrike">
+            <a:pPr indent="0" algn="l" defTabSz="457200">
+              <a:lnSpc>
+                <a:spcPct val="100000"/>
+              </a:lnSpc>
+              <a:buNone/>
+              <a:tabLst>
+                <a:tab pos="0" algn="l"/>
+              </a:tabLst>
+            </a:pPr>
+            <a:r>
+              <a:rPr lang="en-US" sz="2000" b="1" u="none" strike="noStrike">
+                <a:solidFill>
+                  <a:schemeClr val="dk1"/>
+                </a:solidFill>
+                <a:effectLst/>
+                <a:uFillTx/>
+                <a:latin typeface="Calibri"/>
+              </a:rPr>
+              <a:t>Click to edit Master title style</a:t>
+            </a:r>
+            <a:endParaRPr lang="en-US" sz="2000" b="1" u="none" strike="noStrike">
               <a:solidFill>
                 <a:schemeClr val="dk1"/>
               </a:solidFill>
@@ -9851,7 +8672,7 @@
       </p:sp>
       <p:sp>
         <p:nvSpPr>
-          <p:cNvPr id="41" name="PlaceHolder 2"/>
+          <p:cNvPr id="39" name="PlaceHolder 2"/>
           <p:cNvSpPr>
             <a:spLocks noGrp="1"/>
           </p:cNvSpPr>
@@ -9861,8 +8682,8 @@
         </p:nvSpPr>
         <p:spPr>
           <a:xfrm>
-            <a:off x="457200" y="1600200"/>
-            <a:ext cx="8228520" cy="4524840"/>
+            <a:off x="3575160" y="272880"/>
+            <a:ext cx="5110200" cy="5851800"/>
           </a:xfrm>
           <a:prstGeom prst="rect">
             <a:avLst/>
@@ -9873,7 +8694,7 @@
           </a:ln>
         </p:spPr>
         <p:txBody>
-          <a:bodyPr lIns="91440" tIns="45720" rIns="91440" bIns="45720" anchor="t" vert="eaVert">
+          <a:bodyPr lIns="91440" tIns="45720" rIns="91440" bIns="45720" anchor="t">
             <a:noAutofit/>
           </a:bodyPr>
           <a:lstStyle>
@@ -10157,7 +8978,91 @@
       </p:sp>
       <p:sp>
         <p:nvSpPr>
-          <p:cNvPr id="42" name="PlaceHolder 3"/>
+          <p:cNvPr id="40" name="PlaceHolder 3"/>
+          <p:cNvSpPr>
+            <a:spLocks noGrp="1"/>
+          </p:cNvSpPr>
+          <p:nvPr>
+            <p:ph type="body"/>
+          </p:nvPr>
+        </p:nvSpPr>
+        <p:spPr>
+          <a:xfrm>
+            <a:off x="457200" y="1434960"/>
+            <a:ext cx="3006720" cy="4689720"/>
+          </a:xfrm>
+          <a:prstGeom prst="rect">
+            <a:avLst/>
+          </a:prstGeom>
+          <a:noFill/>
+          <a:ln w="0">
+            <a:noFill/>
+          </a:ln>
+        </p:spPr>
+        <p:txBody>
+          <a:bodyPr lIns="91440" tIns="45720" rIns="91440" bIns="45720" anchor="t">
+            <a:noAutofit/>
+          </a:bodyPr>
+          <a:lstStyle>
+            <a:lvl1pPr indent="0" algn="l" defTabSz="457200">
+              <a:lnSpc>
+                <a:spcPct val="100000"/>
+              </a:lnSpc>
+              <a:spcBef>
+                <a:spcPts val="281"/>
+              </a:spcBef>
+              <a:buNone/>
+              <a:tabLst>
+                <a:tab pos="0" algn="l"/>
+              </a:tabLst>
+              <a:defRPr lang="en-US" sz="1400" b="0" u="none" strike="noStrike">
+                <a:solidFill>
+                  <a:schemeClr val="dk1"/>
+                </a:solidFill>
+                <a:effectLst/>
+                <a:uFillTx/>
+                <a:latin typeface="Calibri"/>
+              </a:defRPr>
+            </a:lvl1pPr>
+          </a:lstStyle>
+          <a:p>
+            <a:pPr indent="0" algn="l" defTabSz="457200">
+              <a:lnSpc>
+                <a:spcPct val="100000"/>
+              </a:lnSpc>
+              <a:spcBef>
+                <a:spcPts val="281"/>
+              </a:spcBef>
+              <a:buNone/>
+              <a:tabLst>
+                <a:tab pos="0" algn="l"/>
+              </a:tabLst>
+            </a:pPr>
+            <a:r>
+              <a:rPr lang="en-US" sz="1400" b="0" u="none" strike="noStrike">
+                <a:solidFill>
+                  <a:schemeClr val="dk1"/>
+                </a:solidFill>
+                <a:effectLst/>
+                <a:uFillTx/>
+                <a:latin typeface="Calibri"/>
+              </a:rPr>
+              <a:t>Click to edit Master text styles</a:t>
+            </a:r>
+            <a:endParaRPr lang="en-US" sz="1400" b="0" u="none" strike="noStrike">
+              <a:solidFill>
+                <a:schemeClr val="dk1"/>
+              </a:solidFill>
+              <a:effectLst/>
+              <a:uFillTx/>
+              <a:latin typeface="Calibri"/>
+            </a:endParaRPr>
+          </a:p>
+        </p:txBody>
+      </p:sp>
+      <p:sp>
+        <p:nvSpPr>
+          <p:cNvPr id="41" name="PlaceHolder 4"/>
           <p:cNvSpPr>
             <a:spLocks noGrp="1"/>
           </p:cNvSpPr>
@@ -10168,7 +9073,7 @@
         <p:spPr>
           <a:xfrm>
             <a:off x="457200" y="6356520"/>
-            <a:ext cx="2132640" cy="363960"/>
+            <a:ext cx="2132280" cy="363600"/>
           </a:xfrm>
           <a:prstGeom prst="rect">
             <a:avLst/>
@@ -10224,7 +9129,7 @@
                 <a:uFillTx/>
                 <a:latin typeface="Calibri"/>
               </a:rPr>
-              <a:t>&lt;fecha/hora&gt;</a:t>
+              <a:t> </a:t>
             </a:r>
             <a:endParaRPr lang="es-CO" sz="1200" b="0" u="none" strike="noStrike">
               <a:solidFill>
@@ -10239,7 +9144,7 @@
       </p:sp>
       <p:sp>
         <p:nvSpPr>
-          <p:cNvPr id="43" name="PlaceHolder 4"/>
+          <p:cNvPr id="42" name="PlaceHolder 5"/>
           <p:cNvSpPr>
             <a:spLocks noGrp="1"/>
           </p:cNvSpPr>
@@ -10250,7 +9155,7 @@
         <p:spPr>
           <a:xfrm>
             <a:off x="3124080" y="6356520"/>
-            <a:ext cx="2894400" cy="363960"/>
+            <a:ext cx="2894040" cy="363600"/>
           </a:xfrm>
           <a:prstGeom prst="rect">
             <a:avLst/>
@@ -10302,7 +9207,7 @@
                 <a:uFillTx/>
                 <a:latin typeface="Times New Roman"/>
               </a:rPr>
-              <a:t>&lt;pie de página&gt;</a:t>
+              <a:t> </a:t>
             </a:r>
             <a:endParaRPr lang="es-CO" sz="1400" b="0" u="none" strike="noStrike">
               <a:solidFill>
@@ -10317,7 +9222,7 @@
       </p:sp>
       <p:sp>
         <p:nvSpPr>
-          <p:cNvPr id="44" name="PlaceHolder 5"/>
+          <p:cNvPr id="43" name="PlaceHolder 6"/>
           <p:cNvSpPr>
             <a:spLocks noGrp="1"/>
           </p:cNvSpPr>
@@ -10328,7 +9233,7 @@
         <p:spPr>
           <a:xfrm>
             <a:off x="6553080" y="6356520"/>
-            <a:ext cx="2132640" cy="363960"/>
+            <a:ext cx="2132280" cy="363600"/>
           </a:xfrm>
           <a:prstGeom prst="rect">
             <a:avLst/>
@@ -10373,7 +9278,7 @@
                 <a:tab pos="0" algn="l"/>
               </a:tabLst>
             </a:pPr>
-            <a:fld id="{AD86326B-0E71-4F71-84B1-6F008DECBF03}" type="slidenum">
+            <a:fld id="{3BA6B554-722E-4DE3-A3E5-1F90924A6BAB}" type="slidenum">
               <a:rPr lang="en-US" sz="1200" b="0" u="none" strike="noStrike">
                 <a:solidFill>
                   <a:schemeClr val="dk1">
@@ -10384,7 +9289,7 @@
                 <a:uFillTx/>
                 <a:latin typeface="Calibri"/>
               </a:rPr>
-              <a:t>&lt;número&gt;</a:t>
+              <a:t>8</a:t>
             </a:fld>
             <a:endParaRPr lang="es-CO" sz="1200" b="0" u="none" strike="noStrike">
               <a:solidFill>
@@ -10403,8 +9308,8 @@
 </file>
 
 <file path=ppt/slideLayouts/slideLayout9.xml><?xml version="1.0" encoding="utf-8"?>
-<p:sldLayout xmlns:a="http://schemas.openxmlformats.org/drawingml/2006/main" xmlns:p="http://schemas.openxmlformats.org/presentationml/2006/main" xmlns:r="http://schemas.openxmlformats.org/officeDocument/2006/relationships" xmlns:p14="http://schemas.microsoft.com/office/powerpoint/2010/main" xmlns:p15="http://schemas.microsoft.com/office/powerpoint/2012/main" xmlns:mc="http://schemas.openxmlformats.org/markup-compatibility/2006" type="vertTitleAndTx" preserve="1">
-  <p:cSld name="Vertical Title and Text">
+<p:sldLayout xmlns:a="http://schemas.openxmlformats.org/drawingml/2006/main" xmlns:p="http://schemas.openxmlformats.org/presentationml/2006/main" xmlns:r="http://schemas.openxmlformats.org/officeDocument/2006/relationships" xmlns:p14="http://schemas.microsoft.com/office/powerpoint/2010/main" xmlns:p15="http://schemas.microsoft.com/office/powerpoint/2012/main" xmlns:mc="http://schemas.openxmlformats.org/markup-compatibility/2006" type="blank" preserve="1">
+  <p:cSld name="Picture with Caption">
     <p:bg>
       <p:bgPr>
         <a:solidFill>
@@ -10428,7 +9333,7 @@
       </p:grpSpPr>
       <p:sp>
         <p:nvSpPr>
-          <p:cNvPr id="45" name="PlaceHolder 1"/>
+          <p:cNvPr id="44" name="PlaceHolder 1"/>
           <p:cNvSpPr>
             <a:spLocks noGrp="1"/>
           </p:cNvSpPr>
@@ -10438,8 +9343,8 @@
         </p:nvSpPr>
         <p:spPr>
           <a:xfrm>
-            <a:off x="6629400" y="274680"/>
-            <a:ext cx="2056320" cy="5850360"/>
+            <a:off x="1792440" y="4800600"/>
+            <a:ext cx="5484960" cy="565200"/>
           </a:xfrm>
           <a:prstGeom prst="rect">
             <a:avLst/>
@@ -10450,19 +9355,19 @@
           </a:ln>
         </p:spPr>
         <p:txBody>
-          <a:bodyPr lIns="91440" tIns="45720" rIns="91440" bIns="45720" anchor="ctr" vert="eaVert">
+          <a:bodyPr lIns="91440" tIns="45720" rIns="91440" bIns="45720" anchor="b">
             <a:noAutofit/>
           </a:bodyPr>
           <a:lstStyle>
-            <a:lvl1pPr indent="0" algn="ctr" defTabSz="457200">
-              <a:lnSpc>
-                <a:spcPct val="100000"/>
-              </a:lnSpc>
-              <a:buNone/>
-              <a:tabLst>
-                <a:tab pos="0" algn="l"/>
-              </a:tabLst>
-              <a:defRPr lang="en-US" sz="4400" b="0" u="none" strike="noStrike">
+            <a:lvl1pPr indent="0" algn="l" defTabSz="457200">
+              <a:lnSpc>
+                <a:spcPct val="100000"/>
+              </a:lnSpc>
+              <a:buNone/>
+              <a:tabLst>
+                <a:tab pos="0" algn="l"/>
+              </a:tabLst>
+              <a:defRPr lang="en-US" sz="2000" b="1" u="none" strike="noStrike">
                 <a:solidFill>
                   <a:schemeClr val="dk1"/>
                 </a:solidFill>
@@ -10473,269 +9378,27 @@
             </a:lvl1pPr>
           </a:lstStyle>
           <a:p>
-            <a:pPr indent="0" algn="ctr" defTabSz="457200">
-              <a:lnSpc>
-                <a:spcPct val="100000"/>
-              </a:lnSpc>
-              <a:buNone/>
-              <a:tabLst>
-                <a:tab pos="0" algn="l"/>
-              </a:tabLst>
-            </a:pPr>
-            <a:r>
-              <a:rPr lang="en-US" sz="4400" b="0" u="none" strike="noStrike">
-                <a:solidFill>
-                  <a:schemeClr val="dk1"/>
-                </a:solidFill>
-                <a:effectLst/>
-                <a:uFillTx/>
-                <a:latin typeface="Calibri"/>
-              </a:rPr>
-              <a:t>C</a:t>
-            </a:r>
-            <a:r>
-              <a:rPr lang="en-US" sz="4400" b="0" u="none" strike="noStrike">
-                <a:solidFill>
-                  <a:schemeClr val="dk1"/>
-                </a:solidFill>
-                <a:effectLst/>
-                <a:uFillTx/>
-                <a:latin typeface="Calibri"/>
-              </a:rPr>
-              <a:t>li</a:t>
-            </a:r>
-            <a:r>
-              <a:rPr lang="en-US" sz="4400" b="0" u="none" strike="noStrike">
-                <a:solidFill>
-                  <a:schemeClr val="dk1"/>
-                </a:solidFill>
-                <a:effectLst/>
-                <a:uFillTx/>
-                <a:latin typeface="Calibri"/>
-              </a:rPr>
-              <a:t>c</a:t>
-            </a:r>
-            <a:r>
-              <a:rPr lang="en-US" sz="4400" b="0" u="none" strike="noStrike">
-                <a:solidFill>
-                  <a:schemeClr val="dk1"/>
-                </a:solidFill>
-                <a:effectLst/>
-                <a:uFillTx/>
-                <a:latin typeface="Calibri"/>
-              </a:rPr>
-              <a:t>k </a:t>
-            </a:r>
-            <a:r>
-              <a:rPr lang="en-US" sz="4400" b="0" u="none" strike="noStrike">
-                <a:solidFill>
-                  <a:schemeClr val="dk1"/>
-                </a:solidFill>
-                <a:effectLst/>
-                <a:uFillTx/>
-                <a:latin typeface="Calibri"/>
-              </a:rPr>
-              <a:t>t</a:t>
-            </a:r>
-            <a:r>
-              <a:rPr lang="en-US" sz="4400" b="0" u="none" strike="noStrike">
-                <a:solidFill>
-                  <a:schemeClr val="dk1"/>
-                </a:solidFill>
-                <a:effectLst/>
-                <a:uFillTx/>
-                <a:latin typeface="Calibri"/>
-              </a:rPr>
-              <a:t>o </a:t>
-            </a:r>
-            <a:r>
-              <a:rPr lang="en-US" sz="4400" b="0" u="none" strike="noStrike">
-                <a:solidFill>
-                  <a:schemeClr val="dk1"/>
-                </a:solidFill>
-                <a:effectLst/>
-                <a:uFillTx/>
-                <a:latin typeface="Calibri"/>
-              </a:rPr>
-              <a:t>e</a:t>
-            </a:r>
-            <a:r>
-              <a:rPr lang="en-US" sz="4400" b="0" u="none" strike="noStrike">
-                <a:solidFill>
-                  <a:schemeClr val="dk1"/>
-                </a:solidFill>
-                <a:effectLst/>
-                <a:uFillTx/>
-                <a:latin typeface="Calibri"/>
-              </a:rPr>
-              <a:t>d</a:t>
-            </a:r>
-            <a:r>
-              <a:rPr lang="en-US" sz="4400" b="0" u="none" strike="noStrike">
-                <a:solidFill>
-                  <a:schemeClr val="dk1"/>
-                </a:solidFill>
-                <a:effectLst/>
-                <a:uFillTx/>
-                <a:latin typeface="Calibri"/>
-              </a:rPr>
-              <a:t>it </a:t>
-            </a:r>
-            <a:r>
-              <a:rPr lang="en-US" sz="4400" b="0" u="none" strike="noStrike">
-                <a:solidFill>
-                  <a:schemeClr val="dk1"/>
-                </a:solidFill>
-                <a:effectLst/>
-                <a:uFillTx/>
-                <a:latin typeface="Calibri"/>
-              </a:rPr>
-              <a:t>M</a:t>
-            </a:r>
-            <a:r>
-              <a:rPr lang="en-US" sz="4400" b="0" u="none" strike="noStrike">
-                <a:solidFill>
-                  <a:schemeClr val="dk1"/>
-                </a:solidFill>
-                <a:effectLst/>
-                <a:uFillTx/>
-                <a:latin typeface="Calibri"/>
-              </a:rPr>
-              <a:t>a</a:t>
-            </a:r>
-            <a:r>
-              <a:rPr lang="en-US" sz="4400" b="0" u="none" strike="noStrike">
-                <a:solidFill>
-                  <a:schemeClr val="dk1"/>
-                </a:solidFill>
-                <a:effectLst/>
-                <a:uFillTx/>
-                <a:latin typeface="Calibri"/>
-              </a:rPr>
-              <a:t>s</a:t>
-            </a:r>
-            <a:r>
-              <a:rPr lang="en-US" sz="4400" b="0" u="none" strike="noStrike">
-                <a:solidFill>
-                  <a:schemeClr val="dk1"/>
-                </a:solidFill>
-                <a:effectLst/>
-                <a:uFillTx/>
-                <a:latin typeface="Calibri"/>
-              </a:rPr>
-              <a:t>t</a:t>
-            </a:r>
-            <a:r>
-              <a:rPr lang="en-US" sz="4400" b="0" u="none" strike="noStrike">
-                <a:solidFill>
-                  <a:schemeClr val="dk1"/>
-                </a:solidFill>
-                <a:effectLst/>
-                <a:uFillTx/>
-                <a:latin typeface="Calibri"/>
-              </a:rPr>
-              <a:t>e</a:t>
-            </a:r>
-            <a:r>
-              <a:rPr lang="en-US" sz="4400" b="0" u="none" strike="noStrike">
-                <a:solidFill>
-                  <a:schemeClr val="dk1"/>
-                </a:solidFill>
-                <a:effectLst/>
-                <a:uFillTx/>
-                <a:latin typeface="Calibri"/>
-              </a:rPr>
-              <a:t>r </a:t>
-            </a:r>
-            <a:r>
-              <a:rPr lang="en-US" sz="4400" b="0" u="none" strike="noStrike">
-                <a:solidFill>
-                  <a:schemeClr val="dk1"/>
-                </a:solidFill>
-                <a:effectLst/>
-                <a:uFillTx/>
-                <a:latin typeface="Calibri"/>
-              </a:rPr>
-              <a:t>ti</a:t>
-            </a:r>
-            <a:r>
-              <a:rPr lang="en-US" sz="4400" b="0" u="none" strike="noStrike">
-                <a:solidFill>
-                  <a:schemeClr val="dk1"/>
-                </a:solidFill>
-                <a:effectLst/>
-                <a:uFillTx/>
-                <a:latin typeface="Calibri"/>
-              </a:rPr>
-              <a:t>tl</a:t>
-            </a:r>
-            <a:r>
-              <a:rPr lang="en-US" sz="4400" b="0" u="none" strike="noStrike">
-                <a:solidFill>
-                  <a:schemeClr val="dk1"/>
-                </a:solidFill>
-                <a:effectLst/>
-                <a:uFillTx/>
-                <a:latin typeface="Calibri"/>
-              </a:rPr>
-              <a:t>e </a:t>
-            </a:r>
-            <a:r>
-              <a:rPr lang="en-US" sz="4400" b="0" u="none" strike="noStrike">
-                <a:solidFill>
-                  <a:schemeClr val="dk1"/>
-                </a:solidFill>
-                <a:effectLst/>
-                <a:uFillTx/>
-                <a:latin typeface="Calibri"/>
-              </a:rPr>
-              <a:t>s</a:t>
-            </a:r>
-            <a:r>
-              <a:rPr lang="en-US" sz="4400" b="0" u="none" strike="noStrike">
-                <a:solidFill>
-                  <a:schemeClr val="dk1"/>
-                </a:solidFill>
-                <a:effectLst/>
-                <a:uFillTx/>
-                <a:latin typeface="Calibri"/>
-              </a:rPr>
-              <a:t>t</a:t>
-            </a:r>
-            <a:r>
-              <a:rPr lang="en-US" sz="4400" b="0" u="none" strike="noStrike">
-                <a:solidFill>
-                  <a:schemeClr val="dk1"/>
-                </a:solidFill>
-                <a:effectLst/>
-                <a:uFillTx/>
-                <a:latin typeface="Calibri"/>
-              </a:rPr>
-              <a:t>y</a:t>
-            </a:r>
-            <a:r>
-              <a:rPr lang="en-US" sz="4400" b="0" u="none" strike="noStrike">
-                <a:solidFill>
-                  <a:schemeClr val="dk1"/>
-                </a:solidFill>
-                <a:effectLst/>
-                <a:uFillTx/>
-                <a:latin typeface="Calibri"/>
-              </a:rPr>
-              <a:t>l</a:t>
-            </a:r>
-            <a:r>
-              <a:rPr lang="en-US" sz="4400" b="0" u="none" strike="noStrike">
-                <a:solidFill>
-                  <a:schemeClr val="dk1"/>
-                </a:solidFill>
-                <a:effectLst/>
-                <a:uFillTx/>
-                <a:latin typeface="Calibri"/>
-              </a:rPr>
-              <a:t>e</a:t>
-            </a:r>
-            <a:endParaRPr lang="en-US" sz="4400" b="0" u="none" strike="noStrike">
+            <a:pPr indent="0" algn="l" defTabSz="457200">
+              <a:lnSpc>
+                <a:spcPct val="100000"/>
+              </a:lnSpc>
+              <a:buNone/>
+              <a:tabLst>
+                <a:tab pos="0" algn="l"/>
+              </a:tabLst>
+            </a:pPr>
+            <a:r>
+              <a:rPr lang="en-US" sz="2000" b="1" u="none" strike="noStrike">
+                <a:solidFill>
+                  <a:schemeClr val="dk1"/>
+                </a:solidFill>
+                <a:effectLst/>
+                <a:uFillTx/>
+                <a:latin typeface="Calibri"/>
+              </a:rPr>
+              <a:t>Click to edit Master title style</a:t>
+            </a:r>
+            <a:endParaRPr lang="en-US" sz="2000" b="1" u="none" strike="noStrike">
               <a:solidFill>
                 <a:schemeClr val="dk1"/>
               </a:solidFill>
@@ -10748,7 +9411,7 @@
       </p:sp>
       <p:sp>
         <p:nvSpPr>
-          <p:cNvPr id="46" name="PlaceHolder 2"/>
+          <p:cNvPr id="45" name="PlaceHolder 2"/>
           <p:cNvSpPr>
             <a:spLocks noGrp="1"/>
           </p:cNvSpPr>
@@ -10758,8 +9421,8 @@
         </p:nvSpPr>
         <p:spPr>
           <a:xfrm>
-            <a:off x="457200" y="274680"/>
-            <a:ext cx="6018840" cy="5850360"/>
+            <a:off x="1792440" y="612720"/>
+            <a:ext cx="5484960" cy="4113360"/>
           </a:xfrm>
           <a:prstGeom prst="rect">
             <a:avLst/>
@@ -10770,7 +9433,7 @@
           </a:ln>
         </p:spPr>
         <p:txBody>
-          <a:bodyPr lIns="91440" tIns="45720" rIns="91440" bIns="45720" anchor="t" vert="eaVert">
+          <a:bodyPr lIns="90000" tIns="45000" rIns="90000" bIns="45000" anchor="t">
             <a:noAutofit/>
           </a:bodyPr>
           <a:lstStyle>
@@ -10779,13 +9442,16 @@
                 <a:spcPct val="100000"/>
               </a:lnSpc>
               <a:spcBef>
-                <a:spcPts val="641"/>
+                <a:spcPts val="281"/>
               </a:spcBef>
               <a:buClr>
                 <a:srgbClr val="000000"/>
               </a:buClr>
               <a:buFont typeface="Arial"/>
               <a:buChar char="•"/>
+              <a:tabLst>
+                <a:tab pos="0" algn="l"/>
+              </a:tabLst>
               <a:defRPr lang="en-US" sz="3200" b="0" u="none" strike="noStrike">
                 <a:solidFill>
                   <a:schemeClr val="dk1"/>
@@ -10805,9 +9471,13 @@
               <a:buClr>
                 <a:srgbClr val="000000"/>
               </a:buClr>
-              <a:buFont typeface="Arial"/>
-              <a:buChar char="–"/>
-              <a:defRPr lang="en-US" sz="2800" b="0" u="none" strike="noStrike">
+              <a:buSzPct val="75000"/>
+              <a:buFont typeface="Symbol" charset="2"/>
+              <a:buChar char=""/>
+              <a:tabLst>
+                <a:tab pos="0" algn="l"/>
+              </a:tabLst>
+              <a:defRPr lang="en-US" sz="3200" b="0" u="none" strike="noStrike">
                 <a:solidFill>
                   <a:schemeClr val="dk1"/>
                 </a:solidFill>
@@ -10826,9 +9496,13 @@
               <a:buClr>
                 <a:srgbClr val="000000"/>
               </a:buClr>
-              <a:buFont typeface="Arial"/>
-              <a:buChar char="•"/>
-              <a:defRPr lang="en-US" sz="2400" b="0" u="none" strike="noStrike">
+              <a:buSzPct val="45000"/>
+              <a:buFont typeface="Wingdings" charset="2"/>
+              <a:buChar char=""/>
+              <a:tabLst>
+                <a:tab pos="0" algn="l"/>
+              </a:tabLst>
+              <a:defRPr lang="en-US" sz="3200" b="0" u="none" strike="noStrike">
                 <a:solidFill>
                   <a:schemeClr val="dk1"/>
                 </a:solidFill>
@@ -10847,9 +9521,13 @@
               <a:buClr>
                 <a:srgbClr val="000000"/>
               </a:buClr>
-              <a:buFont typeface="Arial"/>
-              <a:buChar char="–"/>
-              <a:defRPr lang="en-US" sz="2000" b="0" u="none" strike="noStrike">
+              <a:buSzPct val="75000"/>
+              <a:buFont typeface="Symbol" charset="2"/>
+              <a:buChar char=""/>
+              <a:tabLst>
+                <a:tab pos="0" algn="l"/>
+              </a:tabLst>
+              <a:defRPr lang="en-US" sz="3200" b="0" u="none" strike="noStrike">
                 <a:solidFill>
                   <a:schemeClr val="dk1"/>
                 </a:solidFill>
@@ -10868,9 +9546,13 @@
               <a:buClr>
                 <a:srgbClr val="000000"/>
               </a:buClr>
-              <a:buFont typeface="Arial"/>
-              <a:buChar char="»"/>
-              <a:defRPr lang="en-US" sz="2000" b="0" u="none" strike="noStrike">
+              <a:buSzPct val="45000"/>
+              <a:buFont typeface="Wingdings" charset="2"/>
+              <a:buChar char=""/>
+              <a:tabLst>
+                <a:tab pos="0" algn="l"/>
+              </a:tabLst>
+              <a:defRPr lang="en-US" sz="3200" b="0" u="none" strike="noStrike">
                 <a:solidFill>
                   <a:schemeClr val="dk1"/>
                 </a:solidFill>
@@ -10879,20 +9561,73 @@
                 <a:latin typeface="Calibri"/>
               </a:defRPr>
             </a:lvl5pPr>
+            <a:lvl6pPr lvl="5" algn="l" defTabSz="457200">
+              <a:lnSpc>
+                <a:spcPct val="100000"/>
+              </a:lnSpc>
+              <a:spcBef>
+                <a:spcPts val="283"/>
+              </a:spcBef>
+              <a:buClr>
+                <a:srgbClr val="000000"/>
+              </a:buClr>
+              <a:buSzPct val="45000"/>
+              <a:buFont typeface="Wingdings" charset="2"/>
+              <a:buChar char=""/>
+              <a:tabLst>
+                <a:tab pos="0" algn="l"/>
+              </a:tabLst>
+              <a:defRPr lang="en-US" sz="3200" b="0" u="none" strike="noStrike">
+                <a:solidFill>
+                  <a:schemeClr val="dk1"/>
+                </a:solidFill>
+                <a:effectLst/>
+                <a:uFillTx/>
+                <a:latin typeface="Calibri"/>
+              </a:defRPr>
+            </a:lvl6pPr>
+            <a:lvl7pPr lvl="6" algn="l" defTabSz="457200">
+              <a:lnSpc>
+                <a:spcPct val="100000"/>
+              </a:lnSpc>
+              <a:spcBef>
+                <a:spcPts val="283"/>
+              </a:spcBef>
+              <a:buClr>
+                <a:srgbClr val="000000"/>
+              </a:buClr>
+              <a:buSzPct val="45000"/>
+              <a:buFont typeface="Wingdings" charset="2"/>
+              <a:buChar char=""/>
+              <a:tabLst>
+                <a:tab pos="0" algn="l"/>
+              </a:tabLst>
+              <a:defRPr lang="en-US" sz="3200" b="0" u="none" strike="noStrike">
+                <a:solidFill>
+                  <a:schemeClr val="dk1"/>
+                </a:solidFill>
+                <a:effectLst/>
+                <a:uFillTx/>
+                <a:latin typeface="Calibri"/>
+              </a:defRPr>
+            </a:lvl7pPr>
           </a:lstStyle>
           <a:p>
-            <a:pPr marL="343080" indent="-343080" algn="l" defTabSz="457200">
+            <a:pPr marL="432000" indent="-324000" algn="l" defTabSz="457200">
               <a:lnSpc>
                 <a:spcPct val="100000"/>
               </a:lnSpc>
               <a:spcBef>
-                <a:spcPts val="641"/>
+                <a:spcPts val="281"/>
               </a:spcBef>
               <a:buClr>
                 <a:srgbClr val="000000"/>
               </a:buClr>
               <a:buFont typeface="Arial"/>
               <a:buChar char="•"/>
+              <a:tabLst>
+                <a:tab pos="0" algn="l"/>
+              </a:tabLst>
             </a:pPr>
             <a:r>
               <a:rPr lang="en-US" sz="3200" b="0" u="none" strike="noStrike">
@@ -10903,7 +9638,7 @@
                 <a:uFillTx/>
                 <a:latin typeface="Calibri"/>
               </a:rPr>
-              <a:t>Click to edit Master text styles</a:t>
+              <a:t>Pulse para editar el formato de texto del esquema</a:t>
             </a:r>
             <a:endParaRPr lang="en-US" sz="3200" b="0" u="none" strike="noStrike">
               <a:solidFill>
@@ -10915,7 +9650,7 @@
             </a:endParaRPr>
           </a:p>
           <a:p>
-            <a:pPr marL="743040" lvl="1" indent="-285840" algn="l" defTabSz="457200">
+            <a:pPr marL="457200" lvl="1" indent="-324000" algn="l" defTabSz="457200">
               <a:lnSpc>
                 <a:spcPct val="100000"/>
               </a:lnSpc>
@@ -10925,21 +9660,25 @@
               <a:buClr>
                 <a:srgbClr val="000000"/>
               </a:buClr>
-              <a:buFont typeface="Arial"/>
-              <a:buChar char="–"/>
-            </a:pPr>
-            <a:r>
-              <a:rPr lang="en-US" sz="2800" b="0" u="none" strike="noStrike">
-                <a:solidFill>
-                  <a:schemeClr val="dk1"/>
-                </a:solidFill>
-                <a:effectLst/>
-                <a:uFillTx/>
-                <a:latin typeface="Calibri"/>
-              </a:rPr>
-              <a:t>Second level</a:t>
-            </a:r>
-            <a:endParaRPr lang="en-US" sz="2800" b="0" u="none" strike="noStrike">
+              <a:buSzPct val="75000"/>
+              <a:buFont typeface="Symbol" charset="2"/>
+              <a:buChar char=""/>
+              <a:tabLst>
+                <a:tab pos="0" algn="l"/>
+              </a:tabLst>
+            </a:pPr>
+            <a:r>
+              <a:rPr lang="en-US" sz="3200" b="0" u="none" strike="noStrike">
+                <a:solidFill>
+                  <a:schemeClr val="dk1"/>
+                </a:solidFill>
+                <a:effectLst/>
+                <a:uFillTx/>
+                <a:latin typeface="Calibri"/>
+              </a:rPr>
+              <a:t>Segundo nivel del esquema</a:t>
+            </a:r>
+            <a:endParaRPr lang="en-US" sz="3200" b="0" u="none" strike="noStrike">
               <a:solidFill>
                 <a:schemeClr val="dk1"/>
               </a:solidFill>
@@ -10949,7 +9688,7 @@
             </a:endParaRPr>
           </a:p>
           <a:p>
-            <a:pPr marL="1143000" lvl="2" indent="-228600" algn="l" defTabSz="457200">
+            <a:pPr marL="914400" lvl="2" indent="-288000" algn="l" defTabSz="457200">
               <a:lnSpc>
                 <a:spcPct val="100000"/>
               </a:lnSpc>
@@ -10959,21 +9698,25 @@
               <a:buClr>
                 <a:srgbClr val="000000"/>
               </a:buClr>
-              <a:buFont typeface="Arial"/>
-              <a:buChar char="•"/>
-            </a:pPr>
-            <a:r>
-              <a:rPr lang="en-US" sz="2400" b="0" u="none" strike="noStrike">
-                <a:solidFill>
-                  <a:schemeClr val="dk1"/>
-                </a:solidFill>
-                <a:effectLst/>
-                <a:uFillTx/>
-                <a:latin typeface="Calibri"/>
-              </a:rPr>
-              <a:t>Third level</a:t>
-            </a:r>
-            <a:endParaRPr lang="en-US" sz="2400" b="0" u="none" strike="noStrike">
+              <a:buSzPct val="45000"/>
+              <a:buFont typeface="Wingdings" charset="2"/>
+              <a:buChar char=""/>
+              <a:tabLst>
+                <a:tab pos="0" algn="l"/>
+              </a:tabLst>
+            </a:pPr>
+            <a:r>
+              <a:rPr lang="en-US" sz="3200" b="0" u="none" strike="noStrike">
+                <a:solidFill>
+                  <a:schemeClr val="dk1"/>
+                </a:solidFill>
+                <a:effectLst/>
+                <a:uFillTx/>
+                <a:latin typeface="Calibri"/>
+              </a:rPr>
+              <a:t>Tercer nivel del esquema</a:t>
+            </a:r>
+            <a:endParaRPr lang="en-US" sz="3200" b="0" u="none" strike="noStrike">
               <a:solidFill>
                 <a:schemeClr val="dk1"/>
               </a:solidFill>
@@ -10983,7 +9726,7 @@
             </a:endParaRPr>
           </a:p>
           <a:p>
-            <a:pPr marL="1600200" lvl="3" indent="-228600" algn="l" defTabSz="457200">
+            <a:pPr marL="1371600" lvl="3" indent="-216000" algn="l" defTabSz="457200">
               <a:lnSpc>
                 <a:spcPct val="100000"/>
               </a:lnSpc>
@@ -10993,21 +9736,25 @@
               <a:buClr>
                 <a:srgbClr val="000000"/>
               </a:buClr>
-              <a:buFont typeface="Arial"/>
-              <a:buChar char="–"/>
-            </a:pPr>
-            <a:r>
-              <a:rPr lang="en-US" sz="2000" b="0" u="none" strike="noStrike">
-                <a:solidFill>
-                  <a:schemeClr val="dk1"/>
-                </a:solidFill>
-                <a:effectLst/>
-                <a:uFillTx/>
-                <a:latin typeface="Calibri"/>
-              </a:rPr>
-              <a:t>Fourth level</a:t>
-            </a:r>
-            <a:endParaRPr lang="en-US" sz="2000" b="0" u="none" strike="noStrike">
+              <a:buSzPct val="75000"/>
+              <a:buFont typeface="Symbol" charset="2"/>
+              <a:buChar char=""/>
+              <a:tabLst>
+                <a:tab pos="0" algn="l"/>
+              </a:tabLst>
+            </a:pPr>
+            <a:r>
+              <a:rPr lang="en-US" sz="3200" b="0" u="none" strike="noStrike">
+                <a:solidFill>
+                  <a:schemeClr val="dk1"/>
+                </a:solidFill>
+                <a:effectLst/>
+                <a:uFillTx/>
+                <a:latin typeface="Calibri"/>
+              </a:rPr>
+              <a:t>Cuarto nivel del esquema</a:t>
+            </a:r>
+            <a:endParaRPr lang="en-US" sz="3200" b="0" u="none" strike="noStrike">
               <a:solidFill>
                 <a:schemeClr val="dk1"/>
               </a:solidFill>
@@ -11017,7 +9764,7 @@
             </a:endParaRPr>
           </a:p>
           <a:p>
-            <a:pPr marL="2057400" lvl="4" indent="-228600" algn="l" defTabSz="457200">
+            <a:pPr marL="1828800" lvl="4" indent="-216000" algn="l" defTabSz="457200">
               <a:lnSpc>
                 <a:spcPct val="100000"/>
               </a:lnSpc>
@@ -11027,21 +9774,101 @@
               <a:buClr>
                 <a:srgbClr val="000000"/>
               </a:buClr>
-              <a:buFont typeface="Arial"/>
-              <a:buChar char="»"/>
-            </a:pPr>
-            <a:r>
-              <a:rPr lang="en-US" sz="2000" b="0" u="none" strike="noStrike">
-                <a:solidFill>
-                  <a:schemeClr val="dk1"/>
-                </a:solidFill>
-                <a:effectLst/>
-                <a:uFillTx/>
-                <a:latin typeface="Calibri"/>
-              </a:rPr>
-              <a:t>Fifth level</a:t>
-            </a:r>
-            <a:endParaRPr lang="en-US" sz="2000" b="0" u="none" strike="noStrike">
+              <a:buSzPct val="45000"/>
+              <a:buFont typeface="Wingdings" charset="2"/>
+              <a:buChar char=""/>
+              <a:tabLst>
+                <a:tab pos="0" algn="l"/>
+              </a:tabLst>
+            </a:pPr>
+            <a:r>
+              <a:rPr lang="en-US" sz="3200" b="0" u="none" strike="noStrike">
+                <a:solidFill>
+                  <a:schemeClr val="dk1"/>
+                </a:solidFill>
+                <a:effectLst/>
+                <a:uFillTx/>
+                <a:latin typeface="Calibri"/>
+              </a:rPr>
+              <a:t>Quinto nivel del esquema</a:t>
+            </a:r>
+            <a:endParaRPr lang="en-US" sz="3200" b="0" u="none" strike="noStrike">
+              <a:solidFill>
+                <a:schemeClr val="dk1"/>
+              </a:solidFill>
+              <a:effectLst/>
+              <a:uFillTx/>
+              <a:latin typeface="Calibri"/>
+            </a:endParaRPr>
+          </a:p>
+          <a:p>
+            <a:pPr marL="2286000" lvl="5" indent="-216000" algn="l" defTabSz="457200">
+              <a:lnSpc>
+                <a:spcPct val="100000"/>
+              </a:lnSpc>
+              <a:spcBef>
+                <a:spcPts val="283"/>
+              </a:spcBef>
+              <a:buClr>
+                <a:srgbClr val="000000"/>
+              </a:buClr>
+              <a:buSzPct val="45000"/>
+              <a:buFont typeface="Wingdings" charset="2"/>
+              <a:buChar char=""/>
+              <a:tabLst>
+                <a:tab pos="0" algn="l"/>
+              </a:tabLst>
+            </a:pPr>
+            <a:r>
+              <a:rPr lang="en-US" sz="3200" b="0" u="none" strike="noStrike">
+                <a:solidFill>
+                  <a:schemeClr val="dk1"/>
+                </a:solidFill>
+                <a:effectLst/>
+                <a:uFillTx/>
+                <a:latin typeface="Calibri"/>
+              </a:rPr>
+              <a:t>Sexto nivel del esquema</a:t>
+            </a:r>
+            <a:endParaRPr lang="en-US" sz="3200" b="0" u="none" strike="noStrike">
+              <a:solidFill>
+                <a:schemeClr val="dk1"/>
+              </a:solidFill>
+              <a:effectLst/>
+              <a:uFillTx/>
+              <a:latin typeface="Calibri"/>
+            </a:endParaRPr>
+          </a:p>
+          <a:p>
+            <a:pPr marL="2743200" lvl="6" indent="-216000" algn="l" defTabSz="457200">
+              <a:lnSpc>
+                <a:spcPct val="100000"/>
+              </a:lnSpc>
+              <a:spcBef>
+                <a:spcPts val="283"/>
+              </a:spcBef>
+              <a:buClr>
+                <a:srgbClr val="000000"/>
+              </a:buClr>
+              <a:buSzPct val="45000"/>
+              <a:buFont typeface="Wingdings" charset="2"/>
+              <a:buChar char=""/>
+              <a:tabLst>
+                <a:tab pos="0" algn="l"/>
+              </a:tabLst>
+            </a:pPr>
+            <a:r>
+              <a:rPr lang="en-US" sz="3200" b="0" u="none" strike="noStrike">
+                <a:solidFill>
+                  <a:schemeClr val="dk1"/>
+                </a:solidFill>
+                <a:effectLst/>
+                <a:uFillTx/>
+                <a:latin typeface="Calibri"/>
+              </a:rPr>
+              <a:t>Séptimo nivel del esquema</a:t>
+            </a:r>
+            <a:endParaRPr lang="en-US" sz="3200" b="0" u="none" strike="noStrike">
               <a:solidFill>
                 <a:schemeClr val="dk1"/>
               </a:solidFill>
@@ -11054,7 +9881,91 @@
       </p:sp>
       <p:sp>
         <p:nvSpPr>
-          <p:cNvPr id="47" name="PlaceHolder 3"/>
+          <p:cNvPr id="46" name="PlaceHolder 3"/>
+          <p:cNvSpPr>
+            <a:spLocks noGrp="1"/>
+          </p:cNvSpPr>
+          <p:nvPr>
+            <p:ph type="body"/>
+          </p:nvPr>
+        </p:nvSpPr>
+        <p:spPr>
+          <a:xfrm>
+            <a:off x="1792440" y="5367240"/>
+            <a:ext cx="5484960" cy="803520"/>
+          </a:xfrm>
+          <a:prstGeom prst="rect">
+            <a:avLst/>
+          </a:prstGeom>
+          <a:noFill/>
+          <a:ln w="0">
+            <a:noFill/>
+          </a:ln>
+        </p:spPr>
+        <p:txBody>
+          <a:bodyPr lIns="91440" tIns="45720" rIns="91440" bIns="45720" anchor="t">
+            <a:noAutofit/>
+          </a:bodyPr>
+          <a:lstStyle>
+            <a:lvl1pPr indent="0" algn="l" defTabSz="457200">
+              <a:lnSpc>
+                <a:spcPct val="100000"/>
+              </a:lnSpc>
+              <a:spcBef>
+                <a:spcPts val="281"/>
+              </a:spcBef>
+              <a:buNone/>
+              <a:tabLst>
+                <a:tab pos="0" algn="l"/>
+              </a:tabLst>
+              <a:defRPr lang="en-US" sz="1400" b="0" u="none" strike="noStrike">
+                <a:solidFill>
+                  <a:schemeClr val="dk1"/>
+                </a:solidFill>
+                <a:effectLst/>
+                <a:uFillTx/>
+                <a:latin typeface="Calibri"/>
+              </a:defRPr>
+            </a:lvl1pPr>
+          </a:lstStyle>
+          <a:p>
+            <a:pPr indent="0" algn="l" defTabSz="457200">
+              <a:lnSpc>
+                <a:spcPct val="100000"/>
+              </a:lnSpc>
+              <a:spcBef>
+                <a:spcPts val="281"/>
+              </a:spcBef>
+              <a:buNone/>
+              <a:tabLst>
+                <a:tab pos="0" algn="l"/>
+              </a:tabLst>
+            </a:pPr>
+            <a:r>
+              <a:rPr lang="en-US" sz="1400" b="0" u="none" strike="noStrike">
+                <a:solidFill>
+                  <a:schemeClr val="dk1"/>
+                </a:solidFill>
+                <a:effectLst/>
+                <a:uFillTx/>
+                <a:latin typeface="Calibri"/>
+              </a:rPr>
+              <a:t>Click to edit Master text styles</a:t>
+            </a:r>
+            <a:endParaRPr lang="en-US" sz="1400" b="0" u="none" strike="noStrike">
+              <a:solidFill>
+                <a:schemeClr val="dk1"/>
+              </a:solidFill>
+              <a:effectLst/>
+              <a:uFillTx/>
+              <a:latin typeface="Calibri"/>
+            </a:endParaRPr>
+          </a:p>
+        </p:txBody>
+      </p:sp>
+      <p:sp>
+        <p:nvSpPr>
+          <p:cNvPr id="47" name="PlaceHolder 4"/>
           <p:cNvSpPr>
             <a:spLocks noGrp="1"/>
           </p:cNvSpPr>
@@ -11065,7 +9976,7 @@
         <p:spPr>
           <a:xfrm>
             <a:off x="457200" y="6356520"/>
-            <a:ext cx="2132640" cy="363960"/>
+            <a:ext cx="2132280" cy="363600"/>
           </a:xfrm>
           <a:prstGeom prst="rect">
             <a:avLst/>
@@ -11121,7 +10032,7 @@
                 <a:uFillTx/>
                 <a:latin typeface="Calibri"/>
               </a:rPr>
-              <a:t>&lt;fecha/hora&gt;</a:t>
+              <a:t> </a:t>
             </a:r>
             <a:endParaRPr lang="es-CO" sz="1200" b="0" u="none" strike="noStrike">
               <a:solidFill>
@@ -11136,7 +10047,7 @@
       </p:sp>
       <p:sp>
         <p:nvSpPr>
-          <p:cNvPr id="48" name="PlaceHolder 4"/>
+          <p:cNvPr id="48" name="PlaceHolder 5"/>
           <p:cNvSpPr>
             <a:spLocks noGrp="1"/>
           </p:cNvSpPr>
@@ -11147,7 +10058,7 @@
         <p:spPr>
           <a:xfrm>
             <a:off x="3124080" y="6356520"/>
-            <a:ext cx="2894400" cy="363960"/>
+            <a:ext cx="2894040" cy="363600"/>
           </a:xfrm>
           <a:prstGeom prst="rect">
             <a:avLst/>
@@ -11199,7 +10110,7 @@
                 <a:uFillTx/>
                 <a:latin typeface="Times New Roman"/>
               </a:rPr>
-              <a:t>&lt;pie de página&gt;</a:t>
+              <a:t> </a:t>
             </a:r>
             <a:endParaRPr lang="es-CO" sz="1400" b="0" u="none" strike="noStrike">
               <a:solidFill>
@@ -11214,7 +10125,7 @@
       </p:sp>
       <p:sp>
         <p:nvSpPr>
-          <p:cNvPr id="49" name="PlaceHolder 5"/>
+          <p:cNvPr id="49" name="PlaceHolder 6"/>
           <p:cNvSpPr>
             <a:spLocks noGrp="1"/>
           </p:cNvSpPr>
@@ -11225,7 +10136,7 @@
         <p:spPr>
           <a:xfrm>
             <a:off x="6553080" y="6356520"/>
-            <a:ext cx="2132640" cy="363960"/>
+            <a:ext cx="2132280" cy="363600"/>
           </a:xfrm>
           <a:prstGeom prst="rect">
             <a:avLst/>
@@ -11270,7 +10181,7 @@
                 <a:tab pos="0" algn="l"/>
               </a:tabLst>
             </a:pPr>
-            <a:fld id="{E7218AB8-9F90-4290-BEC6-1E6F3B0F68D1}" type="slidenum">
+            <a:fld id="{3E56B5A8-C69A-40B6-8FAB-DD452D845919}" type="slidenum">
               <a:rPr lang="en-US" sz="1200" b="0" u="none" strike="noStrike">
                 <a:solidFill>
                   <a:schemeClr val="dk1">
@@ -11281,7 +10192,7 @@
                 <a:uFillTx/>
                 <a:latin typeface="Calibri"/>
               </a:rPr>
-              <a:t>&lt;número&gt;</a:t>
+              <a:t>8</a:t>
             </a:fld>
             <a:endParaRPr lang="es-CO" sz="1200" b="0" u="none" strike="noStrike">
               <a:solidFill>
@@ -11343,7 +10254,7 @@
         <a:blipFill rotWithShape="0">
           <a:blip r:embed="rId1"/>
           <a:stretch>
-            <a:fillRect l="-10996" r="-10996"/>
+            <a:fillRect l="-10994" r="-10994"/>
           </a:stretch>
         </a:blipFill>
       </p:bgPr>
@@ -11375,7 +10286,7 @@
         <p:spPr>
           <a:xfrm>
             <a:off x="685800" y="2130480"/>
-            <a:ext cx="7771320" cy="1468800"/>
+            <a:ext cx="7770960" cy="1468440"/>
           </a:xfrm>
           <a:prstGeom prst="rect">
             <a:avLst/>
@@ -11435,7 +10346,7 @@
         <p:spPr>
           <a:xfrm>
             <a:off x="1371600" y="3886200"/>
-            <a:ext cx="6399720" cy="1751400"/>
+            <a:ext cx="6399360" cy="1751040"/>
           </a:xfrm>
           <a:prstGeom prst="rect">
             <a:avLst/>
@@ -11605,7 +10516,7 @@
         <p:spPr>
           <a:xfrm>
             <a:off x="0" y="0"/>
-            <a:ext cx="9142920" cy="6856920"/>
+            <a:ext cx="9142560" cy="6856560"/>
           </a:xfrm>
           <a:prstGeom prst="rect">
             <a:avLst/>
@@ -11659,7 +10570,7 @@
         <p:spPr>
           <a:xfrm>
             <a:off x="0" y="0"/>
-            <a:ext cx="9000000" cy="6856920"/>
+            <a:ext cx="8999640" cy="6856560"/>
           </a:xfrm>
           <a:prstGeom prst="rect">
             <a:avLst/>
@@ -11714,7 +10625,7 @@
         <p:spPr>
           <a:xfrm>
             <a:off x="113040" y="82800"/>
-            <a:ext cx="9246960" cy="6937200"/>
+            <a:ext cx="9246600" cy="6936840"/>
           </a:xfrm>
           <a:prstGeom prst="rect">
             <a:avLst/>
@@ -11781,9 +10692,9 @@
         <p:grpSpPr>
           <a:xfrm>
             <a:off x="0" y="203040"/>
-            <a:ext cx="1431720" cy="708480"/>
+            <a:ext cx="1431360" cy="708120"/>
             <a:chOff x="0" y="203040"/>
-            <a:chExt cx="1431720" cy="708480"/>
+            <a:chExt cx="1431360" cy="708120"/>
           </a:xfrm>
         </p:grpSpPr>
         <p:sp>
@@ -11801,15 +10712,15 @@
           <p:spPr>
             <a:xfrm>
               <a:off x="0" y="203040"/>
-              <a:ext cx="1431720" cy="273600"/>
+              <a:ext cx="1431360" cy="273240"/>
             </a:xfrm>
             <a:custGeom>
               <a:avLst/>
               <a:gdLst>
-                <a:gd name="textAreaLeft" fmla="*/ 0 w 1431720"/>
-                <a:gd name="textAreaRight" fmla="*/ 1432800 w 1431720"/>
-                <a:gd name="textAreaTop" fmla="*/ 0 h 273600"/>
-                <a:gd name="textAreaBottom" fmla="*/ 274680 h 273600"/>
+                <a:gd name="textAreaLeft" fmla="*/ 0 w 1431360"/>
+                <a:gd name="textAreaRight" fmla="*/ 1432800 w 1431360"/>
+                <a:gd name="textAreaTop" fmla="*/ 0 h 273240"/>
+                <a:gd name="textAreaBottom" fmla="*/ 274680 h 273240"/>
                 <a:gd name="GluePoint1X" fmla="*/ 1489414 w 1990951"/>
                 <a:gd name="GluePoint1Y" fmla="*/ 286231 h 286230"/>
                 <a:gd name="GluePoint2X" fmla="*/ 1243712 w 1990951"/>
@@ -12009,15 +10920,15 @@
           <p:spPr>
             <a:xfrm>
               <a:off x="0" y="637920"/>
-              <a:ext cx="1431720" cy="273600"/>
+              <a:ext cx="1431360" cy="273240"/>
             </a:xfrm>
             <a:custGeom>
               <a:avLst/>
               <a:gdLst>
-                <a:gd name="textAreaLeft" fmla="*/ 0 w 1431720"/>
-                <a:gd name="textAreaRight" fmla="*/ 1432800 w 1431720"/>
-                <a:gd name="textAreaTop" fmla="*/ 0 h 273600"/>
-                <a:gd name="textAreaBottom" fmla="*/ 274680 h 273600"/>
+                <a:gd name="textAreaLeft" fmla="*/ 0 w 1431360"/>
+                <a:gd name="textAreaRight" fmla="*/ 1432800 w 1431360"/>
+                <a:gd name="textAreaTop" fmla="*/ 0 h 273240"/>
+                <a:gd name="textAreaBottom" fmla="*/ 274680 h 273240"/>
                 <a:gd name="GluePoint1X" fmla="*/ 1489414 w 1990951"/>
                 <a:gd name="GluePoint1Y" fmla="*/ 286231 h 286230"/>
                 <a:gd name="GluePoint2X" fmla="*/ 1243712 w 1990951"/>
@@ -12218,7 +11129,7 @@
         <p:spPr>
           <a:xfrm>
             <a:off x="304560" y="4752360"/>
-            <a:ext cx="272520" cy="363960"/>
+            <a:ext cx="272160" cy="363600"/>
           </a:xfrm>
           <a:prstGeom prst="ellipse">
             <a:avLst/>
@@ -12278,7 +11189,7 @@
         <p:spPr>
           <a:xfrm>
             <a:off x="304560" y="4752360"/>
-            <a:ext cx="272520" cy="363960"/>
+            <a:ext cx="272160" cy="363600"/>
           </a:xfrm>
           <a:prstGeom prst="ellipse">
             <a:avLst/>
@@ -12340,9 +11251,9 @@
         <p:grpSpPr>
           <a:xfrm>
             <a:off x="3082320" y="5540040"/>
-            <a:ext cx="730080" cy="974160"/>
+            <a:ext cx="729720" cy="973800"/>
             <a:chOff x="3082320" y="5540040"/>
-            <a:chExt cx="730080" cy="974160"/>
+            <a:chExt cx="729720" cy="973800"/>
           </a:xfrm>
         </p:grpSpPr>
         <p:sp>
@@ -12360,15 +11271,15 @@
           <p:spPr>
             <a:xfrm>
               <a:off x="3123360" y="5594760"/>
-              <a:ext cx="154080" cy="205920"/>
+              <a:ext cx="153720" cy="205560"/>
             </a:xfrm>
             <a:custGeom>
               <a:avLst/>
               <a:gdLst>
-                <a:gd name="textAreaLeft" fmla="*/ 0 w 154080"/>
-                <a:gd name="textAreaRight" fmla="*/ 155160 w 154080"/>
-                <a:gd name="textAreaTop" fmla="*/ 0 h 205920"/>
-                <a:gd name="textAreaBottom" fmla="*/ 207000 h 205920"/>
+                <a:gd name="textAreaLeft" fmla="*/ 0 w 153720"/>
+                <a:gd name="textAreaRight" fmla="*/ 155160 w 153720"/>
+                <a:gd name="textAreaTop" fmla="*/ 0 h 205560"/>
+                <a:gd name="textAreaBottom" fmla="*/ 207000 h 205560"/>
                 <a:gd name="GluePoint1X" fmla="*/ 112967 w 112966"/>
                 <a:gd name="GluePoint1Y" fmla="*/ 0 h 112966"/>
                 <a:gd name="GluePoint2X" fmla="*/ 0 w 112966"/>
@@ -12450,15 +11361,15 @@
           <p:spPr>
             <a:xfrm>
               <a:off x="3084840" y="5543280"/>
-              <a:ext cx="315360" cy="420840"/>
+              <a:ext cx="315000" cy="420480"/>
             </a:xfrm>
             <a:custGeom>
               <a:avLst/>
               <a:gdLst>
-                <a:gd name="textAreaLeft" fmla="*/ 0 w 315360"/>
-                <a:gd name="textAreaRight" fmla="*/ 316440 w 315360"/>
-                <a:gd name="textAreaTop" fmla="*/ 0 h 420840"/>
-                <a:gd name="textAreaBottom" fmla="*/ 421920 h 420840"/>
+                <a:gd name="textAreaLeft" fmla="*/ 0 w 315000"/>
+                <a:gd name="textAreaRight" fmla="*/ 316440 w 315000"/>
+                <a:gd name="textAreaTop" fmla="*/ 0 h 420480"/>
+                <a:gd name="textAreaBottom" fmla="*/ 421920 h 420480"/>
                 <a:gd name="GluePoint1X" fmla="*/ 230314 w 230314"/>
                 <a:gd name="GluePoint1Y" fmla="*/ 0 h 230314"/>
                 <a:gd name="GluePoint2X" fmla="*/ 0 w 230314"/>
@@ -12558,15 +11469,15 @@
           <p:spPr>
             <a:xfrm>
               <a:off x="3082320" y="5540040"/>
-              <a:ext cx="403200" cy="537840"/>
+              <a:ext cx="402840" cy="537480"/>
             </a:xfrm>
             <a:custGeom>
               <a:avLst/>
               <a:gdLst>
-                <a:gd name="textAreaLeft" fmla="*/ 0 w 403200"/>
-                <a:gd name="textAreaRight" fmla="*/ 404280 w 403200"/>
-                <a:gd name="textAreaTop" fmla="*/ 0 h 537840"/>
-                <a:gd name="textAreaBottom" fmla="*/ 538920 h 537840"/>
+                <a:gd name="textAreaLeft" fmla="*/ 0 w 402840"/>
+                <a:gd name="textAreaRight" fmla="*/ 404280 w 402840"/>
+                <a:gd name="textAreaTop" fmla="*/ 0 h 537480"/>
+                <a:gd name="textAreaBottom" fmla="*/ 538920 h 537480"/>
                 <a:gd name="GluePoint1X" fmla="*/ 294132 w 294131"/>
                 <a:gd name="GluePoint1Y" fmla="*/ 1238 h 294131"/>
                 <a:gd name="GluePoint2X" fmla="*/ 1238 w 294131"/>
@@ -12666,15 +11577,15 @@
           <p:spPr>
             <a:xfrm>
               <a:off x="3093120" y="5554080"/>
-              <a:ext cx="462240" cy="617040"/>
+              <a:ext cx="461880" cy="616680"/>
             </a:xfrm>
             <a:custGeom>
               <a:avLst/>
               <a:gdLst>
-                <a:gd name="textAreaLeft" fmla="*/ 0 w 462240"/>
-                <a:gd name="textAreaRight" fmla="*/ 463320 w 462240"/>
-                <a:gd name="textAreaTop" fmla="*/ 0 h 617040"/>
-                <a:gd name="textAreaBottom" fmla="*/ 618120 h 617040"/>
+                <a:gd name="textAreaLeft" fmla="*/ 0 w 461880"/>
+                <a:gd name="textAreaRight" fmla="*/ 463320 w 461880"/>
+                <a:gd name="textAreaTop" fmla="*/ 0 h 616680"/>
+                <a:gd name="textAreaBottom" fmla="*/ 618120 h 616680"/>
                 <a:gd name="GluePoint1X" fmla="*/ 337185 w 337184"/>
                 <a:gd name="GluePoint1Y" fmla="*/ 3905 h 337280"/>
                 <a:gd name="GluePoint2X" fmla="*/ 3810 w 337184"/>
@@ -12774,15 +11685,15 @@
           <p:spPr>
             <a:xfrm>
               <a:off x="3115080" y="5583600"/>
-              <a:ext cx="500040" cy="667080"/>
+              <a:ext cx="499680" cy="666720"/>
             </a:xfrm>
             <a:custGeom>
               <a:avLst/>
               <a:gdLst>
-                <a:gd name="textAreaLeft" fmla="*/ 0 w 500040"/>
-                <a:gd name="textAreaRight" fmla="*/ 501120 w 500040"/>
-                <a:gd name="textAreaTop" fmla="*/ 0 h 667080"/>
-                <a:gd name="textAreaBottom" fmla="*/ 668160 h 667080"/>
+                <a:gd name="textAreaLeft" fmla="*/ 0 w 499680"/>
+                <a:gd name="textAreaRight" fmla="*/ 501120 w 499680"/>
+                <a:gd name="textAreaTop" fmla="*/ 0 h 666720"/>
+                <a:gd name="textAreaBottom" fmla="*/ 668160 h 666720"/>
                 <a:gd name="GluePoint1X" fmla="*/ 364617 w 364617"/>
                 <a:gd name="GluePoint1Y" fmla="*/ 5620 h 364617"/>
                 <a:gd name="GluePoint2X" fmla="*/ 5620 w 364617"/>
@@ -12882,15 +11793,15 @@
           <p:spPr>
             <a:xfrm>
               <a:off x="3145320" y="5624280"/>
-              <a:ext cx="521280" cy="695520"/>
+              <a:ext cx="520920" cy="695160"/>
             </a:xfrm>
             <a:custGeom>
               <a:avLst/>
               <a:gdLst>
-                <a:gd name="textAreaLeft" fmla="*/ 0 w 521280"/>
-                <a:gd name="textAreaRight" fmla="*/ 522360 w 521280"/>
-                <a:gd name="textAreaTop" fmla="*/ 0 h 695520"/>
-                <a:gd name="textAreaBottom" fmla="*/ 696600 h 695520"/>
+                <a:gd name="textAreaLeft" fmla="*/ 0 w 520920"/>
+                <a:gd name="textAreaRight" fmla="*/ 522360 w 520920"/>
+                <a:gd name="textAreaTop" fmla="*/ 0 h 695160"/>
+                <a:gd name="textAreaBottom" fmla="*/ 696600 h 695160"/>
                 <a:gd name="GluePoint1X" fmla="*/ 380238 w 380238"/>
                 <a:gd name="GluePoint1Y" fmla="*/ 7239 h 380238"/>
                 <a:gd name="GluePoint2X" fmla="*/ 7239 w 380238"/>
@@ -12990,15 +11901,15 @@
           <p:spPr>
             <a:xfrm>
               <a:off x="3183120" y="5674680"/>
-              <a:ext cx="528120" cy="704520"/>
+              <a:ext cx="527760" cy="704160"/>
             </a:xfrm>
             <a:custGeom>
               <a:avLst/>
               <a:gdLst>
-                <a:gd name="textAreaLeft" fmla="*/ 0 w 528120"/>
-                <a:gd name="textAreaRight" fmla="*/ 529200 w 528120"/>
-                <a:gd name="textAreaTop" fmla="*/ 0 h 704520"/>
-                <a:gd name="textAreaBottom" fmla="*/ 705600 h 704520"/>
+                <a:gd name="textAreaLeft" fmla="*/ 0 w 527760"/>
+                <a:gd name="textAreaRight" fmla="*/ 529200 w 527760"/>
+                <a:gd name="textAreaTop" fmla="*/ 0 h 704160"/>
+                <a:gd name="textAreaBottom" fmla="*/ 705600 h 704160"/>
                 <a:gd name="GluePoint1X" fmla="*/ 380905 w 385191"/>
                 <a:gd name="GluePoint1Y" fmla="*/ 4286 h 385191"/>
                 <a:gd name="GluePoint2X" fmla="*/ 385191 w 385191"/>
@@ -13114,15 +12025,15 @@
           <p:spPr>
             <a:xfrm>
               <a:off x="3228480" y="5734080"/>
-              <a:ext cx="520920" cy="695520"/>
+              <a:ext cx="520560" cy="695160"/>
             </a:xfrm>
             <a:custGeom>
               <a:avLst/>
               <a:gdLst>
-                <a:gd name="textAreaLeft" fmla="*/ 0 w 520920"/>
-                <a:gd name="textAreaRight" fmla="*/ 522000 w 520920"/>
-                <a:gd name="textAreaTop" fmla="*/ 0 h 695520"/>
-                <a:gd name="textAreaBottom" fmla="*/ 696600 h 695520"/>
+                <a:gd name="textAreaLeft" fmla="*/ 0 w 520560"/>
+                <a:gd name="textAreaRight" fmla="*/ 522000 w 520560"/>
+                <a:gd name="textAreaTop" fmla="*/ 0 h 695160"/>
+                <a:gd name="textAreaBottom" fmla="*/ 696600 h 695160"/>
                 <a:gd name="GluePoint1X" fmla="*/ 372428 w 379761"/>
                 <a:gd name="GluePoint1Y" fmla="*/ 0 h 380237"/>
                 <a:gd name="GluePoint2X" fmla="*/ 379762 w 379761"/>
@@ -13214,15 +12125,15 @@
           <p:spPr>
             <a:xfrm>
               <a:off x="3279600" y="5802840"/>
-              <a:ext cx="500040" cy="667440"/>
+              <a:ext cx="499680" cy="667080"/>
             </a:xfrm>
             <a:custGeom>
               <a:avLst/>
               <a:gdLst>
-                <a:gd name="textAreaLeft" fmla="*/ 0 w 500040"/>
-                <a:gd name="textAreaRight" fmla="*/ 501120 w 500040"/>
-                <a:gd name="textAreaTop" fmla="*/ 0 h 667440"/>
-                <a:gd name="textAreaBottom" fmla="*/ 668520 h 667440"/>
+                <a:gd name="textAreaLeft" fmla="*/ 0 w 499680"/>
+                <a:gd name="textAreaRight" fmla="*/ 501120 w 499680"/>
+                <a:gd name="textAreaTop" fmla="*/ 0 h 667080"/>
+                <a:gd name="textAreaBottom" fmla="*/ 668520 h 667080"/>
                 <a:gd name="GluePoint1X" fmla="*/ 359188 w 364807"/>
                 <a:gd name="GluePoint1Y" fmla="*/ 0 h 364807"/>
                 <a:gd name="GluePoint2X" fmla="*/ 364808 w 364807"/>
@@ -13314,15 +12225,15 @@
           <p:spPr>
             <a:xfrm>
               <a:off x="3339360" y="5882760"/>
-              <a:ext cx="462240" cy="617040"/>
+              <a:ext cx="461880" cy="616680"/>
             </a:xfrm>
             <a:custGeom>
               <a:avLst/>
               <a:gdLst>
-                <a:gd name="textAreaLeft" fmla="*/ 0 w 462240"/>
-                <a:gd name="textAreaRight" fmla="*/ 463320 w 462240"/>
-                <a:gd name="textAreaTop" fmla="*/ 0 h 617040"/>
-                <a:gd name="textAreaBottom" fmla="*/ 618120 h 617040"/>
+                <a:gd name="textAreaLeft" fmla="*/ 0 w 461880"/>
+                <a:gd name="textAreaRight" fmla="*/ 463320 w 461880"/>
+                <a:gd name="textAreaTop" fmla="*/ 0 h 616680"/>
+                <a:gd name="textAreaBottom" fmla="*/ 618120 h 616680"/>
                 <a:gd name="GluePoint1X" fmla="*/ 333470 w 337280"/>
                 <a:gd name="GluePoint1Y" fmla="*/ 0 h 337280"/>
                 <a:gd name="GluePoint2X" fmla="*/ 337280 w 337280"/>
@@ -13414,15 +12325,15 @@
           <p:spPr>
             <a:xfrm>
               <a:off x="3409200" y="5976360"/>
-              <a:ext cx="403200" cy="537840"/>
+              <a:ext cx="402840" cy="537480"/>
             </a:xfrm>
             <a:custGeom>
               <a:avLst/>
               <a:gdLst>
-                <a:gd name="textAreaLeft" fmla="*/ 0 w 403200"/>
-                <a:gd name="textAreaRight" fmla="*/ 404280 w 403200"/>
-                <a:gd name="textAreaTop" fmla="*/ 0 h 537840"/>
-                <a:gd name="textAreaBottom" fmla="*/ 538920 h 537840"/>
+                <a:gd name="textAreaLeft" fmla="*/ 0 w 402840"/>
+                <a:gd name="textAreaRight" fmla="*/ 404280 w 402840"/>
+                <a:gd name="textAreaTop" fmla="*/ 0 h 537480"/>
+                <a:gd name="textAreaBottom" fmla="*/ 538920 h 537480"/>
                 <a:gd name="GluePoint1X" fmla="*/ 292989 w 294227"/>
                 <a:gd name="GluePoint1Y" fmla="*/ 0 h 294132"/>
                 <a:gd name="GluePoint2X" fmla="*/ 294227 w 294227"/>
@@ -13514,15 +12425,15 @@
           <p:spPr>
             <a:xfrm>
               <a:off x="3494520" y="6089760"/>
-              <a:ext cx="315360" cy="420840"/>
+              <a:ext cx="315000" cy="420480"/>
             </a:xfrm>
             <a:custGeom>
               <a:avLst/>
               <a:gdLst>
-                <a:gd name="textAreaLeft" fmla="*/ 0 w 315360"/>
-                <a:gd name="textAreaRight" fmla="*/ 316440 w 315360"/>
-                <a:gd name="textAreaTop" fmla="*/ 0 h 420840"/>
-                <a:gd name="textAreaBottom" fmla="*/ 421920 h 420840"/>
+                <a:gd name="textAreaLeft" fmla="*/ 0 w 315000"/>
+                <a:gd name="textAreaRight" fmla="*/ 316440 w 315000"/>
+                <a:gd name="textAreaTop" fmla="*/ 0 h 420480"/>
+                <a:gd name="textAreaBottom" fmla="*/ 421920 h 420480"/>
                 <a:gd name="GluePoint1X" fmla="*/ 230315 w 230314"/>
                 <a:gd name="GluePoint1Y" fmla="*/ 0 h 230314"/>
                 <a:gd name="GluePoint2X" fmla="*/ 226886 w 230314"/>
@@ -13614,15 +12525,15 @@
           <p:spPr>
             <a:xfrm>
               <a:off x="3617280" y="6253200"/>
-              <a:ext cx="154080" cy="205560"/>
+              <a:ext cx="153720" cy="205200"/>
             </a:xfrm>
             <a:custGeom>
               <a:avLst/>
               <a:gdLst>
-                <a:gd name="textAreaLeft" fmla="*/ 0 w 154080"/>
-                <a:gd name="textAreaRight" fmla="*/ 155160 w 154080"/>
-                <a:gd name="textAreaTop" fmla="*/ 0 h 205560"/>
-                <a:gd name="textAreaBottom" fmla="*/ 206640 h 205560"/>
+                <a:gd name="textAreaLeft" fmla="*/ 0 w 153720"/>
+                <a:gd name="textAreaRight" fmla="*/ 155160 w 153720"/>
+                <a:gd name="textAreaTop" fmla="*/ 0 h 205200"/>
+                <a:gd name="textAreaBottom" fmla="*/ 206640 h 205200"/>
                 <a:gd name="GluePoint1X" fmla="*/ 112871 w 112871"/>
                 <a:gd name="GluePoint1Y" fmla="*/ 0 h 112871"/>
                 <a:gd name="GluePoint2X" fmla="*/ 0 w 112871"/>
@@ -13732,7 +12643,7 @@
         <p:spPr>
           <a:xfrm>
             <a:off x="628560" y="5586120"/>
-            <a:ext cx="5194080" cy="803160"/>
+            <a:ext cx="5193720" cy="802800"/>
           </a:xfrm>
           <a:prstGeom prst="rect">
             <a:avLst/>
@@ -13791,7 +12702,7 @@
         <p:spPr>
           <a:xfrm>
             <a:off x="5823720" y="5586120"/>
-            <a:ext cx="2690640" cy="803160"/>
+            <a:ext cx="2690280" cy="802800"/>
           </a:xfrm>
           <a:prstGeom prst="rect">
             <a:avLst/>
@@ -13854,7 +12765,7 @@
         <p:spPr>
           <a:xfrm>
             <a:off x="0" y="0"/>
-            <a:ext cx="9142920" cy="5278680"/>
+            <a:ext cx="9142560" cy="5278320"/>
           </a:xfrm>
           <a:prstGeom prst="rect">
             <a:avLst/>
@@ -13879,10 +12790,10 @@
         </p:nvGrpSpPr>
         <p:grpSpPr>
           <a:xfrm>
-            <a:off x="-5400" y="5194440"/>
-            <a:ext cx="9155880" cy="122400"/>
-            <a:chOff x="-5400" y="5194440"/>
-            <a:chExt cx="9155880" cy="122400"/>
+            <a:off x="-6120" y="5194800"/>
+            <a:ext cx="9156240" cy="122040"/>
+            <a:chOff x="-6120" y="5194800"/>
+            <a:chExt cx="9156240" cy="122040"/>
           </a:xfrm>
         </p:grpSpPr>
         <p:sp>
@@ -13899,8 +12810,8 @@
           </p:nvSpPr>
           <p:spPr>
             <a:xfrm flipH="1" rot="5400000">
-              <a:off x="4510080" y="678240"/>
-              <a:ext cx="122400" cy="9154440"/>
+              <a:off x="4509720" y="678600"/>
+              <a:ext cx="122040" cy="9154080"/>
             </a:xfrm>
             <a:prstGeom prst="rect">
               <a:avLst/>
@@ -13914,7 +12825,7 @@
                   <a:srgbClr val="C0504D"/>
                 </a:gs>
               </a:gsLst>
-              <a:lin ang="14400000"/>
+              <a:lin ang="18000000"/>
             </a:gradFill>
             <a:ln>
               <a:noFill/>
@@ -13964,8 +12875,8 @@
           </p:nvSpPr>
           <p:spPr>
             <a:xfrm rot="16200000">
-              <a:off x="6866640" y="3033000"/>
-              <a:ext cx="122400" cy="4444920"/>
+              <a:off x="6866640" y="3033360"/>
+              <a:ext cx="122040" cy="4444560"/>
             </a:xfrm>
             <a:prstGeom prst="rect">
               <a:avLst/>
@@ -14068,7 +12979,7 @@
         <p:spPr>
           <a:xfrm>
             <a:off x="5573520" y="180000"/>
-            <a:ext cx="2525760" cy="518040"/>
+            <a:ext cx="2525400" cy="517680"/>
           </a:xfrm>
           <a:prstGeom prst="rect">
             <a:avLst/>
@@ -14128,7 +13039,7 @@
         <p:spPr>
           <a:xfrm>
             <a:off x="0" y="0"/>
-            <a:ext cx="4319280" cy="6856920"/>
+            <a:ext cx="4318920" cy="6856560"/>
           </a:xfrm>
           <a:prstGeom prst="rect">
             <a:avLst/>
@@ -14153,8 +13064,8 @@
         </p:nvSpPr>
         <p:spPr>
           <a:xfrm rot="5400000">
-            <a:off x="1956960" y="3270240"/>
-            <a:ext cx="1629720" cy="5541480"/>
+            <a:off x="1957320" y="3269880"/>
+            <a:ext cx="1629360" cy="5541120"/>
           </a:xfrm>
           <a:prstGeom prst="rect">
             <a:avLst/>
@@ -14220,8 +13131,8 @@
         </p:nvSpPr>
         <p:spPr>
           <a:xfrm flipH="1" flipV="1" rot="5400000">
-            <a:off x="-2296440" y="2294640"/>
-            <a:ext cx="6853320" cy="2261160"/>
+            <a:off x="-2296080" y="2294640"/>
+            <a:ext cx="6852960" cy="2260800"/>
           </a:xfrm>
           <a:prstGeom prst="rect">
             <a:avLst/>
@@ -14237,7 +13148,7 @@
                 </a:srgbClr>
               </a:gs>
             </a:gsLst>
-            <a:lin ang="20400000"/>
+            <a:lin ang="9600000"/>
           </a:gradFill>
           <a:ln w="12700">
             <a:noFill/>
@@ -14287,8 +13198,8 @@
         </p:nvSpPr>
         <p:spPr>
           <a:xfrm rot="10800000">
-            <a:off x="3347280" y="4426200"/>
-            <a:ext cx="2195280" cy="2431800"/>
+            <a:off x="3347640" y="4426560"/>
+            <a:ext cx="2194920" cy="2431440"/>
           </a:xfrm>
           <a:prstGeom prst="rect">
             <a:avLst/>
@@ -14355,7 +13266,7 @@
         <p:spPr>
           <a:xfrm>
             <a:off x="4500000" y="720000"/>
-            <a:ext cx="4499280" cy="5939280"/>
+            <a:ext cx="4498920" cy="5938920"/>
           </a:xfrm>
           <a:prstGeom prst="rect">
             <a:avLst/>
@@ -14453,19 +13364,7 @@
                 <a:latin typeface="Calibri"/>
                 <a:ea typeface="Microsoft YaHei"/>
               </a:rPr>
-              <a:t>Concevoir et développer un App qui permet d’analyser des données </a:t>
-            </a:r>
-            <a:r>
-              <a:rPr lang="en-CA" sz="2400" b="0" u="none" strike="noStrike">
-                <a:solidFill>
-                  <a:schemeClr val="dk1"/>
-                </a:solidFill>
-                <a:effectLst/>
-                <a:uFillTx/>
-                <a:latin typeface="Calibri"/>
-                <a:ea typeface="Microsoft YaHei"/>
-              </a:rPr>
-              <a:t>historiques des Stocks de manière simple.</a:t>
+              <a:t>Concevoir et développer un App qui permet d’analyser des données historiques des Stocks de manière simple.</a:t>
             </a:r>
             <a:endParaRPr lang="en-US" sz="2400" b="0" u="none" strike="noStrike">
               <a:solidFill>
@@ -14525,19 +13424,7 @@
                 <a:latin typeface="Calibri"/>
                 <a:ea typeface="Microsoft YaHei"/>
               </a:rPr>
-              <a:t>Realisée en suivant ce qu'on a apris pendant le cours </a:t>
-            </a:r>
-            <a:r>
-              <a:rPr lang="en-CA" sz="2400" b="0" u="none" strike="noStrike">
-                <a:solidFill>
-                  <a:schemeClr val="dk1"/>
-                </a:solidFill>
-                <a:effectLst/>
-                <a:uFillTx/>
-                <a:latin typeface="Calibri"/>
-                <a:ea typeface="Microsoft YaHei"/>
-              </a:rPr>
-              <a:t>d'Implémentation d'un Sysème d'Information:</a:t>
+              <a:t>Realisée en suivant ce qu'on a apris pendant le cours d'Implémentation d'un Sysème d'Information:</a:t>
             </a:r>
             <a:endParaRPr lang="en-US" sz="2400" b="0" u="none" strike="noStrike">
               <a:solidFill>
@@ -14693,19 +13580,7 @@
                 <a:latin typeface="Calibri"/>
                 <a:ea typeface="Microsoft YaHei"/>
               </a:rPr>
-              <a:t>Organisation structurée du code et séparation des </a:t>
-            </a:r>
-            <a:r>
-              <a:rPr lang="en-CA" sz="2400" b="0" u="none" strike="noStrike">
-                <a:solidFill>
-                  <a:schemeClr val="dk1"/>
-                </a:solidFill>
-                <a:effectLst/>
-                <a:uFillTx/>
-                <a:latin typeface="Calibri"/>
-                <a:ea typeface="Microsoft YaHei"/>
-              </a:rPr>
-              <a:t>responsabilités</a:t>
+              <a:t>Organisation structurée du code et séparation des responsabilités</a:t>
             </a:r>
             <a:endParaRPr lang="en-US" sz="2400" b="0" u="none" strike="noStrike">
               <a:solidFill>
@@ -14885,7 +13760,7 @@
         <p:spPr>
           <a:xfrm>
             <a:off x="5040000" y="184320"/>
-            <a:ext cx="3367800" cy="714960"/>
+            <a:ext cx="3367440" cy="714600"/>
           </a:xfrm>
           <a:prstGeom prst="rect">
             <a:avLst/>
@@ -14945,7 +13820,7 @@
         <p:spPr>
           <a:xfrm>
             <a:off x="0" y="0"/>
-            <a:ext cx="4570920" cy="6856920"/>
+            <a:ext cx="4570560" cy="6856560"/>
           </a:xfrm>
           <a:prstGeom prst="rect">
             <a:avLst/>
@@ -14971,9 +13846,9 @@
         <p:grpSpPr>
           <a:xfrm>
             <a:off x="0" y="0"/>
-            <a:ext cx="91440" cy="6856920"/>
+            <a:ext cx="91080" cy="6856560"/>
             <a:chOff x="0" y="0"/>
-            <a:chExt cx="91440" cy="6856920"/>
+            <a:chExt cx="91080" cy="6856560"/>
           </a:xfrm>
         </p:grpSpPr>
         <p:sp>
@@ -14991,7 +13866,7 @@
           <p:spPr>
             <a:xfrm>
               <a:off x="0" y="0"/>
-              <a:ext cx="91440" cy="6856920"/>
+              <a:ext cx="91080" cy="6856560"/>
             </a:xfrm>
             <a:prstGeom prst="rect">
               <a:avLst/>
@@ -15056,7 +13931,7 @@
           <p:spPr>
             <a:xfrm>
               <a:off x="0" y="4139640"/>
-              <a:ext cx="91440" cy="2717280"/>
+              <a:ext cx="91080" cy="2716920"/>
             </a:xfrm>
             <a:prstGeom prst="rect">
               <a:avLst/>
@@ -15122,7 +13997,7 @@
         <p:spPr>
           <a:xfrm>
             <a:off x="4680000" y="1080000"/>
-            <a:ext cx="4139280" cy="5579280"/>
+            <a:ext cx="4138920" cy="5578920"/>
           </a:xfrm>
           <a:prstGeom prst="rect">
             <a:avLst/>
@@ -15301,7 +14176,7 @@
         <p:spPr>
           <a:xfrm>
             <a:off x="0" y="651600"/>
-            <a:ext cx="9142920" cy="735480"/>
+            <a:ext cx="9142560" cy="735120"/>
           </a:xfrm>
           <a:prstGeom prst="rect">
             <a:avLst/>
@@ -15356,7 +14231,7 @@
         <p:spPr>
           <a:xfrm>
             <a:off x="417240" y="643320"/>
-            <a:ext cx="8407080" cy="743760"/>
+            <a:ext cx="8406720" cy="743400"/>
           </a:xfrm>
           <a:prstGeom prst="rect">
             <a:avLst/>
@@ -15415,7 +14290,7 @@
         <p:spPr>
           <a:xfrm>
             <a:off x="1800000" y="1643400"/>
-            <a:ext cx="5399280" cy="4475880"/>
+            <a:ext cx="5398920" cy="4475520"/>
           </a:xfrm>
           <a:prstGeom prst="rect">
             <a:avLst/>
@@ -15478,7 +14353,7 @@
         <p:spPr>
           <a:xfrm>
             <a:off x="0" y="651600"/>
-            <a:ext cx="9142920" cy="735480"/>
+            <a:ext cx="9142560" cy="735120"/>
           </a:xfrm>
           <a:prstGeom prst="rect">
             <a:avLst/>
@@ -15533,7 +14408,7 @@
         <p:spPr>
           <a:xfrm>
             <a:off x="417240" y="643320"/>
-            <a:ext cx="8407080" cy="743760"/>
+            <a:ext cx="8406720" cy="743400"/>
           </a:xfrm>
           <a:prstGeom prst="rect">
             <a:avLst/>
@@ -15592,7 +14467,7 @@
         <p:spPr>
           <a:xfrm>
             <a:off x="0" y="1891800"/>
-            <a:ext cx="9142920" cy="3867480"/>
+            <a:ext cx="9142560" cy="3867120"/>
           </a:xfrm>
           <a:prstGeom prst="rect">
             <a:avLst/>
@@ -15655,7 +14530,7 @@
         <p:spPr>
           <a:xfrm>
             <a:off x="0" y="0"/>
-            <a:ext cx="9142920" cy="6856920"/>
+            <a:ext cx="9142560" cy="6856560"/>
           </a:xfrm>
           <a:prstGeom prst="rect">
             <a:avLst/>
@@ -15709,7 +14584,7 @@
         <p:spPr>
           <a:xfrm>
             <a:off x="0" y="0"/>
-            <a:ext cx="6390720" cy="2284920"/>
+            <a:ext cx="6390360" cy="2284560"/>
           </a:xfrm>
           <a:prstGeom prst="rect">
             <a:avLst/>
@@ -15768,7 +14643,7 @@
         <p:spPr>
           <a:xfrm>
             <a:off x="540000" y="170280"/>
-            <a:ext cx="3484080" cy="909360"/>
+            <a:ext cx="3483720" cy="909000"/>
           </a:xfrm>
           <a:prstGeom prst="rect">
             <a:avLst/>
@@ -15827,7 +14702,7 @@
         <p:spPr>
           <a:xfrm>
             <a:off x="180000" y="900000"/>
-            <a:ext cx="3875400" cy="5455440"/>
+            <a:ext cx="3875040" cy="5455080"/>
           </a:xfrm>
           <a:prstGeom prst="rect">
             <a:avLst/>
@@ -16005,7 +14880,7 @@
         <p:spPr>
           <a:xfrm>
             <a:off x="4572000" y="0"/>
-            <a:ext cx="4575960" cy="6856920"/>
+            <a:ext cx="4575600" cy="6856560"/>
           </a:xfrm>
           <a:prstGeom prst="rect">
             <a:avLst/>
@@ -16068,7 +14943,7 @@
         <p:spPr>
           <a:xfrm>
             <a:off x="118800" y="0"/>
-            <a:ext cx="1500840" cy="1979640"/>
+            <a:ext cx="1500480" cy="1979280"/>
           </a:xfrm>
           <a:prstGeom prst="flowChartDocument">
             <a:avLst/>
@@ -16123,7 +14998,7 @@
         <p:spPr>
           <a:xfrm>
             <a:off x="118800" y="0"/>
-            <a:ext cx="2129040" cy="1628640"/>
+            <a:ext cx="2128680" cy="1628280"/>
           </a:xfrm>
           <a:prstGeom prst="rect">
             <a:avLst/>
@@ -16178,7 +15053,7 @@
         <p:spPr>
           <a:xfrm>
             <a:off x="1830600" y="180000"/>
-            <a:ext cx="6269040" cy="1079640"/>
+            <a:ext cx="6268680" cy="1079280"/>
           </a:xfrm>
           <a:prstGeom prst="rect">
             <a:avLst/>
@@ -16242,7 +15117,7 @@
         <p:spPr>
           <a:xfrm>
             <a:off x="720000" y="1080000"/>
-            <a:ext cx="8315280" cy="5668560"/>
+            <a:ext cx="8314920" cy="5668200"/>
           </a:xfrm>
           <a:prstGeom prst="rect">
             <a:avLst/>
@@ -16305,7 +15180,7 @@
         <p:spPr>
           <a:xfrm>
             <a:off x="478800" y="0"/>
-            <a:ext cx="2435040" cy="3399480"/>
+            <a:ext cx="2434680" cy="3399120"/>
           </a:xfrm>
           <a:prstGeom prst="flowChartDocument">
             <a:avLst/>
@@ -16360,7 +15235,7 @@
         <p:spPr>
           <a:xfrm>
             <a:off x="628560" y="171000"/>
-            <a:ext cx="2129040" cy="2370240"/>
+            <a:ext cx="2128680" cy="2369880"/>
           </a:xfrm>
           <a:prstGeom prst="rect">
             <a:avLst/>
@@ -16419,7 +15294,7 @@
         <p:spPr>
           <a:xfrm>
             <a:off x="3645000" y="640080"/>
-            <a:ext cx="4531680" cy="5577840"/>
+            <a:ext cx="4531320" cy="5577480"/>
           </a:xfrm>
           <a:prstGeom prst="rect">
             <a:avLst/>
@@ -16482,7 +15357,7 @@
         <p:spPr>
           <a:xfrm>
             <a:off x="0" y="651600"/>
-            <a:ext cx="9142920" cy="735480"/>
+            <a:ext cx="9142560" cy="735120"/>
           </a:xfrm>
           <a:prstGeom prst="rect">
             <a:avLst/>
@@ -16537,7 +15412,7 @@
         <p:spPr>
           <a:xfrm>
             <a:off x="417240" y="643320"/>
-            <a:ext cx="8407080" cy="743760"/>
+            <a:ext cx="8406720" cy="743400"/>
           </a:xfrm>
           <a:prstGeom prst="rect">
             <a:avLst/>
@@ -16596,7 +15471,7 @@
         <p:spPr>
           <a:xfrm>
             <a:off x="236880" y="1857960"/>
-            <a:ext cx="8607960" cy="4015080"/>
+            <a:ext cx="8607600" cy="4014720"/>
           </a:xfrm>
           <a:prstGeom prst="rect">
             <a:avLst/>
